--- a/output/wordlabs-hero-3day.pptx
+++ b/output/wordlabs-hero-3day.pptx
@@ -5622,7 +5622,7 @@
                 <a:ea typeface="Trebuchet MS" pitchFamily="34" charset="-122"/>
                 <a:cs typeface="Trebuchet MS" pitchFamily="34" charset="-120"/>
               </a:rPr>
-              <a:t>0</a:t>
+              <a:t>1</a:t>
             </a:r>
             <a:pPr algn="ctr" indent="0" marL="0">
               <a:buNone/>
@@ -6040,7 +6040,7 @@
                 <a:ea typeface="Calibri" pitchFamily="34" charset="-122"/>
                 <a:cs typeface="Calibri" pitchFamily="34" charset="-120"/>
               </a:rPr>
-              <a:t>The </a:t>
+              <a:t>The young girl showed great </a:t>
             </a:r>
             <a:pPr algn="l" indent="0" marL="0">
               <a:buNone/>
@@ -6057,7 +6057,7 @@
                 <a:ea typeface="Calibri" pitchFamily="34" charset="-122"/>
                 <a:cs typeface="Calibri" pitchFamily="34" charset="-120"/>
               </a:rPr>
-              <a:t>superhero</a:t>
+              <a:t>heroism</a:t>
             </a:r>
             <a:pPr algn="l" indent="0" marL="0">
               <a:buNone/>
@@ -6071,7 +6071,7 @@
                 <a:ea typeface="Calibri" pitchFamily="34" charset="-122"/>
                 <a:cs typeface="Calibri" pitchFamily="34" charset="-120"/>
               </a:rPr>
-              <a:t> showed true </a:t>
+              <a:t> when she rescued her friend, and everyone agreed it was a truly </a:t>
             </a:r>
             <a:pPr algn="l" indent="0" marL="0">
               <a:buNone/>
@@ -6088,7 +6088,7 @@
                 <a:ea typeface="Calibri" pitchFamily="34" charset="-122"/>
                 <a:cs typeface="Calibri" pitchFamily="34" charset="-120"/>
               </a:rPr>
-              <a:t>heroism</a:t>
+              <a:t>heroic</a:t>
             </a:r>
             <a:pPr algn="l" indent="0" marL="0">
               <a:buNone/>
@@ -6102,7 +6102,7 @@
                 <a:ea typeface="Calibri" pitchFamily="34" charset="-122"/>
                 <a:cs typeface="Calibri" pitchFamily="34" charset="-120"/>
               </a:rPr>
-              <a:t> when she protected the city from danger.</a:t>
+              <a:t> act.</a:t>
             </a:r>
             <a:endParaRPr lang="en-US" sz="1800" dirty="0"/>
           </a:p>
@@ -6257,7 +6257,7 @@
                 <a:ea typeface="Trebuchet MS" pitchFamily="34" charset="-122"/>
                 <a:cs typeface="Trebuchet MS" pitchFamily="34" charset="-120"/>
               </a:rPr>
-              <a:t>superhero</a:t>
+              <a:t>heroism</a:t>
             </a:r>
             <a:endParaRPr lang="en-US" sz="1400" dirty="0"/>
           </a:p>
@@ -6385,7 +6385,7 @@
                 <a:ea typeface="Trebuchet MS" pitchFamily="34" charset="-122"/>
                 <a:cs typeface="Trebuchet MS" pitchFamily="34" charset="-120"/>
               </a:rPr>
-              <a:t>heroism</a:t>
+              <a:t>heroic</a:t>
             </a:r>
             <a:endParaRPr lang="en-US" sz="1400" dirty="0"/>
           </a:p>
@@ -6855,7 +6855,7 @@
                 <a:ea typeface="Trebuchet MS" pitchFamily="34" charset="-122"/>
                 <a:cs typeface="Trebuchet MS" pitchFamily="34" charset="-120"/>
               </a:rPr>
-              <a:t>superhero</a:t>
+              <a:t>heroism</a:t>
             </a:r>
             <a:endParaRPr lang="en-US" sz="2800" dirty="0"/>
           </a:p>
@@ -7682,7 +7682,7 @@
                 <a:ea typeface="Trebuchet MS" pitchFamily="34" charset="-122"/>
                 <a:cs typeface="Trebuchet MS" pitchFamily="34" charset="-120"/>
               </a:rPr>
-              <a:t>superhero</a:t>
+              <a:t>heroism</a:t>
             </a:r>
             <a:endParaRPr lang="en-US" sz="2800" dirty="0"/>
           </a:p>
@@ -7771,11 +7771,11 @@
             </a:avLst>
           </a:prstGeom>
           <a:solidFill>
-            <a:srgbClr val="DDD6FE"/>
+            <a:srgbClr val="CCFBF1"/>
           </a:solidFill>
           <a:ln w="19050">
             <a:solidFill>
-              <a:srgbClr val="7C3AED"/>
+              <a:srgbClr val="0D9488"/>
             </a:solidFill>
             <a:prstDash val="solid"/>
           </a:ln>
@@ -7815,13 +7815,13 @@
             <a:r>
               <a:rPr lang="en-US" sz="1300" b="1" dirty="0">
                 <a:solidFill>
-                  <a:srgbClr val="4C1D95"/>
+                  <a:srgbClr val="0F766E"/>
                 </a:solidFill>
                 <a:latin typeface="Trebuchet MS" pitchFamily="34" charset="0"/>
                 <a:ea typeface="Trebuchet MS" pitchFamily="34" charset="-122"/>
                 <a:cs typeface="Trebuchet MS" pitchFamily="34" charset="-120"/>
               </a:rPr>
-              <a:t>super</a:t>
+              <a:t>hero</a:t>
             </a:r>
             <a:endParaRPr lang="en-US" sz="1300" dirty="0"/>
           </a:p>
@@ -7860,7 +7860,7 @@
                 <a:ea typeface="Calibri" pitchFamily="34" charset="-122"/>
                 <a:cs typeface="Calibri" pitchFamily="34" charset="-120"/>
               </a:rPr>
-              <a:t>above, beyond</a:t>
+              <a:t>brave, admired person</a:t>
             </a:r>
             <a:endParaRPr lang="en-US" sz="850" dirty="0"/>
           </a:p>
@@ -7883,11 +7883,11 @@
             </a:avLst>
           </a:prstGeom>
           <a:solidFill>
-            <a:srgbClr val="CCFBF1"/>
+            <a:srgbClr val="FCE7F3"/>
           </a:solidFill>
           <a:ln w="19050">
             <a:solidFill>
-              <a:srgbClr val="0D9488"/>
+              <a:srgbClr val="DB2777"/>
             </a:solidFill>
             <a:prstDash val="solid"/>
           </a:ln>
@@ -7927,13 +7927,13 @@
             <a:r>
               <a:rPr lang="en-US" sz="1300" b="1" dirty="0">
                 <a:solidFill>
-                  <a:srgbClr val="0F766E"/>
+                  <a:srgbClr val="9D174D"/>
                 </a:solidFill>
                 <a:latin typeface="Trebuchet MS" pitchFamily="34" charset="0"/>
                 <a:ea typeface="Trebuchet MS" pitchFamily="34" charset="-122"/>
                 <a:cs typeface="Trebuchet MS" pitchFamily="34" charset="-120"/>
               </a:rPr>
-              <a:t>hero</a:t>
+              <a:t>ism</a:t>
             </a:r>
             <a:endParaRPr lang="en-US" sz="1300" dirty="0"/>
           </a:p>
@@ -7972,7 +7972,7 @@
                 <a:ea typeface="Calibri" pitchFamily="34" charset="-122"/>
                 <a:cs typeface="Calibri" pitchFamily="34" charset="-120"/>
               </a:rPr>
-              <a:t>brave, admired person</a:t>
+              <a:t>quality or belief</a:t>
             </a:r>
             <a:endParaRPr lang="en-US" sz="850" dirty="0"/>
           </a:p>
@@ -8667,7 +8667,7 @@
                 <a:ea typeface="Trebuchet MS" pitchFamily="34" charset="-122"/>
                 <a:cs typeface="Trebuchet MS" pitchFamily="34" charset="-120"/>
               </a:rPr>
-              <a:t>superhero</a:t>
+              <a:t>heroism</a:t>
             </a:r>
             <a:endParaRPr lang="en-US" sz="2800" dirty="0"/>
           </a:p>
@@ -8756,11 +8756,11 @@
             </a:avLst>
           </a:prstGeom>
           <a:solidFill>
-            <a:srgbClr val="DDD6FE"/>
+            <a:srgbClr val="CCFBF1"/>
           </a:solidFill>
           <a:ln w="19050">
             <a:solidFill>
-              <a:srgbClr val="7C3AED"/>
+              <a:srgbClr val="0D9488"/>
             </a:solidFill>
             <a:prstDash val="solid"/>
           </a:ln>
@@ -8800,13 +8800,13 @@
             <a:r>
               <a:rPr lang="en-US" sz="1300" b="1" dirty="0">
                 <a:solidFill>
-                  <a:srgbClr val="4C1D95"/>
+                  <a:srgbClr val="0F766E"/>
                 </a:solidFill>
                 <a:latin typeface="Trebuchet MS" pitchFamily="34" charset="0"/>
                 <a:ea typeface="Trebuchet MS" pitchFamily="34" charset="-122"/>
                 <a:cs typeface="Trebuchet MS" pitchFamily="34" charset="-120"/>
               </a:rPr>
-              <a:t>super</a:t>
+              <a:t>hero</a:t>
             </a:r>
             <a:endParaRPr lang="en-US" sz="1300" dirty="0"/>
           </a:p>
@@ -8845,7 +8845,7 @@
                 <a:ea typeface="Calibri" pitchFamily="34" charset="-122"/>
                 <a:cs typeface="Calibri" pitchFamily="34" charset="-120"/>
               </a:rPr>
-              <a:t>above, beyond</a:t>
+              <a:t>brave, admired person</a:t>
             </a:r>
             <a:endParaRPr lang="en-US" sz="850" dirty="0"/>
           </a:p>
@@ -8868,11 +8868,11 @@
             </a:avLst>
           </a:prstGeom>
           <a:solidFill>
-            <a:srgbClr val="CCFBF1"/>
+            <a:srgbClr val="FCE7F3"/>
           </a:solidFill>
           <a:ln w="19050">
             <a:solidFill>
-              <a:srgbClr val="0D9488"/>
+              <a:srgbClr val="DB2777"/>
             </a:solidFill>
             <a:prstDash val="solid"/>
           </a:ln>
@@ -8912,13 +8912,13 @@
             <a:r>
               <a:rPr lang="en-US" sz="1300" b="1" dirty="0">
                 <a:solidFill>
-                  <a:srgbClr val="0F766E"/>
+                  <a:srgbClr val="9D174D"/>
                 </a:solidFill>
                 <a:latin typeface="Trebuchet MS" pitchFamily="34" charset="0"/>
                 <a:ea typeface="Trebuchet MS" pitchFamily="34" charset="-122"/>
                 <a:cs typeface="Trebuchet MS" pitchFamily="34" charset="-120"/>
               </a:rPr>
-              <a:t>hero</a:t>
+              <a:t>ism</a:t>
             </a:r>
             <a:endParaRPr lang="en-US" sz="1300" dirty="0"/>
           </a:p>
@@ -8957,7 +8957,7 @@
                 <a:ea typeface="Calibri" pitchFamily="34" charset="-122"/>
                 <a:cs typeface="Calibri" pitchFamily="34" charset="-120"/>
               </a:rPr>
-              <a:t>brave, admired person</a:t>
+              <a:t>quality or belief</a:t>
             </a:r>
             <a:endParaRPr lang="en-US" sz="850" dirty="0"/>
           </a:p>
@@ -9064,8 +9064,8 @@
         </p:nvSpPr>
         <p:spPr>
           <a:xfrm>
-            <a:off x="1975104" y="3364992"/>
-            <a:ext cx="1554480" cy="475488"/>
+            <a:off x="2313432" y="3364992"/>
+            <a:ext cx="1645920" cy="475488"/>
           </a:xfrm>
           <a:prstGeom prst="rect">
             <a:avLst>
@@ -9091,8 +9091,8 @@
         </p:nvSpPr>
         <p:spPr>
           <a:xfrm>
-            <a:off x="1975104" y="3364992"/>
-            <a:ext cx="1554480" cy="475488"/>
+            <a:off x="2313432" y="3364992"/>
+            <a:ext cx="1645920" cy="475488"/>
           </a:xfrm>
           <a:prstGeom prst="rect">
             <a:avLst/>
@@ -9116,7 +9116,7 @@
                 <a:ea typeface="Trebuchet MS" pitchFamily="34" charset="-122"/>
                 <a:cs typeface="Trebuchet MS" pitchFamily="34" charset="-120"/>
               </a:rPr>
-              <a:t>su</a:t>
+              <a:t>he</a:t>
             </a:r>
             <a:endParaRPr lang="en-US" sz="1400" dirty="0"/>
           </a:p>
@@ -9130,8 +9130,8 @@
         </p:nvSpPr>
         <p:spPr>
           <a:xfrm>
-            <a:off x="3529584" y="3364992"/>
-            <a:ext cx="73152" cy="475488"/>
+            <a:off x="3959352" y="3364992"/>
+            <a:ext cx="411480" cy="475488"/>
           </a:xfrm>
           <a:prstGeom prst="rect">
             <a:avLst/>
@@ -9169,8 +9169,8 @@
         </p:nvSpPr>
         <p:spPr>
           <a:xfrm>
-            <a:off x="3602736" y="3364992"/>
-            <a:ext cx="1554480" cy="475488"/>
+            <a:off x="4370832" y="3364992"/>
+            <a:ext cx="1645920" cy="475488"/>
           </a:xfrm>
           <a:prstGeom prst="rect">
             <a:avLst>
@@ -9196,8 +9196,8 @@
         </p:nvSpPr>
         <p:spPr>
           <a:xfrm>
-            <a:off x="3602736" y="3364992"/>
-            <a:ext cx="1554480" cy="475488"/>
+            <a:off x="4370832" y="3364992"/>
+            <a:ext cx="1645920" cy="475488"/>
           </a:xfrm>
           <a:prstGeom prst="rect">
             <a:avLst/>
@@ -9221,7 +9221,7 @@
                 <a:ea typeface="Trebuchet MS" pitchFamily="34" charset="-122"/>
                 <a:cs typeface="Trebuchet MS" pitchFamily="34" charset="-120"/>
               </a:rPr>
-              <a:t>per</a:t>
+              <a:t>ro</a:t>
             </a:r>
             <a:endParaRPr lang="en-US" sz="1400" dirty="0"/>
           </a:p>
@@ -9235,8 +9235,8 @@
         </p:nvSpPr>
         <p:spPr>
           <a:xfrm>
-            <a:off x="5157216" y="3364992"/>
-            <a:ext cx="73152" cy="475488"/>
+            <a:off x="6016752" y="3364992"/>
+            <a:ext cx="411480" cy="475488"/>
           </a:xfrm>
           <a:prstGeom prst="rect">
             <a:avLst/>
@@ -9274,8 +9274,8 @@
         </p:nvSpPr>
         <p:spPr>
           <a:xfrm>
-            <a:off x="5230368" y="3364992"/>
-            <a:ext cx="1554480" cy="475488"/>
+            <a:off x="6428232" y="3364992"/>
+            <a:ext cx="1645920" cy="475488"/>
           </a:xfrm>
           <a:prstGeom prst="rect">
             <a:avLst>
@@ -9301,8 +9301,8 @@
         </p:nvSpPr>
         <p:spPr>
           <a:xfrm>
-            <a:off x="5230368" y="3364992"/>
-            <a:ext cx="1554480" cy="475488"/>
+            <a:off x="6428232" y="3364992"/>
+            <a:ext cx="1645920" cy="475488"/>
           </a:xfrm>
           <a:prstGeom prst="rect">
             <a:avLst/>
@@ -9326,7 +9326,7 @@
                 <a:ea typeface="Trebuchet MS" pitchFamily="34" charset="-122"/>
                 <a:cs typeface="Trebuchet MS" pitchFamily="34" charset="-120"/>
               </a:rPr>
-              <a:t>he</a:t>
+              <a:t>ism</a:t>
             </a:r>
             <a:endParaRPr lang="en-US" sz="1400" dirty="0"/>
           </a:p>
@@ -9334,119 +9334,80 @@
       </p:sp>
       <p:sp>
         <p:nvSpPr>
-          <p:cNvPr id="33" name="Text 31"/>
-          <p:cNvSpPr/>
-          <p:nvPr/>
-        </p:nvSpPr>
-        <p:spPr>
-          <a:xfrm>
-            <a:off x="6784848" y="3364992"/>
-            <a:ext cx="73152" cy="475488"/>
-          </a:xfrm>
-          <a:prstGeom prst="rect">
-            <a:avLst/>
-          </a:prstGeom>
-          <a:noFill/>
-          <a:ln/>
-        </p:spPr>
-        <p:txBody>
-          <a:bodyPr wrap="square" lIns="0" tIns="0" rIns="0" bIns="0" rtlCol="0" anchor="ctr"/>
-          <a:lstStyle/>
-          <a:p>
-            <a:pPr algn="ctr" indent="0" marL="0">
-              <a:buNone/>
-            </a:pPr>
-            <a:r>
-              <a:rPr lang="en-US" sz="1600" b="1" dirty="0">
-                <a:solidFill>
-                  <a:srgbClr val="0D9488"/>
+          <p:cNvPr id="33" name="Shape 31"/>
+          <p:cNvSpPr/>
+          <p:nvPr/>
+        </p:nvSpPr>
+        <p:spPr>
+          <a:xfrm>
+            <a:off x="365760" y="4096512"/>
+            <a:ext cx="1371600" cy="804672"/>
+          </a:xfrm>
+          <a:prstGeom prst="rect">
+            <a:avLst>
+              <a:gd name="adj" fmla="val 6818"/>
+            </a:avLst>
+          </a:prstGeom>
+          <a:solidFill>
+            <a:srgbClr val="E2E8F0"/>
+          </a:solidFill>
+          <a:ln w="12700">
+            <a:solidFill>
+              <a:srgbClr val="E2E8F0"/>
+            </a:solidFill>
+            <a:prstDash val="solid"/>
+          </a:ln>
+        </p:spPr>
+      </p:sp>
+      <p:sp>
+        <p:nvSpPr>
+          <p:cNvPr id="34" name="Text 32"/>
+          <p:cNvSpPr/>
+          <p:nvPr/>
+        </p:nvSpPr>
+        <p:spPr>
+          <a:xfrm>
+            <a:off x="365760" y="4096512"/>
+            <a:ext cx="1371600" cy="804672"/>
+          </a:xfrm>
+          <a:prstGeom prst="rect">
+            <a:avLst/>
+          </a:prstGeom>
+          <a:noFill/>
+          <a:ln/>
+        </p:spPr>
+        <p:txBody>
+          <a:bodyPr wrap="square" lIns="0" tIns="0" rIns="0" bIns="0" rtlCol="0" anchor="ctr"/>
+          <a:lstStyle/>
+          <a:p>
+            <a:pPr algn="ctr" indent="0" marL="0">
+              <a:buNone/>
+            </a:pPr>
+            <a:r>
+              <a:rPr lang="en-US" sz="1100" b="1" dirty="0">
+                <a:solidFill>
+                  <a:srgbClr val="475569"/>
                 </a:solidFill>
                 <a:latin typeface="Trebuchet MS" pitchFamily="34" charset="0"/>
                 <a:ea typeface="Trebuchet MS" pitchFamily="34" charset="-122"/>
                 <a:cs typeface="Trebuchet MS" pitchFamily="34" charset="-120"/>
               </a:rPr>
-              <a:t>·</a:t>
-            </a:r>
-            <a:endParaRPr lang="en-US" sz="1600" dirty="0"/>
-          </a:p>
-        </p:txBody>
-      </p:sp>
-      <p:sp>
-        <p:nvSpPr>
-          <p:cNvPr id="34" name="Shape 32"/>
-          <p:cNvSpPr/>
-          <p:nvPr/>
-        </p:nvSpPr>
-        <p:spPr>
-          <a:xfrm>
-            <a:off x="6858000" y="3364992"/>
-            <a:ext cx="1554480" cy="475488"/>
-          </a:xfrm>
-          <a:prstGeom prst="rect">
-            <a:avLst>
-              <a:gd name="adj" fmla="val 9615"/>
-            </a:avLst>
-          </a:prstGeom>
-          <a:solidFill>
-            <a:srgbClr val="FFFFFF"/>
-          </a:solidFill>
-          <a:ln w="12700">
-            <a:solidFill>
-              <a:srgbClr val="0D9488"/>
-            </a:solidFill>
-            <a:prstDash val="solid"/>
-          </a:ln>
-        </p:spPr>
-      </p:sp>
-      <p:sp>
-        <p:nvSpPr>
-          <p:cNvPr id="35" name="Text 33"/>
-          <p:cNvSpPr/>
-          <p:nvPr/>
-        </p:nvSpPr>
-        <p:spPr>
-          <a:xfrm>
-            <a:off x="6858000" y="3364992"/>
-            <a:ext cx="1554480" cy="475488"/>
-          </a:xfrm>
-          <a:prstGeom prst="rect">
-            <a:avLst/>
-          </a:prstGeom>
-          <a:noFill/>
-          <a:ln/>
-        </p:spPr>
-        <p:txBody>
-          <a:bodyPr wrap="square" lIns="0" tIns="0" rIns="0" bIns="0" rtlCol="0" anchor="ctr"/>
-          <a:lstStyle/>
-          <a:p>
-            <a:pPr algn="ctr" indent="0" marL="0">
-              <a:buNone/>
-            </a:pPr>
-            <a:r>
-              <a:rPr lang="en-US" sz="1400" b="1" dirty="0">
-                <a:solidFill>
-                  <a:srgbClr val="0D9488"/>
-                </a:solidFill>
-                <a:latin typeface="Trebuchet MS" pitchFamily="34" charset="0"/>
-                <a:ea typeface="Trebuchet MS" pitchFamily="34" charset="-122"/>
-                <a:cs typeface="Trebuchet MS" pitchFamily="34" charset="-120"/>
-              </a:rPr>
-              <a:t>ro</a:t>
-            </a:r>
-            <a:endParaRPr lang="en-US" sz="1400" dirty="0"/>
-          </a:p>
-        </p:txBody>
-      </p:sp>
-      <p:sp>
-        <p:nvSpPr>
-          <p:cNvPr id="36" name="Shape 34"/>
-          <p:cNvSpPr/>
-          <p:nvPr/>
-        </p:nvSpPr>
-        <p:spPr>
-          <a:xfrm>
-            <a:off x="365760" y="4096512"/>
-            <a:ext cx="1371600" cy="804672"/>
+              <a:t>Phonemes</a:t>
+            </a:r>
+            <a:endParaRPr lang="en-US" sz="1100" dirty="0"/>
+          </a:p>
+        </p:txBody>
+      </p:sp>
+      <p:sp>
+        <p:nvSpPr>
+          <p:cNvPr id="35" name="Shape 33"/>
+          <p:cNvSpPr/>
+          <p:nvPr/>
+        </p:nvSpPr>
+        <p:spPr>
+          <a:xfrm>
+            <a:off x="1874520" y="4096512"/>
+            <a:ext cx="6903720" cy="804672"/>
           </a:xfrm>
           <a:prstGeom prst="rect">
             <a:avLst>
@@ -9454,85 +9415,19 @@
             </a:avLst>
           </a:prstGeom>
           <a:solidFill>
-            <a:srgbClr val="E2E8F0"/>
+            <a:srgbClr val="F8FAFC"/>
           </a:solidFill>
           <a:ln w="12700">
             <a:solidFill>
               <a:srgbClr val="E2E8F0"/>
             </a:solidFill>
-            <a:prstDash val="solid"/>
-          </a:ln>
-        </p:spPr>
-      </p:sp>
-      <p:sp>
-        <p:nvSpPr>
-          <p:cNvPr id="37" name="Text 35"/>
-          <p:cNvSpPr/>
-          <p:nvPr/>
-        </p:nvSpPr>
-        <p:spPr>
-          <a:xfrm>
-            <a:off x="365760" y="4096512"/>
-            <a:ext cx="1371600" cy="804672"/>
-          </a:xfrm>
-          <a:prstGeom prst="rect">
-            <a:avLst/>
-          </a:prstGeom>
-          <a:noFill/>
-          <a:ln/>
-        </p:spPr>
-        <p:txBody>
-          <a:bodyPr wrap="square" lIns="0" tIns="0" rIns="0" bIns="0" rtlCol="0" anchor="ctr"/>
-          <a:lstStyle/>
-          <a:p>
-            <a:pPr algn="ctr" indent="0" marL="0">
-              <a:buNone/>
-            </a:pPr>
-            <a:r>
-              <a:rPr lang="en-US" sz="1100" b="1" dirty="0">
-                <a:solidFill>
-                  <a:srgbClr val="475569"/>
-                </a:solidFill>
-                <a:latin typeface="Trebuchet MS" pitchFamily="34" charset="0"/>
-                <a:ea typeface="Trebuchet MS" pitchFamily="34" charset="-122"/>
-                <a:cs typeface="Trebuchet MS" pitchFamily="34" charset="-120"/>
-              </a:rPr>
-              <a:t>Phonemes</a:t>
-            </a:r>
-            <a:endParaRPr lang="en-US" sz="1100" dirty="0"/>
-          </a:p>
-        </p:txBody>
-      </p:sp>
-      <p:sp>
-        <p:nvSpPr>
-          <p:cNvPr id="38" name="Shape 36"/>
-          <p:cNvSpPr/>
-          <p:nvPr/>
-        </p:nvSpPr>
-        <p:spPr>
-          <a:xfrm>
-            <a:off x="1874520" y="4096512"/>
-            <a:ext cx="6903720" cy="804672"/>
-          </a:xfrm>
-          <a:prstGeom prst="rect">
-            <a:avLst>
-              <a:gd name="adj" fmla="val 6818"/>
-            </a:avLst>
-          </a:prstGeom>
-          <a:solidFill>
-            <a:srgbClr val="F8FAFC"/>
-          </a:solidFill>
-          <a:ln w="12700">
-            <a:solidFill>
-              <a:srgbClr val="E2E8F0"/>
-            </a:solidFill>
             <a:prstDash val="dash"/>
           </a:ln>
         </p:spPr>
       </p:sp>
       <p:sp>
         <p:nvSpPr>
-          <p:cNvPr id="39" name="Text 37"/>
+          <p:cNvPr id="36" name="Text 34"/>
           <p:cNvSpPr/>
           <p:nvPr/>
         </p:nvSpPr>
@@ -9994,7 +9889,7 @@
                 <a:ea typeface="Trebuchet MS" pitchFamily="34" charset="-122"/>
                 <a:cs typeface="Trebuchet MS" pitchFamily="34" charset="-120"/>
               </a:rPr>
-              <a:t>superhero</a:t>
+              <a:t>heroism</a:t>
             </a:r>
             <a:endParaRPr lang="en-US" sz="2800" dirty="0"/>
           </a:p>
@@ -10083,11 +9978,11 @@
             </a:avLst>
           </a:prstGeom>
           <a:solidFill>
-            <a:srgbClr val="DDD6FE"/>
+            <a:srgbClr val="CCFBF1"/>
           </a:solidFill>
           <a:ln w="19050">
             <a:solidFill>
-              <a:srgbClr val="7C3AED"/>
+              <a:srgbClr val="0D9488"/>
             </a:solidFill>
             <a:prstDash val="solid"/>
           </a:ln>
@@ -10127,13 +10022,13 @@
             <a:r>
               <a:rPr lang="en-US" sz="1300" b="1" dirty="0">
                 <a:solidFill>
-                  <a:srgbClr val="4C1D95"/>
+                  <a:srgbClr val="0F766E"/>
                 </a:solidFill>
                 <a:latin typeface="Trebuchet MS" pitchFamily="34" charset="0"/>
                 <a:ea typeface="Trebuchet MS" pitchFamily="34" charset="-122"/>
                 <a:cs typeface="Trebuchet MS" pitchFamily="34" charset="-120"/>
               </a:rPr>
-              <a:t>super</a:t>
+              <a:t>hero</a:t>
             </a:r>
             <a:endParaRPr lang="en-US" sz="1300" dirty="0"/>
           </a:p>
@@ -10172,7 +10067,7 @@
                 <a:ea typeface="Calibri" pitchFamily="34" charset="-122"/>
                 <a:cs typeface="Calibri" pitchFamily="34" charset="-120"/>
               </a:rPr>
-              <a:t>above, beyond</a:t>
+              <a:t>brave, admired person</a:t>
             </a:r>
             <a:endParaRPr lang="en-US" sz="850" dirty="0"/>
           </a:p>
@@ -10195,11 +10090,11 @@
             </a:avLst>
           </a:prstGeom>
           <a:solidFill>
-            <a:srgbClr val="CCFBF1"/>
+            <a:srgbClr val="FCE7F3"/>
           </a:solidFill>
           <a:ln w="19050">
             <a:solidFill>
-              <a:srgbClr val="0D9488"/>
+              <a:srgbClr val="DB2777"/>
             </a:solidFill>
             <a:prstDash val="solid"/>
           </a:ln>
@@ -10239,13 +10134,13 @@
             <a:r>
               <a:rPr lang="en-US" sz="1300" b="1" dirty="0">
                 <a:solidFill>
-                  <a:srgbClr val="0F766E"/>
+                  <a:srgbClr val="9D174D"/>
                 </a:solidFill>
                 <a:latin typeface="Trebuchet MS" pitchFamily="34" charset="0"/>
                 <a:ea typeface="Trebuchet MS" pitchFamily="34" charset="-122"/>
                 <a:cs typeface="Trebuchet MS" pitchFamily="34" charset="-120"/>
               </a:rPr>
-              <a:t>hero</a:t>
+              <a:t>ism</a:t>
             </a:r>
             <a:endParaRPr lang="en-US" sz="1300" dirty="0"/>
           </a:p>
@@ -10284,7 +10179,7 @@
                 <a:ea typeface="Calibri" pitchFamily="34" charset="-122"/>
                 <a:cs typeface="Calibri" pitchFamily="34" charset="-120"/>
               </a:rPr>
-              <a:t>brave, admired person</a:t>
+              <a:t>quality or belief</a:t>
             </a:r>
             <a:endParaRPr lang="en-US" sz="850" dirty="0"/>
           </a:p>
@@ -10391,8 +10286,8 @@
         </p:nvSpPr>
         <p:spPr>
           <a:xfrm>
-            <a:off x="1975104" y="3364992"/>
-            <a:ext cx="1554480" cy="475488"/>
+            <a:off x="2313432" y="3364992"/>
+            <a:ext cx="1645920" cy="475488"/>
           </a:xfrm>
           <a:prstGeom prst="rect">
             <a:avLst>
@@ -10418,8 +10313,8 @@
         </p:nvSpPr>
         <p:spPr>
           <a:xfrm>
-            <a:off x="1975104" y="3364992"/>
-            <a:ext cx="1554480" cy="475488"/>
+            <a:off x="2313432" y="3364992"/>
+            <a:ext cx="1645920" cy="475488"/>
           </a:xfrm>
           <a:prstGeom prst="rect">
             <a:avLst/>
@@ -10443,7 +10338,7 @@
                 <a:ea typeface="Trebuchet MS" pitchFamily="34" charset="-122"/>
                 <a:cs typeface="Trebuchet MS" pitchFamily="34" charset="-120"/>
               </a:rPr>
-              <a:t>su</a:t>
+              <a:t>he</a:t>
             </a:r>
             <a:endParaRPr lang="en-US" sz="1400" dirty="0"/>
           </a:p>
@@ -10457,8 +10352,8 @@
         </p:nvSpPr>
         <p:spPr>
           <a:xfrm>
-            <a:off x="3529584" y="3364992"/>
-            <a:ext cx="73152" cy="475488"/>
+            <a:off x="3959352" y="3364992"/>
+            <a:ext cx="411480" cy="475488"/>
           </a:xfrm>
           <a:prstGeom prst="rect">
             <a:avLst/>
@@ -10496,8 +10391,8 @@
         </p:nvSpPr>
         <p:spPr>
           <a:xfrm>
-            <a:off x="3602736" y="3364992"/>
-            <a:ext cx="1554480" cy="475488"/>
+            <a:off x="4370832" y="3364992"/>
+            <a:ext cx="1645920" cy="475488"/>
           </a:xfrm>
           <a:prstGeom prst="rect">
             <a:avLst>
@@ -10523,8 +10418,8 @@
         </p:nvSpPr>
         <p:spPr>
           <a:xfrm>
-            <a:off x="3602736" y="3364992"/>
-            <a:ext cx="1554480" cy="475488"/>
+            <a:off x="4370832" y="3364992"/>
+            <a:ext cx="1645920" cy="475488"/>
           </a:xfrm>
           <a:prstGeom prst="rect">
             <a:avLst/>
@@ -10548,7 +10443,7 @@
                 <a:ea typeface="Trebuchet MS" pitchFamily="34" charset="-122"/>
                 <a:cs typeface="Trebuchet MS" pitchFamily="34" charset="-120"/>
               </a:rPr>
-              <a:t>per</a:t>
+              <a:t>ro</a:t>
             </a:r>
             <a:endParaRPr lang="en-US" sz="1400" dirty="0"/>
           </a:p>
@@ -10562,8 +10457,8 @@
         </p:nvSpPr>
         <p:spPr>
           <a:xfrm>
-            <a:off x="5157216" y="3364992"/>
-            <a:ext cx="73152" cy="475488"/>
+            <a:off x="6016752" y="3364992"/>
+            <a:ext cx="411480" cy="475488"/>
           </a:xfrm>
           <a:prstGeom prst="rect">
             <a:avLst/>
@@ -10601,8 +10496,8 @@
         </p:nvSpPr>
         <p:spPr>
           <a:xfrm>
-            <a:off x="5230368" y="3364992"/>
-            <a:ext cx="1554480" cy="475488"/>
+            <a:off x="6428232" y="3364992"/>
+            <a:ext cx="1645920" cy="475488"/>
           </a:xfrm>
           <a:prstGeom prst="rect">
             <a:avLst>
@@ -10628,8 +10523,8 @@
         </p:nvSpPr>
         <p:spPr>
           <a:xfrm>
-            <a:off x="5230368" y="3364992"/>
-            <a:ext cx="1554480" cy="475488"/>
+            <a:off x="6428232" y="3364992"/>
+            <a:ext cx="1645920" cy="475488"/>
           </a:xfrm>
           <a:prstGeom prst="rect">
             <a:avLst/>
@@ -10653,7 +10548,7 @@
                 <a:ea typeface="Trebuchet MS" pitchFamily="34" charset="-122"/>
                 <a:cs typeface="Trebuchet MS" pitchFamily="34" charset="-120"/>
               </a:rPr>
-              <a:t>he</a:t>
+              <a:t>ism</a:t>
             </a:r>
             <a:endParaRPr lang="en-US" sz="1400" dirty="0"/>
           </a:p>
@@ -10661,211 +10556,238 @@
       </p:sp>
       <p:sp>
         <p:nvSpPr>
-          <p:cNvPr id="33" name="Text 31"/>
-          <p:cNvSpPr/>
-          <p:nvPr/>
-        </p:nvSpPr>
-        <p:spPr>
-          <a:xfrm>
-            <a:off x="6784848" y="3364992"/>
-            <a:ext cx="73152" cy="475488"/>
-          </a:xfrm>
-          <a:prstGeom prst="rect">
-            <a:avLst/>
-          </a:prstGeom>
-          <a:noFill/>
-          <a:ln/>
-        </p:spPr>
-        <p:txBody>
-          <a:bodyPr wrap="square" lIns="0" tIns="0" rIns="0" bIns="0" rtlCol="0" anchor="ctr"/>
-          <a:lstStyle/>
-          <a:p>
-            <a:pPr algn="ctr" indent="0" marL="0">
-              <a:buNone/>
-            </a:pPr>
-            <a:r>
-              <a:rPr lang="en-US" sz="1600" b="1" dirty="0">
-                <a:solidFill>
-                  <a:srgbClr val="0D9488"/>
+          <p:cNvPr id="33" name="Shape 31"/>
+          <p:cNvSpPr/>
+          <p:nvPr/>
+        </p:nvSpPr>
+        <p:spPr>
+          <a:xfrm>
+            <a:off x="365760" y="4096512"/>
+            <a:ext cx="1371600" cy="804672"/>
+          </a:xfrm>
+          <a:prstGeom prst="rect">
+            <a:avLst>
+              <a:gd name="adj" fmla="val 6818"/>
+            </a:avLst>
+          </a:prstGeom>
+          <a:solidFill>
+            <a:srgbClr val="E2E8F0"/>
+          </a:solidFill>
+          <a:ln w="12700">
+            <a:solidFill>
+              <a:srgbClr val="E2E8F0"/>
+            </a:solidFill>
+            <a:prstDash val="solid"/>
+          </a:ln>
+        </p:spPr>
+      </p:sp>
+      <p:sp>
+        <p:nvSpPr>
+          <p:cNvPr id="34" name="Text 32"/>
+          <p:cNvSpPr/>
+          <p:nvPr/>
+        </p:nvSpPr>
+        <p:spPr>
+          <a:xfrm>
+            <a:off x="365760" y="4096512"/>
+            <a:ext cx="1371600" cy="804672"/>
+          </a:xfrm>
+          <a:prstGeom prst="rect">
+            <a:avLst/>
+          </a:prstGeom>
+          <a:noFill/>
+          <a:ln/>
+        </p:spPr>
+        <p:txBody>
+          <a:bodyPr wrap="square" lIns="0" tIns="0" rIns="0" bIns="0" rtlCol="0" anchor="ctr"/>
+          <a:lstStyle/>
+          <a:p>
+            <a:pPr algn="ctr" indent="0" marL="0">
+              <a:buNone/>
+            </a:pPr>
+            <a:r>
+              <a:rPr lang="en-US" sz="1100" b="1" dirty="0">
+                <a:solidFill>
+                  <a:srgbClr val="475569"/>
                 </a:solidFill>
                 <a:latin typeface="Trebuchet MS" pitchFamily="34" charset="0"/>
                 <a:ea typeface="Trebuchet MS" pitchFamily="34" charset="-122"/>
                 <a:cs typeface="Trebuchet MS" pitchFamily="34" charset="-120"/>
               </a:rPr>
-              <a:t>·</a:t>
-            </a:r>
-            <a:endParaRPr lang="en-US" sz="1600" dirty="0"/>
-          </a:p>
-        </p:txBody>
-      </p:sp>
-      <p:sp>
-        <p:nvSpPr>
-          <p:cNvPr id="34" name="Shape 32"/>
-          <p:cNvSpPr/>
-          <p:nvPr/>
-        </p:nvSpPr>
-        <p:spPr>
-          <a:xfrm>
-            <a:off x="6858000" y="3364992"/>
-            <a:ext cx="1554480" cy="475488"/>
+              <a:t>Phonemes</a:t>
+            </a:r>
+            <a:endParaRPr lang="en-US" sz="1100" dirty="0"/>
+          </a:p>
+        </p:txBody>
+      </p:sp>
+      <p:sp>
+        <p:nvSpPr>
+          <p:cNvPr id="35" name="Shape 33"/>
+          <p:cNvSpPr/>
+          <p:nvPr/>
+        </p:nvSpPr>
+        <p:spPr>
+          <a:xfrm>
+            <a:off x="1874520" y="4096512"/>
+            <a:ext cx="6903720" cy="658368"/>
           </a:xfrm>
           <a:prstGeom prst="rect">
             <a:avLst>
-              <a:gd name="adj" fmla="val 9615"/>
+              <a:gd name="adj" fmla="val 8333"/>
             </a:avLst>
           </a:prstGeom>
           <a:solidFill>
+            <a:srgbClr val="FCE7F3"/>
+          </a:solidFill>
+          <a:ln w="12700">
+            <a:solidFill>
+              <a:srgbClr val="DB2777"/>
+            </a:solidFill>
+            <a:prstDash val="solid"/>
+          </a:ln>
+        </p:spPr>
+      </p:sp>
+      <p:sp>
+        <p:nvSpPr>
+          <p:cNvPr id="36" name="Shape 34"/>
+          <p:cNvSpPr/>
+          <p:nvPr/>
+        </p:nvSpPr>
+        <p:spPr>
+          <a:xfrm>
+            <a:off x="2124837" y="4169664"/>
+            <a:ext cx="685800" cy="475488"/>
+          </a:xfrm>
+          <a:prstGeom prst="rect">
+            <a:avLst>
+              <a:gd name="adj" fmla="val 7692"/>
+            </a:avLst>
+          </a:prstGeom>
+          <a:solidFill>
             <a:srgbClr val="FFFFFF"/>
           </a:solidFill>
           <a:ln w="12700">
             <a:solidFill>
-              <a:srgbClr val="0D9488"/>
-            </a:solidFill>
-            <a:prstDash val="solid"/>
-          </a:ln>
-        </p:spPr>
-      </p:sp>
-      <p:sp>
-        <p:nvSpPr>
-          <p:cNvPr id="35" name="Text 33"/>
-          <p:cNvSpPr/>
-          <p:nvPr/>
-        </p:nvSpPr>
-        <p:spPr>
-          <a:xfrm>
-            <a:off x="6858000" y="3364992"/>
-            <a:ext cx="1554480" cy="475488"/>
-          </a:xfrm>
-          <a:prstGeom prst="rect">
-            <a:avLst/>
-          </a:prstGeom>
-          <a:noFill/>
-          <a:ln/>
-        </p:spPr>
-        <p:txBody>
-          <a:bodyPr wrap="square" lIns="0" tIns="0" rIns="0" bIns="0" rtlCol="0" anchor="ctr"/>
-          <a:lstStyle/>
-          <a:p>
-            <a:pPr algn="ctr" indent="0" marL="0">
-              <a:buNone/>
-            </a:pPr>
-            <a:r>
-              <a:rPr lang="en-US" sz="1400" b="1" dirty="0">
-                <a:solidFill>
-                  <a:srgbClr val="0D9488"/>
+              <a:srgbClr val="DB2777"/>
+            </a:solidFill>
+            <a:prstDash val="solid"/>
+          </a:ln>
+        </p:spPr>
+      </p:sp>
+      <p:sp>
+        <p:nvSpPr>
+          <p:cNvPr id="37" name="Text 35"/>
+          <p:cNvSpPr/>
+          <p:nvPr/>
+        </p:nvSpPr>
+        <p:spPr>
+          <a:xfrm>
+            <a:off x="2124837" y="4169664"/>
+            <a:ext cx="685800" cy="475488"/>
+          </a:xfrm>
+          <a:prstGeom prst="rect">
+            <a:avLst/>
+          </a:prstGeom>
+          <a:noFill/>
+          <a:ln/>
+        </p:spPr>
+        <p:txBody>
+          <a:bodyPr wrap="square" lIns="0" tIns="0" rIns="0" bIns="0" rtlCol="0" anchor="ctr"/>
+          <a:lstStyle/>
+          <a:p>
+            <a:pPr algn="ctr" indent="0" marL="0">
+              <a:buNone/>
+            </a:pPr>
+            <a:r>
+              <a:rPr lang="en-US" sz="900" b="1" dirty="0">
+                <a:solidFill>
+                  <a:srgbClr val="9D174D"/>
                 </a:solidFill>
                 <a:latin typeface="Trebuchet MS" pitchFamily="34" charset="0"/>
                 <a:ea typeface="Trebuchet MS" pitchFamily="34" charset="-122"/>
                 <a:cs typeface="Trebuchet MS" pitchFamily="34" charset="-120"/>
               </a:rPr>
-              <a:t>ro</a:t>
-            </a:r>
-            <a:endParaRPr lang="en-US" sz="1400" dirty="0"/>
-          </a:p>
-        </p:txBody>
-      </p:sp>
-      <p:sp>
-        <p:nvSpPr>
-          <p:cNvPr id="36" name="Shape 34"/>
-          <p:cNvSpPr/>
-          <p:nvPr/>
-        </p:nvSpPr>
-        <p:spPr>
-          <a:xfrm>
-            <a:off x="365760" y="4096512"/>
-            <a:ext cx="1371600" cy="804672"/>
+              <a:t>h</a:t>
+            </a:r>
+            <a:endParaRPr lang="en-US" sz="900" dirty="0"/>
+          </a:p>
+        </p:txBody>
+      </p:sp>
+      <p:sp>
+        <p:nvSpPr>
+          <p:cNvPr id="38" name="Shape 36"/>
+          <p:cNvSpPr/>
+          <p:nvPr/>
+        </p:nvSpPr>
+        <p:spPr>
+          <a:xfrm>
+            <a:off x="3033522" y="4169664"/>
+            <a:ext cx="685800" cy="475488"/>
           </a:xfrm>
           <a:prstGeom prst="rect">
             <a:avLst>
-              <a:gd name="adj" fmla="val 6818"/>
+              <a:gd name="adj" fmla="val 7692"/>
             </a:avLst>
           </a:prstGeom>
           <a:solidFill>
-            <a:srgbClr val="E2E8F0"/>
-          </a:solidFill>
-          <a:ln w="12700">
-            <a:solidFill>
-              <a:srgbClr val="E2E8F0"/>
-            </a:solidFill>
-            <a:prstDash val="solid"/>
-          </a:ln>
-        </p:spPr>
-      </p:sp>
-      <p:sp>
-        <p:nvSpPr>
-          <p:cNvPr id="37" name="Text 35"/>
-          <p:cNvSpPr/>
-          <p:nvPr/>
-        </p:nvSpPr>
-        <p:spPr>
-          <a:xfrm>
-            <a:off x="365760" y="4096512"/>
-            <a:ext cx="1371600" cy="804672"/>
-          </a:xfrm>
-          <a:prstGeom prst="rect">
-            <a:avLst/>
-          </a:prstGeom>
-          <a:noFill/>
-          <a:ln/>
-        </p:spPr>
-        <p:txBody>
-          <a:bodyPr wrap="square" lIns="0" tIns="0" rIns="0" bIns="0" rtlCol="0" anchor="ctr"/>
-          <a:lstStyle/>
-          <a:p>
-            <a:pPr algn="ctr" indent="0" marL="0">
-              <a:buNone/>
-            </a:pPr>
-            <a:r>
-              <a:rPr lang="en-US" sz="1100" b="1" dirty="0">
-                <a:solidFill>
-                  <a:srgbClr val="475569"/>
+            <a:srgbClr val="FFFFFF"/>
+          </a:solidFill>
+          <a:ln w="12700">
+            <a:solidFill>
+              <a:srgbClr val="DB2777"/>
+            </a:solidFill>
+            <a:prstDash val="solid"/>
+          </a:ln>
+        </p:spPr>
+      </p:sp>
+      <p:sp>
+        <p:nvSpPr>
+          <p:cNvPr id="39" name="Text 37"/>
+          <p:cNvSpPr/>
+          <p:nvPr/>
+        </p:nvSpPr>
+        <p:spPr>
+          <a:xfrm>
+            <a:off x="3033522" y="4169664"/>
+            <a:ext cx="685800" cy="475488"/>
+          </a:xfrm>
+          <a:prstGeom prst="rect">
+            <a:avLst/>
+          </a:prstGeom>
+          <a:noFill/>
+          <a:ln/>
+        </p:spPr>
+        <p:txBody>
+          <a:bodyPr wrap="square" lIns="0" tIns="0" rIns="0" bIns="0" rtlCol="0" anchor="ctr"/>
+          <a:lstStyle/>
+          <a:p>
+            <a:pPr algn="ctr" indent="0" marL="0">
+              <a:buNone/>
+            </a:pPr>
+            <a:r>
+              <a:rPr lang="en-US" sz="900" b="1" dirty="0">
+                <a:solidFill>
+                  <a:srgbClr val="9D174D"/>
                 </a:solidFill>
                 <a:latin typeface="Trebuchet MS" pitchFamily="34" charset="0"/>
                 <a:ea typeface="Trebuchet MS" pitchFamily="34" charset="-122"/>
                 <a:cs typeface="Trebuchet MS" pitchFamily="34" charset="-120"/>
               </a:rPr>
-              <a:t>Phonemes</a:t>
-            </a:r>
-            <a:endParaRPr lang="en-US" sz="1100" dirty="0"/>
-          </a:p>
-        </p:txBody>
-      </p:sp>
-      <p:sp>
-        <p:nvSpPr>
-          <p:cNvPr id="38" name="Shape 36"/>
-          <p:cNvSpPr/>
-          <p:nvPr/>
-        </p:nvSpPr>
-        <p:spPr>
-          <a:xfrm>
-            <a:off x="1874520" y="4096512"/>
-            <a:ext cx="6903720" cy="658368"/>
-          </a:xfrm>
-          <a:prstGeom prst="rect">
-            <a:avLst>
-              <a:gd name="adj" fmla="val 8333"/>
-            </a:avLst>
-          </a:prstGeom>
-          <a:solidFill>
-            <a:srgbClr val="FCE7F3"/>
-          </a:solidFill>
-          <a:ln w="12700">
-            <a:solidFill>
-              <a:srgbClr val="DB2777"/>
-            </a:solidFill>
-            <a:prstDash val="solid"/>
-          </a:ln>
-        </p:spPr>
-      </p:sp>
-      <p:sp>
-        <p:nvSpPr>
-          <p:cNvPr id="39" name="Shape 37"/>
-          <p:cNvSpPr/>
-          <p:nvPr/>
-        </p:nvSpPr>
-        <p:spPr>
-          <a:xfrm>
-            <a:off x="2023872" y="4169664"/>
+              <a:t>e</a:t>
+            </a:r>
+            <a:endParaRPr lang="en-US" sz="900" dirty="0"/>
+          </a:p>
+        </p:txBody>
+      </p:sp>
+      <p:sp>
+        <p:nvSpPr>
+          <p:cNvPr id="40" name="Shape 38"/>
+          <p:cNvSpPr/>
+          <p:nvPr/>
+        </p:nvSpPr>
+        <p:spPr>
+          <a:xfrm>
+            <a:off x="3942207" y="4169664"/>
             <a:ext cx="685800" cy="475488"/>
           </a:xfrm>
           <a:prstGeom prst="rect">
@@ -10886,13 +10808,13 @@
       </p:sp>
       <p:sp>
         <p:nvSpPr>
-          <p:cNvPr id="40" name="Text 38"/>
-          <p:cNvSpPr/>
-          <p:nvPr/>
-        </p:nvSpPr>
-        <p:spPr>
-          <a:xfrm>
-            <a:off x="2023872" y="4169664"/>
+          <p:cNvPr id="41" name="Text 39"/>
+          <p:cNvSpPr/>
+          <p:nvPr/>
+        </p:nvSpPr>
+        <p:spPr>
+          <a:xfrm>
+            <a:off x="3942207" y="4169664"/>
             <a:ext cx="685800" cy="475488"/>
           </a:xfrm>
           <a:prstGeom prst="rect">
@@ -10917,7 +10839,7 @@
                 <a:ea typeface="Trebuchet MS" pitchFamily="34" charset="-122"/>
                 <a:cs typeface="Trebuchet MS" pitchFamily="34" charset="-120"/>
               </a:rPr>
-              <a:t>s</a:t>
+              <a:t>r</a:t>
             </a:r>
             <a:endParaRPr lang="en-US" sz="900" dirty="0"/>
           </a:p>
@@ -10925,13 +10847,13 @@
       </p:sp>
       <p:sp>
         <p:nvSpPr>
-          <p:cNvPr id="41" name="Shape 39"/>
-          <p:cNvSpPr/>
-          <p:nvPr/>
-        </p:nvSpPr>
-        <p:spPr>
-          <a:xfrm>
-            <a:off x="2831592" y="4169664"/>
+          <p:cNvPr id="42" name="Shape 40"/>
+          <p:cNvSpPr/>
+          <p:nvPr/>
+        </p:nvSpPr>
+        <p:spPr>
+          <a:xfrm>
+            <a:off x="4850892" y="4169664"/>
             <a:ext cx="685800" cy="475488"/>
           </a:xfrm>
           <a:prstGeom prst="rect">
@@ -10952,13 +10874,13 @@
       </p:sp>
       <p:sp>
         <p:nvSpPr>
-          <p:cNvPr id="42" name="Text 40"/>
-          <p:cNvSpPr/>
-          <p:nvPr/>
-        </p:nvSpPr>
-        <p:spPr>
-          <a:xfrm>
-            <a:off x="2831592" y="4169664"/>
+          <p:cNvPr id="43" name="Text 41"/>
+          <p:cNvSpPr/>
+          <p:nvPr/>
+        </p:nvSpPr>
+        <p:spPr>
+          <a:xfrm>
+            <a:off x="4850892" y="4169664"/>
             <a:ext cx="685800" cy="475488"/>
           </a:xfrm>
           <a:prstGeom prst="rect">
@@ -10983,7 +10905,7 @@
                 <a:ea typeface="Trebuchet MS" pitchFamily="34" charset="-122"/>
                 <a:cs typeface="Trebuchet MS" pitchFamily="34" charset="-120"/>
               </a:rPr>
-              <a:t>u</a:t>
+              <a:t>o</a:t>
             </a:r>
             <a:endParaRPr lang="en-US" sz="900" dirty="0"/>
           </a:p>
@@ -10991,13 +10913,13 @@
       </p:sp>
       <p:sp>
         <p:nvSpPr>
-          <p:cNvPr id="43" name="Shape 41"/>
-          <p:cNvSpPr/>
-          <p:nvPr/>
-        </p:nvSpPr>
-        <p:spPr>
-          <a:xfrm>
-            <a:off x="3639312" y="4169664"/>
+          <p:cNvPr id="44" name="Shape 42"/>
+          <p:cNvSpPr/>
+          <p:nvPr/>
+        </p:nvSpPr>
+        <p:spPr>
+          <a:xfrm>
+            <a:off x="5759577" y="4169664"/>
             <a:ext cx="685800" cy="475488"/>
           </a:xfrm>
           <a:prstGeom prst="rect">
@@ -11018,13 +10940,13 @@
       </p:sp>
       <p:sp>
         <p:nvSpPr>
-          <p:cNvPr id="44" name="Text 42"/>
-          <p:cNvSpPr/>
-          <p:nvPr/>
-        </p:nvSpPr>
-        <p:spPr>
-          <a:xfrm>
-            <a:off x="3639312" y="4169664"/>
+          <p:cNvPr id="45" name="Text 43"/>
+          <p:cNvSpPr/>
+          <p:nvPr/>
+        </p:nvSpPr>
+        <p:spPr>
+          <a:xfrm>
+            <a:off x="5759577" y="4169664"/>
             <a:ext cx="685800" cy="475488"/>
           </a:xfrm>
           <a:prstGeom prst="rect">
@@ -11049,7 +10971,7 @@
                 <a:ea typeface="Trebuchet MS" pitchFamily="34" charset="-122"/>
                 <a:cs typeface="Trebuchet MS" pitchFamily="34" charset="-120"/>
               </a:rPr>
-              <a:t>p</a:t>
+              <a:t>i</a:t>
             </a:r>
             <a:endParaRPr lang="en-US" sz="900" dirty="0"/>
           </a:p>
@@ -11057,13 +10979,13 @@
       </p:sp>
       <p:sp>
         <p:nvSpPr>
-          <p:cNvPr id="45" name="Shape 43"/>
-          <p:cNvSpPr/>
-          <p:nvPr/>
-        </p:nvSpPr>
-        <p:spPr>
-          <a:xfrm>
-            <a:off x="4447032" y="4169664"/>
+          <p:cNvPr id="46" name="Shape 44"/>
+          <p:cNvSpPr/>
+          <p:nvPr/>
+        </p:nvSpPr>
+        <p:spPr>
+          <a:xfrm>
+            <a:off x="6668262" y="4169664"/>
             <a:ext cx="685800" cy="475488"/>
           </a:xfrm>
           <a:prstGeom prst="rect">
@@ -11084,13 +11006,13 @@
       </p:sp>
       <p:sp>
         <p:nvSpPr>
-          <p:cNvPr id="46" name="Text 44"/>
-          <p:cNvSpPr/>
-          <p:nvPr/>
-        </p:nvSpPr>
-        <p:spPr>
-          <a:xfrm>
-            <a:off x="4447032" y="4169664"/>
+          <p:cNvPr id="47" name="Text 45"/>
+          <p:cNvSpPr/>
+          <p:nvPr/>
+        </p:nvSpPr>
+        <p:spPr>
+          <a:xfrm>
+            <a:off x="6668262" y="4169664"/>
             <a:ext cx="685800" cy="475488"/>
           </a:xfrm>
           <a:prstGeom prst="rect">
@@ -11115,7 +11037,7 @@
                 <a:ea typeface="Trebuchet MS" pitchFamily="34" charset="-122"/>
                 <a:cs typeface="Trebuchet MS" pitchFamily="34" charset="-120"/>
               </a:rPr>
-              <a:t>er</a:t>
+              <a:t>s</a:t>
             </a:r>
             <a:endParaRPr lang="en-US" sz="900" dirty="0"/>
           </a:p>
@@ -11123,13 +11045,13 @@
       </p:sp>
       <p:sp>
         <p:nvSpPr>
-          <p:cNvPr id="47" name="Shape 45"/>
-          <p:cNvSpPr/>
-          <p:nvPr/>
-        </p:nvSpPr>
-        <p:spPr>
-          <a:xfrm>
-            <a:off x="5254752" y="4169664"/>
+          <p:cNvPr id="48" name="Shape 46"/>
+          <p:cNvSpPr/>
+          <p:nvPr/>
+        </p:nvSpPr>
+        <p:spPr>
+          <a:xfrm>
+            <a:off x="7576947" y="4169664"/>
             <a:ext cx="685800" cy="475488"/>
           </a:xfrm>
           <a:prstGeom prst="rect">
@@ -11150,13 +11072,13 @@
       </p:sp>
       <p:sp>
         <p:nvSpPr>
-          <p:cNvPr id="48" name="Text 46"/>
-          <p:cNvSpPr/>
-          <p:nvPr/>
-        </p:nvSpPr>
-        <p:spPr>
-          <a:xfrm>
-            <a:off x="5254752" y="4169664"/>
+          <p:cNvPr id="49" name="Text 47"/>
+          <p:cNvSpPr/>
+          <p:nvPr/>
+        </p:nvSpPr>
+        <p:spPr>
+          <a:xfrm>
+            <a:off x="7576947" y="4169664"/>
             <a:ext cx="685800" cy="475488"/>
           </a:xfrm>
           <a:prstGeom prst="rect">
@@ -11181,205 +11103,7 @@
                 <a:ea typeface="Trebuchet MS" pitchFamily="34" charset="-122"/>
                 <a:cs typeface="Trebuchet MS" pitchFamily="34" charset="-120"/>
               </a:rPr>
-              <a:t>h</a:t>
-            </a:r>
-            <a:endParaRPr lang="en-US" sz="900" dirty="0"/>
-          </a:p>
-        </p:txBody>
-      </p:sp>
-      <p:sp>
-        <p:nvSpPr>
-          <p:cNvPr id="49" name="Shape 47"/>
-          <p:cNvSpPr/>
-          <p:nvPr/>
-        </p:nvSpPr>
-        <p:spPr>
-          <a:xfrm>
-            <a:off x="6062472" y="4169664"/>
-            <a:ext cx="685800" cy="475488"/>
-          </a:xfrm>
-          <a:prstGeom prst="rect">
-            <a:avLst>
-              <a:gd name="adj" fmla="val 7692"/>
-            </a:avLst>
-          </a:prstGeom>
-          <a:solidFill>
-            <a:srgbClr val="FFFFFF"/>
-          </a:solidFill>
-          <a:ln w="12700">
-            <a:solidFill>
-              <a:srgbClr val="DB2777"/>
-            </a:solidFill>
-            <a:prstDash val="solid"/>
-          </a:ln>
-        </p:spPr>
-      </p:sp>
-      <p:sp>
-        <p:nvSpPr>
-          <p:cNvPr id="50" name="Text 48"/>
-          <p:cNvSpPr/>
-          <p:nvPr/>
-        </p:nvSpPr>
-        <p:spPr>
-          <a:xfrm>
-            <a:off x="6062472" y="4169664"/>
-            <a:ext cx="685800" cy="475488"/>
-          </a:xfrm>
-          <a:prstGeom prst="rect">
-            <a:avLst/>
-          </a:prstGeom>
-          <a:noFill/>
-          <a:ln/>
-        </p:spPr>
-        <p:txBody>
-          <a:bodyPr wrap="square" lIns="0" tIns="0" rIns="0" bIns="0" rtlCol="0" anchor="ctr"/>
-          <a:lstStyle/>
-          <a:p>
-            <a:pPr algn="ctr" indent="0" marL="0">
-              <a:buNone/>
-            </a:pPr>
-            <a:r>
-              <a:rPr lang="en-US" sz="900" b="1" dirty="0">
-                <a:solidFill>
-                  <a:srgbClr val="9D174D"/>
-                </a:solidFill>
-                <a:latin typeface="Trebuchet MS" pitchFamily="34" charset="0"/>
-                <a:ea typeface="Trebuchet MS" pitchFamily="34" charset="-122"/>
-                <a:cs typeface="Trebuchet MS" pitchFamily="34" charset="-120"/>
-              </a:rPr>
-              <a:t>e</a:t>
-            </a:r>
-            <a:endParaRPr lang="en-US" sz="900" dirty="0"/>
-          </a:p>
-        </p:txBody>
-      </p:sp>
-      <p:sp>
-        <p:nvSpPr>
-          <p:cNvPr id="51" name="Shape 49"/>
-          <p:cNvSpPr/>
-          <p:nvPr/>
-        </p:nvSpPr>
-        <p:spPr>
-          <a:xfrm>
-            <a:off x="6870192" y="4169664"/>
-            <a:ext cx="685800" cy="475488"/>
-          </a:xfrm>
-          <a:prstGeom prst="rect">
-            <a:avLst>
-              <a:gd name="adj" fmla="val 7692"/>
-            </a:avLst>
-          </a:prstGeom>
-          <a:solidFill>
-            <a:srgbClr val="FFFFFF"/>
-          </a:solidFill>
-          <a:ln w="12700">
-            <a:solidFill>
-              <a:srgbClr val="DB2777"/>
-            </a:solidFill>
-            <a:prstDash val="solid"/>
-          </a:ln>
-        </p:spPr>
-      </p:sp>
-      <p:sp>
-        <p:nvSpPr>
-          <p:cNvPr id="52" name="Text 50"/>
-          <p:cNvSpPr/>
-          <p:nvPr/>
-        </p:nvSpPr>
-        <p:spPr>
-          <a:xfrm>
-            <a:off x="6870192" y="4169664"/>
-            <a:ext cx="685800" cy="475488"/>
-          </a:xfrm>
-          <a:prstGeom prst="rect">
-            <a:avLst/>
-          </a:prstGeom>
-          <a:noFill/>
-          <a:ln/>
-        </p:spPr>
-        <p:txBody>
-          <a:bodyPr wrap="square" lIns="0" tIns="0" rIns="0" bIns="0" rtlCol="0" anchor="ctr"/>
-          <a:lstStyle/>
-          <a:p>
-            <a:pPr algn="ctr" indent="0" marL="0">
-              <a:buNone/>
-            </a:pPr>
-            <a:r>
-              <a:rPr lang="en-US" sz="900" b="1" dirty="0">
-                <a:solidFill>
-                  <a:srgbClr val="9D174D"/>
-                </a:solidFill>
-                <a:latin typeface="Trebuchet MS" pitchFamily="34" charset="0"/>
-                <a:ea typeface="Trebuchet MS" pitchFamily="34" charset="-122"/>
-                <a:cs typeface="Trebuchet MS" pitchFamily="34" charset="-120"/>
-              </a:rPr>
-              <a:t>r</a:t>
-            </a:r>
-            <a:endParaRPr lang="en-US" sz="900" dirty="0"/>
-          </a:p>
-        </p:txBody>
-      </p:sp>
-      <p:sp>
-        <p:nvSpPr>
-          <p:cNvPr id="53" name="Shape 51"/>
-          <p:cNvSpPr/>
-          <p:nvPr/>
-        </p:nvSpPr>
-        <p:spPr>
-          <a:xfrm>
-            <a:off x="7677912" y="4169664"/>
-            <a:ext cx="685800" cy="475488"/>
-          </a:xfrm>
-          <a:prstGeom prst="rect">
-            <a:avLst>
-              <a:gd name="adj" fmla="val 7692"/>
-            </a:avLst>
-          </a:prstGeom>
-          <a:solidFill>
-            <a:srgbClr val="FFFFFF"/>
-          </a:solidFill>
-          <a:ln w="12700">
-            <a:solidFill>
-              <a:srgbClr val="DB2777"/>
-            </a:solidFill>
-            <a:prstDash val="solid"/>
-          </a:ln>
-        </p:spPr>
-      </p:sp>
-      <p:sp>
-        <p:nvSpPr>
-          <p:cNvPr id="54" name="Text 52"/>
-          <p:cNvSpPr/>
-          <p:nvPr/>
-        </p:nvSpPr>
-        <p:spPr>
-          <a:xfrm>
-            <a:off x="7677912" y="4169664"/>
-            <a:ext cx="685800" cy="475488"/>
-          </a:xfrm>
-          <a:prstGeom prst="rect">
-            <a:avLst/>
-          </a:prstGeom>
-          <a:noFill/>
-          <a:ln/>
-        </p:spPr>
-        <p:txBody>
-          <a:bodyPr wrap="square" lIns="0" tIns="0" rIns="0" bIns="0" rtlCol="0" anchor="ctr"/>
-          <a:lstStyle/>
-          <a:p>
-            <a:pPr algn="ctr" indent="0" marL="0">
-              <a:buNone/>
-            </a:pPr>
-            <a:r>
-              <a:rPr lang="en-US" sz="900" b="1" dirty="0">
-                <a:solidFill>
-                  <a:srgbClr val="9D174D"/>
-                </a:solidFill>
-                <a:latin typeface="Trebuchet MS" pitchFamily="34" charset="0"/>
-                <a:ea typeface="Trebuchet MS" pitchFamily="34" charset="-122"/>
-                <a:cs typeface="Trebuchet MS" pitchFamily="34" charset="-120"/>
-              </a:rPr>
-              <a:t>o</a:t>
+              <a:t>m</a:t>
             </a:r>
             <a:endParaRPr lang="en-US" sz="900" dirty="0"/>
           </a:p>
@@ -11810,7 +11534,7 @@
                 <a:ea typeface="Trebuchet MS" pitchFamily="34" charset="-122"/>
                 <a:cs typeface="Trebuchet MS" pitchFamily="34" charset="-120"/>
               </a:rPr>
-              <a:t>heroism</a:t>
+              <a:t>heroic</a:t>
             </a:r>
             <a:endParaRPr lang="en-US" sz="2800" dirty="0"/>
           </a:p>
@@ -12637,7 +12361,7 @@
                 <a:ea typeface="Trebuchet MS" pitchFamily="34" charset="-122"/>
                 <a:cs typeface="Trebuchet MS" pitchFamily="34" charset="-120"/>
               </a:rPr>
-              <a:t>heroism</a:t>
+              <a:t>heroic</a:t>
             </a:r>
             <a:endParaRPr lang="en-US" sz="2800" dirty="0"/>
           </a:p>
@@ -12888,7 +12612,7 @@
                 <a:ea typeface="Trebuchet MS" pitchFamily="34" charset="-122"/>
                 <a:cs typeface="Trebuchet MS" pitchFamily="34" charset="-120"/>
               </a:rPr>
-              <a:t>ism</a:t>
+              <a:t>ic</a:t>
             </a:r>
             <a:endParaRPr lang="en-US" sz="1300" dirty="0"/>
           </a:p>
@@ -12927,7 +12651,7 @@
                 <a:ea typeface="Calibri" pitchFamily="34" charset="-122"/>
                 <a:cs typeface="Calibri" pitchFamily="34" charset="-120"/>
               </a:rPr>
-              <a:t>quality or belief</a:t>
+              <a:t>relating to, having the quality of</a:t>
             </a:r>
             <a:endParaRPr lang="en-US" sz="850" dirty="0"/>
           </a:p>
@@ -13622,7 +13346,7 @@
                 <a:ea typeface="Trebuchet MS" pitchFamily="34" charset="-122"/>
                 <a:cs typeface="Trebuchet MS" pitchFamily="34" charset="-120"/>
               </a:rPr>
-              <a:t>heroism</a:t>
+              <a:t>heroic</a:t>
             </a:r>
             <a:endParaRPr lang="en-US" sz="2800" dirty="0"/>
           </a:p>
@@ -13873,7 +13597,7 @@
                 <a:ea typeface="Trebuchet MS" pitchFamily="34" charset="-122"/>
                 <a:cs typeface="Trebuchet MS" pitchFamily="34" charset="-120"/>
               </a:rPr>
-              <a:t>ism</a:t>
+              <a:t>ic</a:t>
             </a:r>
             <a:endParaRPr lang="en-US" sz="1300" dirty="0"/>
           </a:p>
@@ -13912,7 +13636,7 @@
                 <a:ea typeface="Calibri" pitchFamily="34" charset="-122"/>
                 <a:cs typeface="Calibri" pitchFamily="34" charset="-120"/>
               </a:rPr>
-              <a:t>quality or belief</a:t>
+              <a:t>relating to, having the quality of</a:t>
             </a:r>
             <a:endParaRPr lang="en-US" sz="850" dirty="0"/>
           </a:p>
@@ -14281,7 +14005,7 @@
                 <a:ea typeface="Trebuchet MS" pitchFamily="34" charset="-122"/>
                 <a:cs typeface="Trebuchet MS" pitchFamily="34" charset="-120"/>
               </a:rPr>
-              <a:t>ism</a:t>
+              <a:t>ic</a:t>
             </a:r>
             <a:endParaRPr lang="en-US" sz="1400" dirty="0"/>
           </a:p>
@@ -15109,7 +14833,7 @@
                 <a:ea typeface="Trebuchet MS" pitchFamily="34" charset="-122"/>
                 <a:cs typeface="Trebuchet MS" pitchFamily="34" charset="-120"/>
               </a:rPr>
-              <a:t>heroism</a:t>
+              <a:t>heroic</a:t>
             </a:r>
             <a:endParaRPr lang="en-US" sz="2800" dirty="0"/>
           </a:p>
@@ -15360,7 +15084,7 @@
                 <a:ea typeface="Trebuchet MS" pitchFamily="34" charset="-122"/>
                 <a:cs typeface="Trebuchet MS" pitchFamily="34" charset="-120"/>
               </a:rPr>
-              <a:t>ism</a:t>
+              <a:t>ic</a:t>
             </a:r>
             <a:endParaRPr lang="en-US" sz="1300" dirty="0"/>
           </a:p>
@@ -15399,7 +15123,7 @@
                 <a:ea typeface="Calibri" pitchFamily="34" charset="-122"/>
                 <a:cs typeface="Calibri" pitchFamily="34" charset="-120"/>
               </a:rPr>
-              <a:t>quality or belief</a:t>
+              <a:t>relating to, having the quality of</a:t>
             </a:r>
             <a:endParaRPr lang="en-US" sz="850" dirty="0"/>
           </a:p>
@@ -15768,7 +15492,7 @@
                 <a:ea typeface="Trebuchet MS" pitchFamily="34" charset="-122"/>
                 <a:cs typeface="Trebuchet MS" pitchFamily="34" charset="-120"/>
               </a:rPr>
-              <a:t>ism</a:t>
+              <a:t>ic</a:t>
             </a:r>
             <a:endParaRPr lang="en-US" sz="1400" dirty="0"/>
           </a:p>
@@ -15849,11 +15573,11 @@
         <p:spPr>
           <a:xfrm>
             <a:off x="1874520" y="4096512"/>
-            <a:ext cx="6903720" cy="658368"/>
+            <a:ext cx="6903720" cy="804672"/>
           </a:xfrm>
           <a:prstGeom prst="rect">
             <a:avLst>
-              <a:gd name="adj" fmla="val 8333"/>
+              <a:gd name="adj" fmla="val 6818"/>
             </a:avLst>
           </a:prstGeom>
           <a:solidFill>
@@ -15875,12 +15599,12 @@
         </p:nvSpPr>
         <p:spPr>
           <a:xfrm>
-            <a:off x="2124837" y="4169664"/>
-            <a:ext cx="685800" cy="475488"/>
+            <a:off x="2254649" y="4169664"/>
+            <a:ext cx="685800" cy="384048"/>
           </a:xfrm>
           <a:prstGeom prst="rect">
             <a:avLst>
-              <a:gd name="adj" fmla="val 7692"/>
+              <a:gd name="adj" fmla="val 9524"/>
             </a:avLst>
           </a:prstGeom>
           <a:solidFill>
@@ -15902,8 +15626,8 @@
         </p:nvSpPr>
         <p:spPr>
           <a:xfrm>
-            <a:off x="2124837" y="4169664"/>
-            <a:ext cx="685800" cy="475488"/>
+            <a:off x="2254649" y="4169664"/>
+            <a:ext cx="685800" cy="384048"/>
           </a:xfrm>
           <a:prstGeom prst="rect">
             <a:avLst/>
@@ -15941,12 +15665,12 @@
         </p:nvSpPr>
         <p:spPr>
           <a:xfrm>
-            <a:off x="3033522" y="4169664"/>
-            <a:ext cx="685800" cy="475488"/>
+            <a:off x="3293146" y="4169664"/>
+            <a:ext cx="685800" cy="384048"/>
           </a:xfrm>
           <a:prstGeom prst="rect">
             <a:avLst>
-              <a:gd name="adj" fmla="val 7692"/>
+              <a:gd name="adj" fmla="val 9524"/>
             </a:avLst>
           </a:prstGeom>
           <a:solidFill>
@@ -15968,8 +15692,8 @@
         </p:nvSpPr>
         <p:spPr>
           <a:xfrm>
-            <a:off x="3033522" y="4169664"/>
-            <a:ext cx="685800" cy="475488"/>
+            <a:off x="3293146" y="4169664"/>
+            <a:ext cx="685800" cy="384048"/>
           </a:xfrm>
           <a:prstGeom prst="rect">
             <a:avLst/>
@@ -16007,12 +15731,12 @@
         </p:nvSpPr>
         <p:spPr>
           <a:xfrm>
-            <a:off x="3942207" y="4169664"/>
-            <a:ext cx="685800" cy="475488"/>
+            <a:off x="4331643" y="4169664"/>
+            <a:ext cx="685800" cy="384048"/>
           </a:xfrm>
           <a:prstGeom prst="rect">
             <a:avLst>
-              <a:gd name="adj" fmla="val 7692"/>
+              <a:gd name="adj" fmla="val 9524"/>
             </a:avLst>
           </a:prstGeom>
           <a:solidFill>
@@ -16034,8 +15758,8 @@
         </p:nvSpPr>
         <p:spPr>
           <a:xfrm>
-            <a:off x="3942207" y="4169664"/>
-            <a:ext cx="685800" cy="475488"/>
+            <a:off x="4331643" y="4169664"/>
+            <a:ext cx="685800" cy="384048"/>
           </a:xfrm>
           <a:prstGeom prst="rect">
             <a:avLst/>
@@ -16073,12 +15797,12 @@
         </p:nvSpPr>
         <p:spPr>
           <a:xfrm>
-            <a:off x="4850892" y="4169664"/>
-            <a:ext cx="685800" cy="475488"/>
+            <a:off x="5370141" y="4169664"/>
+            <a:ext cx="685800" cy="384048"/>
           </a:xfrm>
           <a:prstGeom prst="rect">
             <a:avLst>
-              <a:gd name="adj" fmla="val 7692"/>
+              <a:gd name="adj" fmla="val 9524"/>
             </a:avLst>
           </a:prstGeom>
           <a:solidFill>
@@ -16100,8 +15824,8 @@
         </p:nvSpPr>
         <p:spPr>
           <a:xfrm>
-            <a:off x="4850892" y="4169664"/>
-            <a:ext cx="685800" cy="475488"/>
+            <a:off x="5370141" y="4169664"/>
+            <a:ext cx="685800" cy="384048"/>
           </a:xfrm>
           <a:prstGeom prst="rect">
             <a:avLst/>
@@ -16139,12 +15863,12 @@
         </p:nvSpPr>
         <p:spPr>
           <a:xfrm>
-            <a:off x="5759577" y="4169664"/>
-            <a:ext cx="685800" cy="475488"/>
+            <a:off x="6408638" y="4169664"/>
+            <a:ext cx="685800" cy="384048"/>
           </a:xfrm>
           <a:prstGeom prst="rect">
             <a:avLst>
-              <a:gd name="adj" fmla="val 7692"/>
+              <a:gd name="adj" fmla="val 9524"/>
             </a:avLst>
           </a:prstGeom>
           <a:solidFill>
@@ -16166,8 +15890,8 @@
         </p:nvSpPr>
         <p:spPr>
           <a:xfrm>
-            <a:off x="5759577" y="4169664"/>
-            <a:ext cx="685800" cy="475488"/>
+            <a:off x="6408638" y="4169664"/>
+            <a:ext cx="685800" cy="384048"/>
           </a:xfrm>
           <a:prstGeom prst="rect">
             <a:avLst/>
@@ -16205,12 +15929,12 @@
         </p:nvSpPr>
         <p:spPr>
           <a:xfrm>
-            <a:off x="6668262" y="4169664"/>
-            <a:ext cx="685800" cy="475488"/>
+            <a:off x="7447135" y="4169664"/>
+            <a:ext cx="685800" cy="384048"/>
           </a:xfrm>
           <a:prstGeom prst="rect">
             <a:avLst>
-              <a:gd name="adj" fmla="val 7692"/>
+              <a:gd name="adj" fmla="val 9524"/>
             </a:avLst>
           </a:prstGeom>
           <a:solidFill>
@@ -16232,8 +15956,8 @@
         </p:nvSpPr>
         <p:spPr>
           <a:xfrm>
-            <a:off x="6668262" y="4169664"/>
-            <a:ext cx="685800" cy="475488"/>
+            <a:off x="7447135" y="4169664"/>
+            <a:ext cx="685800" cy="384048"/>
           </a:xfrm>
           <a:prstGeom prst="rect">
             <a:avLst/>
@@ -16257,7 +15981,7 @@
                 <a:ea typeface="Trebuchet MS" pitchFamily="34" charset="-122"/>
                 <a:cs typeface="Trebuchet MS" pitchFamily="34" charset="-120"/>
               </a:rPr>
-              <a:t>s</a:t>
+              <a:t>c</a:t>
             </a:r>
             <a:endParaRPr lang="en-US" sz="900" dirty="0"/>
           </a:p>
@@ -16265,67 +15989,40 @@
       </p:sp>
       <p:sp>
         <p:nvSpPr>
-          <p:cNvPr id="48" name="Shape 46"/>
-          <p:cNvSpPr/>
-          <p:nvPr/>
-        </p:nvSpPr>
-        <p:spPr>
-          <a:xfrm>
-            <a:off x="7576947" y="4169664"/>
-            <a:ext cx="685800" cy="475488"/>
-          </a:xfrm>
-          <a:prstGeom prst="rect">
-            <a:avLst>
-              <a:gd name="adj" fmla="val 7692"/>
-            </a:avLst>
-          </a:prstGeom>
-          <a:solidFill>
-            <a:srgbClr val="FFFFFF"/>
-          </a:solidFill>
-          <a:ln w="12700">
-            <a:solidFill>
-              <a:srgbClr val="DB2777"/>
-            </a:solidFill>
-            <a:prstDash val="solid"/>
-          </a:ln>
-        </p:spPr>
-      </p:sp>
-      <p:sp>
-        <p:nvSpPr>
-          <p:cNvPr id="49" name="Text 47"/>
-          <p:cNvSpPr/>
-          <p:nvPr/>
-        </p:nvSpPr>
-        <p:spPr>
-          <a:xfrm>
-            <a:off x="7576947" y="4169664"/>
-            <a:ext cx="685800" cy="475488"/>
-          </a:xfrm>
-          <a:prstGeom prst="rect">
-            <a:avLst/>
-          </a:prstGeom>
-          <a:noFill/>
-          <a:ln/>
-        </p:spPr>
-        <p:txBody>
-          <a:bodyPr wrap="square" lIns="0" tIns="0" rIns="0" bIns="0" rtlCol="0" anchor="ctr"/>
-          <a:lstStyle/>
-          <a:p>
-            <a:pPr algn="ctr" indent="0" marL="0">
-              <a:buNone/>
-            </a:pPr>
-            <a:r>
-              <a:rPr lang="en-US" sz="900" b="1" dirty="0">
-                <a:solidFill>
-                  <a:srgbClr val="9D174D"/>
-                </a:solidFill>
-                <a:latin typeface="Trebuchet MS" pitchFamily="34" charset="0"/>
-                <a:ea typeface="Trebuchet MS" pitchFamily="34" charset="-122"/>
-                <a:cs typeface="Trebuchet MS" pitchFamily="34" charset="-120"/>
-              </a:rPr>
-              <a:t>m</a:t>
-            </a:r>
-            <a:endParaRPr lang="en-US" sz="900" dirty="0"/>
+          <p:cNvPr id="48" name="Text 46"/>
+          <p:cNvSpPr/>
+          <p:nvPr/>
+        </p:nvSpPr>
+        <p:spPr>
+          <a:xfrm>
+            <a:off x="7447135" y="4572000"/>
+            <a:ext cx="685800" cy="219456"/>
+          </a:xfrm>
+          <a:prstGeom prst="rect">
+            <a:avLst/>
+          </a:prstGeom>
+          <a:noFill/>
+          <a:ln/>
+        </p:spPr>
+        <p:txBody>
+          <a:bodyPr wrap="square" lIns="0" tIns="0" rIns="0" bIns="0" rtlCol="0" anchor="t"/>
+          <a:lstStyle/>
+          <a:p>
+            <a:pPr algn="ctr" indent="0" marL="0">
+              <a:buNone/>
+            </a:pPr>
+            <a:r>
+              <a:rPr lang="en-US" sz="750" i="1" dirty="0">
+                <a:solidFill>
+                  <a:srgbClr val="94A3B8"/>
+                </a:solidFill>
+                <a:latin typeface="Calibri" pitchFamily="34" charset="0"/>
+                <a:ea typeface="Calibri" pitchFamily="34" charset="-122"/>
+                <a:cs typeface="Calibri" pitchFamily="34" charset="-120"/>
+              </a:rPr>
+              <a:t>/k/</a:t>
+            </a:r>
+            <a:endParaRPr lang="en-US" sz="750" dirty="0"/>
           </a:p>
         </p:txBody>
       </p:sp>
@@ -17231,7 +16928,7 @@
                 <a:ea typeface="Trebuchet MS" pitchFamily="34" charset="-122"/>
                 <a:cs typeface="Trebuchet MS" pitchFamily="34" charset="-120"/>
               </a:rPr>
-              <a:t>1</a:t>
+              <a:t>2</a:t>
             </a:r>
             <a:pPr algn="ctr" indent="0" marL="0">
               <a:buNone/>
@@ -17245,7 +16942,7 @@
                 <a:ea typeface="Trebuchet MS" pitchFamily="34" charset="-122"/>
                 <a:cs typeface="Trebuchet MS" pitchFamily="34" charset="-120"/>
               </a:rPr>
-              <a:t>  punctuation mark</a:t>
+              <a:t>  punctuation marks</a:t>
             </a:r>
             <a:endParaRPr lang="en-US" sz="2800" dirty="0"/>
           </a:p>
@@ -17666,7 +17363,7 @@
                 <a:ea typeface="Calibri" pitchFamily="34" charset="-122"/>
                 <a:cs typeface="Calibri" pitchFamily="34" charset="-120"/>
               </a:rPr>
-              <a:t>heroic</a:t>
+              <a:t>superhero</a:t>
             </a:r>
             <a:pPr algn="l" indent="0" marL="0">
               <a:buNone/>
@@ -17680,7 +17377,7 @@
                 <a:ea typeface="Calibri" pitchFamily="34" charset="-122"/>
                 <a:cs typeface="Calibri" pitchFamily="34" charset="-120"/>
               </a:rPr>
-              <a:t> </a:t>
+              <a:t> acted </a:t>
             </a:r>
             <a:pPr algn="l" indent="0" marL="0">
               <a:buNone/>
@@ -17697,7 +17394,7 @@
                 <a:ea typeface="Calibri" pitchFamily="34" charset="-122"/>
                 <a:cs typeface="Calibri" pitchFamily="34" charset="-120"/>
               </a:rPr>
-              <a:t>antihero</a:t>
+              <a:t>heroically</a:t>
             </a:r>
             <a:pPr algn="l" indent="0" marL="0">
               <a:buNone/>
@@ -17711,7 +17408,7 @@
                 <a:ea typeface="Calibri" pitchFamily="34" charset="-122"/>
                 <a:cs typeface="Calibri" pitchFamily="34" charset="-120"/>
               </a:rPr>
-              <a:t> surprised everyone with his bravery, proving that </a:t>
+              <a:t> to defeat the villain; the </a:t>
             </a:r>
             <a:pPr algn="l" indent="0" marL="0">
               <a:buNone/>
@@ -17728,7 +17425,7 @@
                 <a:ea typeface="Calibri" pitchFamily="34" charset="-122"/>
                 <a:cs typeface="Calibri" pitchFamily="34" charset="-120"/>
               </a:rPr>
-              <a:t>heroism</a:t>
+              <a:t>antihero</a:t>
             </a:r>
             <a:pPr algn="l" indent="0" marL="0">
               <a:buNone/>
@@ -17742,7 +17439,7 @@
                 <a:ea typeface="Calibri" pitchFamily="34" charset="-122"/>
                 <a:cs typeface="Calibri" pitchFamily="34" charset="-120"/>
               </a:rPr>
-              <a:t> can come from unexpected people.</a:t>
+              <a:t>, however, watched from the shadows.</a:t>
             </a:r>
             <a:endParaRPr lang="en-US" sz="1800" dirty="0"/>
           </a:p>
@@ -17897,7 +17594,7 @@
                 <a:ea typeface="Trebuchet MS" pitchFamily="34" charset="-122"/>
                 <a:cs typeface="Trebuchet MS" pitchFamily="34" charset="-120"/>
               </a:rPr>
-              <a:t>heroic</a:t>
+              <a:t>superhero</a:t>
             </a:r>
             <a:endParaRPr lang="en-US" sz="1400" dirty="0"/>
           </a:p>
@@ -18025,7 +17722,7 @@
                 <a:ea typeface="Trebuchet MS" pitchFamily="34" charset="-122"/>
                 <a:cs typeface="Trebuchet MS" pitchFamily="34" charset="-120"/>
               </a:rPr>
-              <a:t>antihero</a:t>
+              <a:t>heroically</a:t>
             </a:r>
             <a:endParaRPr lang="en-US" sz="1400" dirty="0"/>
           </a:p>
@@ -18153,7 +17850,7 @@
                 <a:ea typeface="Trebuchet MS" pitchFamily="34" charset="-122"/>
                 <a:cs typeface="Trebuchet MS" pitchFamily="34" charset="-120"/>
               </a:rPr>
-              <a:t>heroism</a:t>
+              <a:t>antihero</a:t>
             </a:r>
             <a:endParaRPr lang="en-US" sz="1400" dirty="0"/>
           </a:p>
@@ -18623,7 +18320,7 @@
                 <a:ea typeface="Trebuchet MS" pitchFamily="34" charset="-122"/>
                 <a:cs typeface="Trebuchet MS" pitchFamily="34" charset="-120"/>
               </a:rPr>
-              <a:t>heroic</a:t>
+              <a:t>superhero</a:t>
             </a:r>
             <a:endParaRPr lang="en-US" sz="2800" dirty="0"/>
           </a:p>
@@ -19450,7 +19147,7 @@
                 <a:ea typeface="Trebuchet MS" pitchFamily="34" charset="-122"/>
                 <a:cs typeface="Trebuchet MS" pitchFamily="34" charset="-120"/>
               </a:rPr>
-              <a:t>heroic</a:t>
+              <a:t>superhero</a:t>
             </a:r>
             <a:endParaRPr lang="en-US" sz="2800" dirty="0"/>
           </a:p>
@@ -19539,11 +19236,11 @@
             </a:avLst>
           </a:prstGeom>
           <a:solidFill>
-            <a:srgbClr val="CCFBF1"/>
+            <a:srgbClr val="DDD6FE"/>
           </a:solidFill>
           <a:ln w="19050">
             <a:solidFill>
-              <a:srgbClr val="0D9488"/>
+              <a:srgbClr val="7C3AED"/>
             </a:solidFill>
             <a:prstDash val="solid"/>
           </a:ln>
@@ -19583,13 +19280,13 @@
             <a:r>
               <a:rPr lang="en-US" sz="1300" b="1" dirty="0">
                 <a:solidFill>
-                  <a:srgbClr val="0F766E"/>
+                  <a:srgbClr val="4C1D95"/>
                 </a:solidFill>
                 <a:latin typeface="Trebuchet MS" pitchFamily="34" charset="0"/>
                 <a:ea typeface="Trebuchet MS" pitchFamily="34" charset="-122"/>
                 <a:cs typeface="Trebuchet MS" pitchFamily="34" charset="-120"/>
               </a:rPr>
-              <a:t>hero</a:t>
+              <a:t>super</a:t>
             </a:r>
             <a:endParaRPr lang="en-US" sz="1300" dirty="0"/>
           </a:p>
@@ -19628,7 +19325,7 @@
                 <a:ea typeface="Calibri" pitchFamily="34" charset="-122"/>
                 <a:cs typeface="Calibri" pitchFamily="34" charset="-120"/>
               </a:rPr>
-              <a:t>brave, admired person</a:t>
+              <a:t>above, beyond</a:t>
             </a:r>
             <a:endParaRPr lang="en-US" sz="850" dirty="0"/>
           </a:p>
@@ -19651,11 +19348,11 @@
             </a:avLst>
           </a:prstGeom>
           <a:solidFill>
-            <a:srgbClr val="FCE7F3"/>
+            <a:srgbClr val="CCFBF1"/>
           </a:solidFill>
           <a:ln w="19050">
             <a:solidFill>
-              <a:srgbClr val="DB2777"/>
+              <a:srgbClr val="0D9488"/>
             </a:solidFill>
             <a:prstDash val="solid"/>
           </a:ln>
@@ -19695,13 +19392,13 @@
             <a:r>
               <a:rPr lang="en-US" sz="1300" b="1" dirty="0">
                 <a:solidFill>
-                  <a:srgbClr val="9D174D"/>
+                  <a:srgbClr val="0F766E"/>
                 </a:solidFill>
                 <a:latin typeface="Trebuchet MS" pitchFamily="34" charset="0"/>
                 <a:ea typeface="Trebuchet MS" pitchFamily="34" charset="-122"/>
                 <a:cs typeface="Trebuchet MS" pitchFamily="34" charset="-120"/>
               </a:rPr>
-              <a:t>ic</a:t>
+              <a:t>hero</a:t>
             </a:r>
             <a:endParaRPr lang="en-US" sz="1300" dirty="0"/>
           </a:p>
@@ -19740,7 +19437,7 @@
                 <a:ea typeface="Calibri" pitchFamily="34" charset="-122"/>
                 <a:cs typeface="Calibri" pitchFamily="34" charset="-120"/>
               </a:rPr>
-              <a:t>relating to, having the quality of</a:t>
+              <a:t>brave, admired person</a:t>
             </a:r>
             <a:endParaRPr lang="en-US" sz="850" dirty="0"/>
           </a:p>
@@ -20435,7 +20132,7 @@
                 <a:ea typeface="Trebuchet MS" pitchFamily="34" charset="-122"/>
                 <a:cs typeface="Trebuchet MS" pitchFamily="34" charset="-120"/>
               </a:rPr>
-              <a:t>heroic</a:t>
+              <a:t>superhero</a:t>
             </a:r>
             <a:endParaRPr lang="en-US" sz="2800" dirty="0"/>
           </a:p>
@@ -20524,11 +20221,11 @@
             </a:avLst>
           </a:prstGeom>
           <a:solidFill>
-            <a:srgbClr val="CCFBF1"/>
+            <a:srgbClr val="DDD6FE"/>
           </a:solidFill>
           <a:ln w="19050">
             <a:solidFill>
-              <a:srgbClr val="0D9488"/>
+              <a:srgbClr val="7C3AED"/>
             </a:solidFill>
             <a:prstDash val="solid"/>
           </a:ln>
@@ -20568,13 +20265,13 @@
             <a:r>
               <a:rPr lang="en-US" sz="1300" b="1" dirty="0">
                 <a:solidFill>
-                  <a:srgbClr val="0F766E"/>
+                  <a:srgbClr val="4C1D95"/>
                 </a:solidFill>
                 <a:latin typeface="Trebuchet MS" pitchFamily="34" charset="0"/>
                 <a:ea typeface="Trebuchet MS" pitchFamily="34" charset="-122"/>
                 <a:cs typeface="Trebuchet MS" pitchFamily="34" charset="-120"/>
               </a:rPr>
-              <a:t>hero</a:t>
+              <a:t>super</a:t>
             </a:r>
             <a:endParaRPr lang="en-US" sz="1300" dirty="0"/>
           </a:p>
@@ -20613,7 +20310,7 @@
                 <a:ea typeface="Calibri" pitchFamily="34" charset="-122"/>
                 <a:cs typeface="Calibri" pitchFamily="34" charset="-120"/>
               </a:rPr>
-              <a:t>brave, admired person</a:t>
+              <a:t>above, beyond</a:t>
             </a:r>
             <a:endParaRPr lang="en-US" sz="850" dirty="0"/>
           </a:p>
@@ -20636,11 +20333,11 @@
             </a:avLst>
           </a:prstGeom>
           <a:solidFill>
-            <a:srgbClr val="FCE7F3"/>
+            <a:srgbClr val="CCFBF1"/>
           </a:solidFill>
           <a:ln w="19050">
             <a:solidFill>
-              <a:srgbClr val="DB2777"/>
+              <a:srgbClr val="0D9488"/>
             </a:solidFill>
             <a:prstDash val="solid"/>
           </a:ln>
@@ -20680,13 +20377,13 @@
             <a:r>
               <a:rPr lang="en-US" sz="1300" b="1" dirty="0">
                 <a:solidFill>
-                  <a:srgbClr val="9D174D"/>
+                  <a:srgbClr val="0F766E"/>
                 </a:solidFill>
                 <a:latin typeface="Trebuchet MS" pitchFamily="34" charset="0"/>
                 <a:ea typeface="Trebuchet MS" pitchFamily="34" charset="-122"/>
                 <a:cs typeface="Trebuchet MS" pitchFamily="34" charset="-120"/>
               </a:rPr>
-              <a:t>ic</a:t>
+              <a:t>hero</a:t>
             </a:r>
             <a:endParaRPr lang="en-US" sz="1300" dirty="0"/>
           </a:p>
@@ -20725,7 +20422,7 @@
                 <a:ea typeface="Calibri" pitchFamily="34" charset="-122"/>
                 <a:cs typeface="Calibri" pitchFamily="34" charset="-120"/>
               </a:rPr>
-              <a:t>relating to, having the quality of</a:t>
+              <a:t>brave, admired person</a:t>
             </a:r>
             <a:endParaRPr lang="en-US" sz="850" dirty="0"/>
           </a:p>
@@ -20832,8 +20529,8 @@
         </p:nvSpPr>
         <p:spPr>
           <a:xfrm>
-            <a:off x="2313432" y="3364992"/>
-            <a:ext cx="1645920" cy="475488"/>
+            <a:off x="1975104" y="3364992"/>
+            <a:ext cx="1554480" cy="475488"/>
           </a:xfrm>
           <a:prstGeom prst="rect">
             <a:avLst>
@@ -20859,8 +20556,8 @@
         </p:nvSpPr>
         <p:spPr>
           <a:xfrm>
-            <a:off x="2313432" y="3364992"/>
-            <a:ext cx="1645920" cy="475488"/>
+            <a:off x="1975104" y="3364992"/>
+            <a:ext cx="1554480" cy="475488"/>
           </a:xfrm>
           <a:prstGeom prst="rect">
             <a:avLst/>
@@ -20884,7 +20581,7 @@
                 <a:ea typeface="Trebuchet MS" pitchFamily="34" charset="-122"/>
                 <a:cs typeface="Trebuchet MS" pitchFamily="34" charset="-120"/>
               </a:rPr>
-              <a:t>he</a:t>
+              <a:t>su</a:t>
             </a:r>
             <a:endParaRPr lang="en-US" sz="1400" dirty="0"/>
           </a:p>
@@ -20898,8 +20595,8 @@
         </p:nvSpPr>
         <p:spPr>
           <a:xfrm>
-            <a:off x="3959352" y="3364992"/>
-            <a:ext cx="411480" cy="475488"/>
+            <a:off x="3529584" y="3364992"/>
+            <a:ext cx="73152" cy="475488"/>
           </a:xfrm>
           <a:prstGeom prst="rect">
             <a:avLst/>
@@ -20937,8 +20634,8 @@
         </p:nvSpPr>
         <p:spPr>
           <a:xfrm>
-            <a:off x="4370832" y="3364992"/>
-            <a:ext cx="1645920" cy="475488"/>
+            <a:off x="3602736" y="3364992"/>
+            <a:ext cx="1554480" cy="475488"/>
           </a:xfrm>
           <a:prstGeom prst="rect">
             <a:avLst>
@@ -20964,8 +20661,8 @@
         </p:nvSpPr>
         <p:spPr>
           <a:xfrm>
-            <a:off x="4370832" y="3364992"/>
-            <a:ext cx="1645920" cy="475488"/>
+            <a:off x="3602736" y="3364992"/>
+            <a:ext cx="1554480" cy="475488"/>
           </a:xfrm>
           <a:prstGeom prst="rect">
             <a:avLst/>
@@ -20989,7 +20686,7 @@
                 <a:ea typeface="Trebuchet MS" pitchFamily="34" charset="-122"/>
                 <a:cs typeface="Trebuchet MS" pitchFamily="34" charset="-120"/>
               </a:rPr>
-              <a:t>ro</a:t>
+              <a:t>per</a:t>
             </a:r>
             <a:endParaRPr lang="en-US" sz="1400" dirty="0"/>
           </a:p>
@@ -21003,8 +20700,8 @@
         </p:nvSpPr>
         <p:spPr>
           <a:xfrm>
-            <a:off x="6016752" y="3364992"/>
-            <a:ext cx="411480" cy="475488"/>
+            <a:off x="5157216" y="3364992"/>
+            <a:ext cx="73152" cy="475488"/>
           </a:xfrm>
           <a:prstGeom prst="rect">
             <a:avLst/>
@@ -21042,8 +20739,8 @@
         </p:nvSpPr>
         <p:spPr>
           <a:xfrm>
-            <a:off x="6428232" y="3364992"/>
-            <a:ext cx="1645920" cy="475488"/>
+            <a:off x="5230368" y="3364992"/>
+            <a:ext cx="1554480" cy="475488"/>
           </a:xfrm>
           <a:prstGeom prst="rect">
             <a:avLst>
@@ -21069,8 +20766,8 @@
         </p:nvSpPr>
         <p:spPr>
           <a:xfrm>
-            <a:off x="6428232" y="3364992"/>
-            <a:ext cx="1645920" cy="475488"/>
+            <a:off x="5230368" y="3364992"/>
+            <a:ext cx="1554480" cy="475488"/>
           </a:xfrm>
           <a:prstGeom prst="rect">
             <a:avLst/>
@@ -21094,7 +20791,7 @@
                 <a:ea typeface="Trebuchet MS" pitchFamily="34" charset="-122"/>
                 <a:cs typeface="Trebuchet MS" pitchFamily="34" charset="-120"/>
               </a:rPr>
-              <a:t>ic</a:t>
+              <a:t>he</a:t>
             </a:r>
             <a:endParaRPr lang="en-US" sz="1400" dirty="0"/>
           </a:p>
@@ -21102,7 +20799,112 @@
       </p:sp>
       <p:sp>
         <p:nvSpPr>
-          <p:cNvPr id="33" name="Shape 31"/>
+          <p:cNvPr id="33" name="Text 31"/>
+          <p:cNvSpPr/>
+          <p:nvPr/>
+        </p:nvSpPr>
+        <p:spPr>
+          <a:xfrm>
+            <a:off x="6784848" y="3364992"/>
+            <a:ext cx="73152" cy="475488"/>
+          </a:xfrm>
+          <a:prstGeom prst="rect">
+            <a:avLst/>
+          </a:prstGeom>
+          <a:noFill/>
+          <a:ln/>
+        </p:spPr>
+        <p:txBody>
+          <a:bodyPr wrap="square" lIns="0" tIns="0" rIns="0" bIns="0" rtlCol="0" anchor="ctr"/>
+          <a:lstStyle/>
+          <a:p>
+            <a:pPr algn="ctr" indent="0" marL="0">
+              <a:buNone/>
+            </a:pPr>
+            <a:r>
+              <a:rPr lang="en-US" sz="1600" b="1" dirty="0">
+                <a:solidFill>
+                  <a:srgbClr val="0D9488"/>
+                </a:solidFill>
+                <a:latin typeface="Trebuchet MS" pitchFamily="34" charset="0"/>
+                <a:ea typeface="Trebuchet MS" pitchFamily="34" charset="-122"/>
+                <a:cs typeface="Trebuchet MS" pitchFamily="34" charset="-120"/>
+              </a:rPr>
+              <a:t>·</a:t>
+            </a:r>
+            <a:endParaRPr lang="en-US" sz="1600" dirty="0"/>
+          </a:p>
+        </p:txBody>
+      </p:sp>
+      <p:sp>
+        <p:nvSpPr>
+          <p:cNvPr id="34" name="Shape 32"/>
+          <p:cNvSpPr/>
+          <p:nvPr/>
+        </p:nvSpPr>
+        <p:spPr>
+          <a:xfrm>
+            <a:off x="6858000" y="3364992"/>
+            <a:ext cx="1554480" cy="475488"/>
+          </a:xfrm>
+          <a:prstGeom prst="rect">
+            <a:avLst>
+              <a:gd name="adj" fmla="val 9615"/>
+            </a:avLst>
+          </a:prstGeom>
+          <a:solidFill>
+            <a:srgbClr val="FFFFFF"/>
+          </a:solidFill>
+          <a:ln w="12700">
+            <a:solidFill>
+              <a:srgbClr val="0D9488"/>
+            </a:solidFill>
+            <a:prstDash val="solid"/>
+          </a:ln>
+        </p:spPr>
+      </p:sp>
+      <p:sp>
+        <p:nvSpPr>
+          <p:cNvPr id="35" name="Text 33"/>
+          <p:cNvSpPr/>
+          <p:nvPr/>
+        </p:nvSpPr>
+        <p:spPr>
+          <a:xfrm>
+            <a:off x="6858000" y="3364992"/>
+            <a:ext cx="1554480" cy="475488"/>
+          </a:xfrm>
+          <a:prstGeom prst="rect">
+            <a:avLst/>
+          </a:prstGeom>
+          <a:noFill/>
+          <a:ln/>
+        </p:spPr>
+        <p:txBody>
+          <a:bodyPr wrap="square" lIns="0" tIns="0" rIns="0" bIns="0" rtlCol="0" anchor="ctr"/>
+          <a:lstStyle/>
+          <a:p>
+            <a:pPr algn="ctr" indent="0" marL="0">
+              <a:buNone/>
+            </a:pPr>
+            <a:r>
+              <a:rPr lang="en-US" sz="1400" b="1" dirty="0">
+                <a:solidFill>
+                  <a:srgbClr val="0D9488"/>
+                </a:solidFill>
+                <a:latin typeface="Trebuchet MS" pitchFamily="34" charset="0"/>
+                <a:ea typeface="Trebuchet MS" pitchFamily="34" charset="-122"/>
+                <a:cs typeface="Trebuchet MS" pitchFamily="34" charset="-120"/>
+              </a:rPr>
+              <a:t>ro</a:t>
+            </a:r>
+            <a:endParaRPr lang="en-US" sz="1400" dirty="0"/>
+          </a:p>
+        </p:txBody>
+      </p:sp>
+      <p:sp>
+        <p:nvSpPr>
+          <p:cNvPr id="36" name="Shape 34"/>
           <p:cNvSpPr/>
           <p:nvPr/>
         </p:nvSpPr>
@@ -21129,7 +20931,7 @@
       </p:sp>
       <p:sp>
         <p:nvSpPr>
-          <p:cNvPr id="34" name="Text 32"/>
+          <p:cNvPr id="37" name="Text 35"/>
           <p:cNvSpPr/>
           <p:nvPr/>
         </p:nvSpPr>
@@ -21168,7 +20970,7 @@
       </p:sp>
       <p:sp>
         <p:nvSpPr>
-          <p:cNvPr id="35" name="Shape 33"/>
+          <p:cNvPr id="38" name="Shape 36"/>
           <p:cNvSpPr/>
           <p:nvPr/>
         </p:nvSpPr>
@@ -21195,7 +20997,7 @@
       </p:sp>
       <p:sp>
         <p:nvSpPr>
-          <p:cNvPr id="36" name="Text 34"/>
+          <p:cNvPr id="39" name="Text 37"/>
           <p:cNvSpPr/>
           <p:nvPr/>
         </p:nvSpPr>
@@ -21657,7 +21459,7 @@
                 <a:ea typeface="Trebuchet MS" pitchFamily="34" charset="-122"/>
                 <a:cs typeface="Trebuchet MS" pitchFamily="34" charset="-120"/>
               </a:rPr>
-              <a:t>heroic</a:t>
+              <a:t>superhero</a:t>
             </a:r>
             <a:endParaRPr lang="en-US" sz="2800" dirty="0"/>
           </a:p>
@@ -21746,11 +21548,11 @@
             </a:avLst>
           </a:prstGeom>
           <a:solidFill>
-            <a:srgbClr val="CCFBF1"/>
+            <a:srgbClr val="DDD6FE"/>
           </a:solidFill>
           <a:ln w="19050">
             <a:solidFill>
-              <a:srgbClr val="0D9488"/>
+              <a:srgbClr val="7C3AED"/>
             </a:solidFill>
             <a:prstDash val="solid"/>
           </a:ln>
@@ -21790,13 +21592,13 @@
             <a:r>
               <a:rPr lang="en-US" sz="1300" b="1" dirty="0">
                 <a:solidFill>
-                  <a:srgbClr val="0F766E"/>
+                  <a:srgbClr val="4C1D95"/>
                 </a:solidFill>
                 <a:latin typeface="Trebuchet MS" pitchFamily="34" charset="0"/>
                 <a:ea typeface="Trebuchet MS" pitchFamily="34" charset="-122"/>
                 <a:cs typeface="Trebuchet MS" pitchFamily="34" charset="-120"/>
               </a:rPr>
-              <a:t>hero</a:t>
+              <a:t>super</a:t>
             </a:r>
             <a:endParaRPr lang="en-US" sz="1300" dirty="0"/>
           </a:p>
@@ -21835,7 +21637,7 @@
                 <a:ea typeface="Calibri" pitchFamily="34" charset="-122"/>
                 <a:cs typeface="Calibri" pitchFamily="34" charset="-120"/>
               </a:rPr>
-              <a:t>brave, admired person</a:t>
+              <a:t>above, beyond</a:t>
             </a:r>
             <a:endParaRPr lang="en-US" sz="850" dirty="0"/>
           </a:p>
@@ -21858,11 +21660,11 @@
             </a:avLst>
           </a:prstGeom>
           <a:solidFill>
-            <a:srgbClr val="FCE7F3"/>
+            <a:srgbClr val="CCFBF1"/>
           </a:solidFill>
           <a:ln w="19050">
             <a:solidFill>
-              <a:srgbClr val="DB2777"/>
+              <a:srgbClr val="0D9488"/>
             </a:solidFill>
             <a:prstDash val="solid"/>
           </a:ln>
@@ -21902,13 +21704,13 @@
             <a:r>
               <a:rPr lang="en-US" sz="1300" b="1" dirty="0">
                 <a:solidFill>
-                  <a:srgbClr val="9D174D"/>
+                  <a:srgbClr val="0F766E"/>
                 </a:solidFill>
                 <a:latin typeface="Trebuchet MS" pitchFamily="34" charset="0"/>
                 <a:ea typeface="Trebuchet MS" pitchFamily="34" charset="-122"/>
                 <a:cs typeface="Trebuchet MS" pitchFamily="34" charset="-120"/>
               </a:rPr>
-              <a:t>ic</a:t>
+              <a:t>hero</a:t>
             </a:r>
             <a:endParaRPr lang="en-US" sz="1300" dirty="0"/>
           </a:p>
@@ -21947,7 +21749,7 @@
                 <a:ea typeface="Calibri" pitchFamily="34" charset="-122"/>
                 <a:cs typeface="Calibri" pitchFamily="34" charset="-120"/>
               </a:rPr>
-              <a:t>relating to, having the quality of</a:t>
+              <a:t>brave, admired person</a:t>
             </a:r>
             <a:endParaRPr lang="en-US" sz="850" dirty="0"/>
           </a:p>
@@ -22054,8 +21856,8 @@
         </p:nvSpPr>
         <p:spPr>
           <a:xfrm>
-            <a:off x="2313432" y="3364992"/>
-            <a:ext cx="1645920" cy="475488"/>
+            <a:off x="1975104" y="3364992"/>
+            <a:ext cx="1554480" cy="475488"/>
           </a:xfrm>
           <a:prstGeom prst="rect">
             <a:avLst>
@@ -22081,8 +21883,8 @@
         </p:nvSpPr>
         <p:spPr>
           <a:xfrm>
-            <a:off x="2313432" y="3364992"/>
-            <a:ext cx="1645920" cy="475488"/>
+            <a:off x="1975104" y="3364992"/>
+            <a:ext cx="1554480" cy="475488"/>
           </a:xfrm>
           <a:prstGeom prst="rect">
             <a:avLst/>
@@ -22106,7 +21908,7 @@
                 <a:ea typeface="Trebuchet MS" pitchFamily="34" charset="-122"/>
                 <a:cs typeface="Trebuchet MS" pitchFamily="34" charset="-120"/>
               </a:rPr>
-              <a:t>he</a:t>
+              <a:t>su</a:t>
             </a:r>
             <a:endParaRPr lang="en-US" sz="1400" dirty="0"/>
           </a:p>
@@ -22120,8 +21922,8 @@
         </p:nvSpPr>
         <p:spPr>
           <a:xfrm>
-            <a:off x="3959352" y="3364992"/>
-            <a:ext cx="411480" cy="475488"/>
+            <a:off x="3529584" y="3364992"/>
+            <a:ext cx="73152" cy="475488"/>
           </a:xfrm>
           <a:prstGeom prst="rect">
             <a:avLst/>
@@ -22159,8 +21961,8 @@
         </p:nvSpPr>
         <p:spPr>
           <a:xfrm>
-            <a:off x="4370832" y="3364992"/>
-            <a:ext cx="1645920" cy="475488"/>
+            <a:off x="3602736" y="3364992"/>
+            <a:ext cx="1554480" cy="475488"/>
           </a:xfrm>
           <a:prstGeom prst="rect">
             <a:avLst>
@@ -22186,8 +21988,8 @@
         </p:nvSpPr>
         <p:spPr>
           <a:xfrm>
-            <a:off x="4370832" y="3364992"/>
-            <a:ext cx="1645920" cy="475488"/>
+            <a:off x="3602736" y="3364992"/>
+            <a:ext cx="1554480" cy="475488"/>
           </a:xfrm>
           <a:prstGeom prst="rect">
             <a:avLst/>
@@ -22211,7 +22013,7 @@
                 <a:ea typeface="Trebuchet MS" pitchFamily="34" charset="-122"/>
                 <a:cs typeface="Trebuchet MS" pitchFamily="34" charset="-120"/>
               </a:rPr>
-              <a:t>ro</a:t>
+              <a:t>per</a:t>
             </a:r>
             <a:endParaRPr lang="en-US" sz="1400" dirty="0"/>
           </a:p>
@@ -22225,8 +22027,8 @@
         </p:nvSpPr>
         <p:spPr>
           <a:xfrm>
-            <a:off x="6016752" y="3364992"/>
-            <a:ext cx="411480" cy="475488"/>
+            <a:off x="5157216" y="3364992"/>
+            <a:ext cx="73152" cy="475488"/>
           </a:xfrm>
           <a:prstGeom prst="rect">
             <a:avLst/>
@@ -22264,8 +22066,8 @@
         </p:nvSpPr>
         <p:spPr>
           <a:xfrm>
-            <a:off x="6428232" y="3364992"/>
-            <a:ext cx="1645920" cy="475488"/>
+            <a:off x="5230368" y="3364992"/>
+            <a:ext cx="1554480" cy="475488"/>
           </a:xfrm>
           <a:prstGeom prst="rect">
             <a:avLst>
@@ -22291,8 +22093,8 @@
         </p:nvSpPr>
         <p:spPr>
           <a:xfrm>
-            <a:off x="6428232" y="3364992"/>
-            <a:ext cx="1645920" cy="475488"/>
+            <a:off x="5230368" y="3364992"/>
+            <a:ext cx="1554480" cy="475488"/>
           </a:xfrm>
           <a:prstGeom prst="rect">
             <a:avLst/>
@@ -22316,7 +22118,7 @@
                 <a:ea typeface="Trebuchet MS" pitchFamily="34" charset="-122"/>
                 <a:cs typeface="Trebuchet MS" pitchFamily="34" charset="-120"/>
               </a:rPr>
-              <a:t>ic</a:t>
+              <a:t>he</a:t>
             </a:r>
             <a:endParaRPr lang="en-US" sz="1400" dirty="0"/>
           </a:p>
@@ -22324,7 +22126,112 @@
       </p:sp>
       <p:sp>
         <p:nvSpPr>
-          <p:cNvPr id="33" name="Shape 31"/>
+          <p:cNvPr id="33" name="Text 31"/>
+          <p:cNvSpPr/>
+          <p:nvPr/>
+        </p:nvSpPr>
+        <p:spPr>
+          <a:xfrm>
+            <a:off x="6784848" y="3364992"/>
+            <a:ext cx="73152" cy="475488"/>
+          </a:xfrm>
+          <a:prstGeom prst="rect">
+            <a:avLst/>
+          </a:prstGeom>
+          <a:noFill/>
+          <a:ln/>
+        </p:spPr>
+        <p:txBody>
+          <a:bodyPr wrap="square" lIns="0" tIns="0" rIns="0" bIns="0" rtlCol="0" anchor="ctr"/>
+          <a:lstStyle/>
+          <a:p>
+            <a:pPr algn="ctr" indent="0" marL="0">
+              <a:buNone/>
+            </a:pPr>
+            <a:r>
+              <a:rPr lang="en-US" sz="1600" b="1" dirty="0">
+                <a:solidFill>
+                  <a:srgbClr val="0D9488"/>
+                </a:solidFill>
+                <a:latin typeface="Trebuchet MS" pitchFamily="34" charset="0"/>
+                <a:ea typeface="Trebuchet MS" pitchFamily="34" charset="-122"/>
+                <a:cs typeface="Trebuchet MS" pitchFamily="34" charset="-120"/>
+              </a:rPr>
+              <a:t>·</a:t>
+            </a:r>
+            <a:endParaRPr lang="en-US" sz="1600" dirty="0"/>
+          </a:p>
+        </p:txBody>
+      </p:sp>
+      <p:sp>
+        <p:nvSpPr>
+          <p:cNvPr id="34" name="Shape 32"/>
+          <p:cNvSpPr/>
+          <p:nvPr/>
+        </p:nvSpPr>
+        <p:spPr>
+          <a:xfrm>
+            <a:off x="6858000" y="3364992"/>
+            <a:ext cx="1554480" cy="475488"/>
+          </a:xfrm>
+          <a:prstGeom prst="rect">
+            <a:avLst>
+              <a:gd name="adj" fmla="val 9615"/>
+            </a:avLst>
+          </a:prstGeom>
+          <a:solidFill>
+            <a:srgbClr val="FFFFFF"/>
+          </a:solidFill>
+          <a:ln w="12700">
+            <a:solidFill>
+              <a:srgbClr val="0D9488"/>
+            </a:solidFill>
+            <a:prstDash val="solid"/>
+          </a:ln>
+        </p:spPr>
+      </p:sp>
+      <p:sp>
+        <p:nvSpPr>
+          <p:cNvPr id="35" name="Text 33"/>
+          <p:cNvSpPr/>
+          <p:nvPr/>
+        </p:nvSpPr>
+        <p:spPr>
+          <a:xfrm>
+            <a:off x="6858000" y="3364992"/>
+            <a:ext cx="1554480" cy="475488"/>
+          </a:xfrm>
+          <a:prstGeom prst="rect">
+            <a:avLst/>
+          </a:prstGeom>
+          <a:noFill/>
+          <a:ln/>
+        </p:spPr>
+        <p:txBody>
+          <a:bodyPr wrap="square" lIns="0" tIns="0" rIns="0" bIns="0" rtlCol="0" anchor="ctr"/>
+          <a:lstStyle/>
+          <a:p>
+            <a:pPr algn="ctr" indent="0" marL="0">
+              <a:buNone/>
+            </a:pPr>
+            <a:r>
+              <a:rPr lang="en-US" sz="1400" b="1" dirty="0">
+                <a:solidFill>
+                  <a:srgbClr val="0D9488"/>
+                </a:solidFill>
+                <a:latin typeface="Trebuchet MS" pitchFamily="34" charset="0"/>
+                <a:ea typeface="Trebuchet MS" pitchFamily="34" charset="-122"/>
+                <a:cs typeface="Trebuchet MS" pitchFamily="34" charset="-120"/>
+              </a:rPr>
+              <a:t>ro</a:t>
+            </a:r>
+            <a:endParaRPr lang="en-US" sz="1400" dirty="0"/>
+          </a:p>
+        </p:txBody>
+      </p:sp>
+      <p:sp>
+        <p:nvSpPr>
+          <p:cNvPr id="36" name="Shape 34"/>
           <p:cNvSpPr/>
           <p:nvPr/>
         </p:nvSpPr>
@@ -22351,7 +22258,7 @@
       </p:sp>
       <p:sp>
         <p:nvSpPr>
-          <p:cNvPr id="34" name="Text 32"/>
+          <p:cNvPr id="37" name="Text 35"/>
           <p:cNvSpPr/>
           <p:nvPr/>
         </p:nvSpPr>
@@ -22390,18 +22297,18 @@
       </p:sp>
       <p:sp>
         <p:nvSpPr>
-          <p:cNvPr id="35" name="Shape 33"/>
+          <p:cNvPr id="38" name="Shape 36"/>
           <p:cNvSpPr/>
           <p:nvPr/>
         </p:nvSpPr>
         <p:spPr>
           <a:xfrm>
             <a:off x="1874520" y="4096512"/>
-            <a:ext cx="6903720" cy="804672"/>
+            <a:ext cx="6903720" cy="658368"/>
           </a:xfrm>
           <a:prstGeom prst="rect">
             <a:avLst>
-              <a:gd name="adj" fmla="val 6818"/>
+              <a:gd name="adj" fmla="val 8333"/>
             </a:avLst>
           </a:prstGeom>
           <a:solidFill>
@@ -22417,18 +22324,18 @@
       </p:sp>
       <p:sp>
         <p:nvSpPr>
-          <p:cNvPr id="36" name="Shape 34"/>
-          <p:cNvSpPr/>
-          <p:nvPr/>
-        </p:nvSpPr>
-        <p:spPr>
-          <a:xfrm>
-            <a:off x="2254649" y="4169664"/>
-            <a:ext cx="685800" cy="384048"/>
+          <p:cNvPr id="39" name="Shape 37"/>
+          <p:cNvSpPr/>
+          <p:nvPr/>
+        </p:nvSpPr>
+        <p:spPr>
+          <a:xfrm>
+            <a:off x="2023872" y="4169664"/>
+            <a:ext cx="685800" cy="475488"/>
           </a:xfrm>
           <a:prstGeom prst="rect">
             <a:avLst>
-              <a:gd name="adj" fmla="val 9524"/>
+              <a:gd name="adj" fmla="val 7692"/>
             </a:avLst>
           </a:prstGeom>
           <a:solidFill>
@@ -22444,14 +22351,14 @@
       </p:sp>
       <p:sp>
         <p:nvSpPr>
-          <p:cNvPr id="37" name="Text 35"/>
-          <p:cNvSpPr/>
-          <p:nvPr/>
-        </p:nvSpPr>
-        <p:spPr>
-          <a:xfrm>
-            <a:off x="2254649" y="4169664"/>
-            <a:ext cx="685800" cy="384048"/>
+          <p:cNvPr id="40" name="Text 38"/>
+          <p:cNvSpPr/>
+          <p:nvPr/>
+        </p:nvSpPr>
+        <p:spPr>
+          <a:xfrm>
+            <a:off x="2023872" y="4169664"/>
+            <a:ext cx="685800" cy="475488"/>
           </a:xfrm>
           <a:prstGeom prst="rect">
             <a:avLst/>
@@ -22475,7 +22382,7 @@
                 <a:ea typeface="Trebuchet MS" pitchFamily="34" charset="-122"/>
                 <a:cs typeface="Trebuchet MS" pitchFamily="34" charset="-120"/>
               </a:rPr>
-              <a:t>h</a:t>
+              <a:t>s</a:t>
             </a:r>
             <a:endParaRPr lang="en-US" sz="900" dirty="0"/>
           </a:p>
@@ -22483,18 +22390,18 @@
       </p:sp>
       <p:sp>
         <p:nvSpPr>
-          <p:cNvPr id="38" name="Shape 36"/>
-          <p:cNvSpPr/>
-          <p:nvPr/>
-        </p:nvSpPr>
-        <p:spPr>
-          <a:xfrm>
-            <a:off x="3293146" y="4169664"/>
-            <a:ext cx="685800" cy="384048"/>
+          <p:cNvPr id="41" name="Shape 39"/>
+          <p:cNvSpPr/>
+          <p:nvPr/>
+        </p:nvSpPr>
+        <p:spPr>
+          <a:xfrm>
+            <a:off x="2831592" y="4169664"/>
+            <a:ext cx="685800" cy="475488"/>
           </a:xfrm>
           <a:prstGeom prst="rect">
             <a:avLst>
-              <a:gd name="adj" fmla="val 9524"/>
+              <a:gd name="adj" fmla="val 7692"/>
             </a:avLst>
           </a:prstGeom>
           <a:solidFill>
@@ -22510,14 +22417,14 @@
       </p:sp>
       <p:sp>
         <p:nvSpPr>
-          <p:cNvPr id="39" name="Text 37"/>
-          <p:cNvSpPr/>
-          <p:nvPr/>
-        </p:nvSpPr>
-        <p:spPr>
-          <a:xfrm>
-            <a:off x="3293146" y="4169664"/>
-            <a:ext cx="685800" cy="384048"/>
+          <p:cNvPr id="42" name="Text 40"/>
+          <p:cNvSpPr/>
+          <p:nvPr/>
+        </p:nvSpPr>
+        <p:spPr>
+          <a:xfrm>
+            <a:off x="2831592" y="4169664"/>
+            <a:ext cx="685800" cy="475488"/>
           </a:xfrm>
           <a:prstGeom prst="rect">
             <a:avLst/>
@@ -22541,7 +22448,7 @@
                 <a:ea typeface="Trebuchet MS" pitchFamily="34" charset="-122"/>
                 <a:cs typeface="Trebuchet MS" pitchFamily="34" charset="-120"/>
               </a:rPr>
-              <a:t>e</a:t>
+              <a:t>u</a:t>
             </a:r>
             <a:endParaRPr lang="en-US" sz="900" dirty="0"/>
           </a:p>
@@ -22549,18 +22456,18 @@
       </p:sp>
       <p:sp>
         <p:nvSpPr>
-          <p:cNvPr id="40" name="Shape 38"/>
-          <p:cNvSpPr/>
-          <p:nvPr/>
-        </p:nvSpPr>
-        <p:spPr>
-          <a:xfrm>
-            <a:off x="4331643" y="4169664"/>
-            <a:ext cx="685800" cy="384048"/>
+          <p:cNvPr id="43" name="Shape 41"/>
+          <p:cNvSpPr/>
+          <p:nvPr/>
+        </p:nvSpPr>
+        <p:spPr>
+          <a:xfrm>
+            <a:off x="3639312" y="4169664"/>
+            <a:ext cx="685800" cy="475488"/>
           </a:xfrm>
           <a:prstGeom prst="rect">
             <a:avLst>
-              <a:gd name="adj" fmla="val 9524"/>
+              <a:gd name="adj" fmla="val 7692"/>
             </a:avLst>
           </a:prstGeom>
           <a:solidFill>
@@ -22576,14 +22483,14 @@
       </p:sp>
       <p:sp>
         <p:nvSpPr>
-          <p:cNvPr id="41" name="Text 39"/>
-          <p:cNvSpPr/>
-          <p:nvPr/>
-        </p:nvSpPr>
-        <p:spPr>
-          <a:xfrm>
-            <a:off x="4331643" y="4169664"/>
-            <a:ext cx="685800" cy="384048"/>
+          <p:cNvPr id="44" name="Text 42"/>
+          <p:cNvSpPr/>
+          <p:nvPr/>
+        </p:nvSpPr>
+        <p:spPr>
+          <a:xfrm>
+            <a:off x="3639312" y="4169664"/>
+            <a:ext cx="685800" cy="475488"/>
           </a:xfrm>
           <a:prstGeom prst="rect">
             <a:avLst/>
@@ -22607,7 +22514,7 @@
                 <a:ea typeface="Trebuchet MS" pitchFamily="34" charset="-122"/>
                 <a:cs typeface="Trebuchet MS" pitchFamily="34" charset="-120"/>
               </a:rPr>
-              <a:t>r</a:t>
+              <a:t>p</a:t>
             </a:r>
             <a:endParaRPr lang="en-US" sz="900" dirty="0"/>
           </a:p>
@@ -22615,18 +22522,18 @@
       </p:sp>
       <p:sp>
         <p:nvSpPr>
-          <p:cNvPr id="42" name="Shape 40"/>
-          <p:cNvSpPr/>
-          <p:nvPr/>
-        </p:nvSpPr>
-        <p:spPr>
-          <a:xfrm>
-            <a:off x="5370141" y="4169664"/>
-            <a:ext cx="685800" cy="384048"/>
+          <p:cNvPr id="45" name="Shape 43"/>
+          <p:cNvSpPr/>
+          <p:nvPr/>
+        </p:nvSpPr>
+        <p:spPr>
+          <a:xfrm>
+            <a:off x="4447032" y="4169664"/>
+            <a:ext cx="685800" cy="475488"/>
           </a:xfrm>
           <a:prstGeom prst="rect">
             <a:avLst>
-              <a:gd name="adj" fmla="val 9524"/>
+              <a:gd name="adj" fmla="val 7692"/>
             </a:avLst>
           </a:prstGeom>
           <a:solidFill>
@@ -22642,14 +22549,14 @@
       </p:sp>
       <p:sp>
         <p:nvSpPr>
-          <p:cNvPr id="43" name="Text 41"/>
-          <p:cNvSpPr/>
-          <p:nvPr/>
-        </p:nvSpPr>
-        <p:spPr>
-          <a:xfrm>
-            <a:off x="5370141" y="4169664"/>
-            <a:ext cx="685800" cy="384048"/>
+          <p:cNvPr id="46" name="Text 44"/>
+          <p:cNvSpPr/>
+          <p:nvPr/>
+        </p:nvSpPr>
+        <p:spPr>
+          <a:xfrm>
+            <a:off x="4447032" y="4169664"/>
+            <a:ext cx="685800" cy="475488"/>
           </a:xfrm>
           <a:prstGeom prst="rect">
             <a:avLst/>
@@ -22673,7 +22580,7 @@
                 <a:ea typeface="Trebuchet MS" pitchFamily="34" charset="-122"/>
                 <a:cs typeface="Trebuchet MS" pitchFamily="34" charset="-120"/>
               </a:rPr>
-              <a:t>o</a:t>
+              <a:t>er</a:t>
             </a:r>
             <a:endParaRPr lang="en-US" sz="900" dirty="0"/>
           </a:p>
@@ -22681,18 +22588,18 @@
       </p:sp>
       <p:sp>
         <p:nvSpPr>
-          <p:cNvPr id="44" name="Shape 42"/>
-          <p:cNvSpPr/>
-          <p:nvPr/>
-        </p:nvSpPr>
-        <p:spPr>
-          <a:xfrm>
-            <a:off x="6408638" y="4169664"/>
-            <a:ext cx="685800" cy="384048"/>
+          <p:cNvPr id="47" name="Shape 45"/>
+          <p:cNvSpPr/>
+          <p:nvPr/>
+        </p:nvSpPr>
+        <p:spPr>
+          <a:xfrm>
+            <a:off x="5254752" y="4169664"/>
+            <a:ext cx="685800" cy="475488"/>
           </a:xfrm>
           <a:prstGeom prst="rect">
             <a:avLst>
-              <a:gd name="adj" fmla="val 9524"/>
+              <a:gd name="adj" fmla="val 7692"/>
             </a:avLst>
           </a:prstGeom>
           <a:solidFill>
@@ -22708,14 +22615,14 @@
       </p:sp>
       <p:sp>
         <p:nvSpPr>
-          <p:cNvPr id="45" name="Text 43"/>
-          <p:cNvSpPr/>
-          <p:nvPr/>
-        </p:nvSpPr>
-        <p:spPr>
-          <a:xfrm>
-            <a:off x="6408638" y="4169664"/>
-            <a:ext cx="685800" cy="384048"/>
+          <p:cNvPr id="48" name="Text 46"/>
+          <p:cNvSpPr/>
+          <p:nvPr/>
+        </p:nvSpPr>
+        <p:spPr>
+          <a:xfrm>
+            <a:off x="5254752" y="4169664"/>
+            <a:ext cx="685800" cy="475488"/>
           </a:xfrm>
           <a:prstGeom prst="rect">
             <a:avLst/>
@@ -22739,7 +22646,7 @@
                 <a:ea typeface="Trebuchet MS" pitchFamily="34" charset="-122"/>
                 <a:cs typeface="Trebuchet MS" pitchFamily="34" charset="-120"/>
               </a:rPr>
-              <a:t>i</a:t>
+              <a:t>h</a:t>
             </a:r>
             <a:endParaRPr lang="en-US" sz="900" dirty="0"/>
           </a:p>
@@ -22747,18 +22654,18 @@
       </p:sp>
       <p:sp>
         <p:nvSpPr>
-          <p:cNvPr id="46" name="Shape 44"/>
-          <p:cNvSpPr/>
-          <p:nvPr/>
-        </p:nvSpPr>
-        <p:spPr>
-          <a:xfrm>
-            <a:off x="7447135" y="4169664"/>
-            <a:ext cx="685800" cy="384048"/>
+          <p:cNvPr id="49" name="Shape 47"/>
+          <p:cNvSpPr/>
+          <p:nvPr/>
+        </p:nvSpPr>
+        <p:spPr>
+          <a:xfrm>
+            <a:off x="6062472" y="4169664"/>
+            <a:ext cx="685800" cy="475488"/>
           </a:xfrm>
           <a:prstGeom prst="rect">
             <a:avLst>
-              <a:gd name="adj" fmla="val 9524"/>
+              <a:gd name="adj" fmla="val 7692"/>
             </a:avLst>
           </a:prstGeom>
           <a:solidFill>
@@ -22774,14 +22681,14 @@
       </p:sp>
       <p:sp>
         <p:nvSpPr>
-          <p:cNvPr id="47" name="Text 45"/>
-          <p:cNvSpPr/>
-          <p:nvPr/>
-        </p:nvSpPr>
-        <p:spPr>
-          <a:xfrm>
-            <a:off x="7447135" y="4169664"/>
-            <a:ext cx="685800" cy="384048"/>
+          <p:cNvPr id="50" name="Text 48"/>
+          <p:cNvSpPr/>
+          <p:nvPr/>
+        </p:nvSpPr>
+        <p:spPr>
+          <a:xfrm>
+            <a:off x="6062472" y="4169664"/>
+            <a:ext cx="685800" cy="475488"/>
           </a:xfrm>
           <a:prstGeom prst="rect">
             <a:avLst/>
@@ -22805,7 +22712,7 @@
                 <a:ea typeface="Trebuchet MS" pitchFamily="34" charset="-122"/>
                 <a:cs typeface="Trebuchet MS" pitchFamily="34" charset="-120"/>
               </a:rPr>
-              <a:t>c</a:t>
+              <a:t>e</a:t>
             </a:r>
             <a:endParaRPr lang="en-US" sz="900" dirty="0"/>
           </a:p>
@@ -22813,40 +22720,133 @@
       </p:sp>
       <p:sp>
         <p:nvSpPr>
-          <p:cNvPr id="48" name="Text 46"/>
-          <p:cNvSpPr/>
-          <p:nvPr/>
-        </p:nvSpPr>
-        <p:spPr>
-          <a:xfrm>
-            <a:off x="7447135" y="4572000"/>
-            <a:ext cx="685800" cy="219456"/>
-          </a:xfrm>
-          <a:prstGeom prst="rect">
-            <a:avLst/>
-          </a:prstGeom>
-          <a:noFill/>
-          <a:ln/>
-        </p:spPr>
-        <p:txBody>
-          <a:bodyPr wrap="square" lIns="0" tIns="0" rIns="0" bIns="0" rtlCol="0" anchor="t"/>
-          <a:lstStyle/>
-          <a:p>
-            <a:pPr algn="ctr" indent="0" marL="0">
-              <a:buNone/>
-            </a:pPr>
-            <a:r>
-              <a:rPr lang="en-US" sz="750" i="1" dirty="0">
-                <a:solidFill>
-                  <a:srgbClr val="94A3B8"/>
-                </a:solidFill>
-                <a:latin typeface="Calibri" pitchFamily="34" charset="0"/>
-                <a:ea typeface="Calibri" pitchFamily="34" charset="-122"/>
-                <a:cs typeface="Calibri" pitchFamily="34" charset="-120"/>
-              </a:rPr>
-              <a:t>/k/</a:t>
-            </a:r>
-            <a:endParaRPr lang="en-US" sz="750" dirty="0"/>
+          <p:cNvPr id="51" name="Shape 49"/>
+          <p:cNvSpPr/>
+          <p:nvPr/>
+        </p:nvSpPr>
+        <p:spPr>
+          <a:xfrm>
+            <a:off x="6870192" y="4169664"/>
+            <a:ext cx="685800" cy="475488"/>
+          </a:xfrm>
+          <a:prstGeom prst="rect">
+            <a:avLst>
+              <a:gd name="adj" fmla="val 7692"/>
+            </a:avLst>
+          </a:prstGeom>
+          <a:solidFill>
+            <a:srgbClr val="FFFFFF"/>
+          </a:solidFill>
+          <a:ln w="12700">
+            <a:solidFill>
+              <a:srgbClr val="DB2777"/>
+            </a:solidFill>
+            <a:prstDash val="solid"/>
+          </a:ln>
+        </p:spPr>
+      </p:sp>
+      <p:sp>
+        <p:nvSpPr>
+          <p:cNvPr id="52" name="Text 50"/>
+          <p:cNvSpPr/>
+          <p:nvPr/>
+        </p:nvSpPr>
+        <p:spPr>
+          <a:xfrm>
+            <a:off x="6870192" y="4169664"/>
+            <a:ext cx="685800" cy="475488"/>
+          </a:xfrm>
+          <a:prstGeom prst="rect">
+            <a:avLst/>
+          </a:prstGeom>
+          <a:noFill/>
+          <a:ln/>
+        </p:spPr>
+        <p:txBody>
+          <a:bodyPr wrap="square" lIns="0" tIns="0" rIns="0" bIns="0" rtlCol="0" anchor="ctr"/>
+          <a:lstStyle/>
+          <a:p>
+            <a:pPr algn="ctr" indent="0" marL="0">
+              <a:buNone/>
+            </a:pPr>
+            <a:r>
+              <a:rPr lang="en-US" sz="900" b="1" dirty="0">
+                <a:solidFill>
+                  <a:srgbClr val="9D174D"/>
+                </a:solidFill>
+                <a:latin typeface="Trebuchet MS" pitchFamily="34" charset="0"/>
+                <a:ea typeface="Trebuchet MS" pitchFamily="34" charset="-122"/>
+                <a:cs typeface="Trebuchet MS" pitchFamily="34" charset="-120"/>
+              </a:rPr>
+              <a:t>r</a:t>
+            </a:r>
+            <a:endParaRPr lang="en-US" sz="900" dirty="0"/>
+          </a:p>
+        </p:txBody>
+      </p:sp>
+      <p:sp>
+        <p:nvSpPr>
+          <p:cNvPr id="53" name="Shape 51"/>
+          <p:cNvSpPr/>
+          <p:nvPr/>
+        </p:nvSpPr>
+        <p:spPr>
+          <a:xfrm>
+            <a:off x="7677912" y="4169664"/>
+            <a:ext cx="685800" cy="475488"/>
+          </a:xfrm>
+          <a:prstGeom prst="rect">
+            <a:avLst>
+              <a:gd name="adj" fmla="val 7692"/>
+            </a:avLst>
+          </a:prstGeom>
+          <a:solidFill>
+            <a:srgbClr val="FFFFFF"/>
+          </a:solidFill>
+          <a:ln w="12700">
+            <a:solidFill>
+              <a:srgbClr val="DB2777"/>
+            </a:solidFill>
+            <a:prstDash val="solid"/>
+          </a:ln>
+        </p:spPr>
+      </p:sp>
+      <p:sp>
+        <p:nvSpPr>
+          <p:cNvPr id="54" name="Text 52"/>
+          <p:cNvSpPr/>
+          <p:nvPr/>
+        </p:nvSpPr>
+        <p:spPr>
+          <a:xfrm>
+            <a:off x="7677912" y="4169664"/>
+            <a:ext cx="685800" cy="475488"/>
+          </a:xfrm>
+          <a:prstGeom prst="rect">
+            <a:avLst/>
+          </a:prstGeom>
+          <a:noFill/>
+          <a:ln/>
+        </p:spPr>
+        <p:txBody>
+          <a:bodyPr wrap="square" lIns="0" tIns="0" rIns="0" bIns="0" rtlCol="0" anchor="ctr"/>
+          <a:lstStyle/>
+          <a:p>
+            <a:pPr algn="ctr" indent="0" marL="0">
+              <a:buNone/>
+            </a:pPr>
+            <a:r>
+              <a:rPr lang="en-US" sz="900" b="1" dirty="0">
+                <a:solidFill>
+                  <a:srgbClr val="9D174D"/>
+                </a:solidFill>
+                <a:latin typeface="Trebuchet MS" pitchFamily="34" charset="0"/>
+                <a:ea typeface="Trebuchet MS" pitchFamily="34" charset="-122"/>
+                <a:cs typeface="Trebuchet MS" pitchFamily="34" charset="-120"/>
+              </a:rPr>
+              <a:t>o</a:t>
+            </a:r>
+            <a:endParaRPr lang="en-US" sz="900" dirty="0"/>
           </a:p>
         </p:txBody>
       </p:sp>
@@ -23275,7 +23275,7 @@
                 <a:ea typeface="Trebuchet MS" pitchFamily="34" charset="-122"/>
                 <a:cs typeface="Trebuchet MS" pitchFamily="34" charset="-120"/>
               </a:rPr>
-              <a:t>antihero</a:t>
+              <a:t>heroically</a:t>
             </a:r>
             <a:endParaRPr lang="en-US" sz="2800" dirty="0"/>
           </a:p>
@@ -24102,7 +24102,7 @@
                 <a:ea typeface="Trebuchet MS" pitchFamily="34" charset="-122"/>
                 <a:cs typeface="Trebuchet MS" pitchFamily="34" charset="-120"/>
               </a:rPr>
-              <a:t>antihero</a:t>
+              <a:t>heroically</a:t>
             </a:r>
             <a:endParaRPr lang="en-US" sz="2800" dirty="0"/>
           </a:p>
@@ -24182,7 +24182,7 @@
         </p:nvSpPr>
         <p:spPr>
           <a:xfrm>
-            <a:off x="2938272" y="2258568"/>
+            <a:off x="2221992" y="2258568"/>
             <a:ext cx="1828800" cy="292608"/>
           </a:xfrm>
           <a:prstGeom prst="rect">
@@ -24191,11 +24191,11 @@
             </a:avLst>
           </a:prstGeom>
           <a:solidFill>
-            <a:srgbClr val="DDD6FE"/>
+            <a:srgbClr val="CCFBF1"/>
           </a:solidFill>
           <a:ln w="19050">
             <a:solidFill>
-              <a:srgbClr val="7C3AED"/>
+              <a:srgbClr val="0D9488"/>
             </a:solidFill>
             <a:prstDash val="solid"/>
           </a:ln>
@@ -24216,7 +24216,7 @@
         </p:nvSpPr>
         <p:spPr>
           <a:xfrm>
-            <a:off x="2938272" y="2258568"/>
+            <a:off x="2221992" y="2258568"/>
             <a:ext cx="1828800" cy="292608"/>
           </a:xfrm>
           <a:prstGeom prst="rect">
@@ -24235,13 +24235,13 @@
             <a:r>
               <a:rPr lang="en-US" sz="1300" b="1" dirty="0">
                 <a:solidFill>
-                  <a:srgbClr val="4C1D95"/>
+                  <a:srgbClr val="0F766E"/>
                 </a:solidFill>
                 <a:latin typeface="Trebuchet MS" pitchFamily="34" charset="0"/>
                 <a:ea typeface="Trebuchet MS" pitchFamily="34" charset="-122"/>
                 <a:cs typeface="Trebuchet MS" pitchFamily="34" charset="-120"/>
               </a:rPr>
-              <a:t>anti</a:t>
+              <a:t>hero</a:t>
             </a:r>
             <a:endParaRPr lang="en-US" sz="1300" dirty="0"/>
           </a:p>
@@ -24255,7 +24255,7 @@
         </p:nvSpPr>
         <p:spPr>
           <a:xfrm>
-            <a:off x="2938272" y="2569464"/>
+            <a:off x="2221992" y="2569464"/>
             <a:ext cx="1828800" cy="201168"/>
           </a:xfrm>
           <a:prstGeom prst="rect">
@@ -24280,7 +24280,7 @@
                 <a:ea typeface="Calibri" pitchFamily="34" charset="-122"/>
                 <a:cs typeface="Calibri" pitchFamily="34" charset="-120"/>
               </a:rPr>
-              <a:t>against, opposite</a:t>
+              <a:t>brave, admired person</a:t>
             </a:r>
             <a:endParaRPr lang="en-US" sz="850" dirty="0"/>
           </a:p>
@@ -24294,7 +24294,7 @@
         </p:nvSpPr>
         <p:spPr>
           <a:xfrm>
-            <a:off x="5803392" y="2258568"/>
+            <a:off x="4370832" y="2258568"/>
             <a:ext cx="1828800" cy="292608"/>
           </a:xfrm>
           <a:prstGeom prst="rect">
@@ -24303,11 +24303,11 @@
             </a:avLst>
           </a:prstGeom>
           <a:solidFill>
-            <a:srgbClr val="CCFBF1"/>
+            <a:srgbClr val="FCE7F3"/>
           </a:solidFill>
           <a:ln w="19050">
             <a:solidFill>
-              <a:srgbClr val="0D9488"/>
+              <a:srgbClr val="DB2777"/>
             </a:solidFill>
             <a:prstDash val="solid"/>
           </a:ln>
@@ -24328,7 +24328,7 @@
         </p:nvSpPr>
         <p:spPr>
           <a:xfrm>
-            <a:off x="5803392" y="2258568"/>
+            <a:off x="4370832" y="2258568"/>
             <a:ext cx="1828800" cy="292608"/>
           </a:xfrm>
           <a:prstGeom prst="rect">
@@ -24347,13 +24347,13 @@
             <a:r>
               <a:rPr lang="en-US" sz="1300" b="1" dirty="0">
                 <a:solidFill>
-                  <a:srgbClr val="0F766E"/>
+                  <a:srgbClr val="9D174D"/>
                 </a:solidFill>
                 <a:latin typeface="Trebuchet MS" pitchFamily="34" charset="0"/>
                 <a:ea typeface="Trebuchet MS" pitchFamily="34" charset="-122"/>
                 <a:cs typeface="Trebuchet MS" pitchFamily="34" charset="-120"/>
               </a:rPr>
-              <a:t>hero</a:t>
+              <a:t>ic</a:t>
             </a:r>
             <a:endParaRPr lang="en-US" sz="1300" dirty="0"/>
           </a:p>
@@ -24367,7 +24367,7 @@
         </p:nvSpPr>
         <p:spPr>
           <a:xfrm>
-            <a:off x="5803392" y="2569464"/>
+            <a:off x="4370832" y="2569464"/>
             <a:ext cx="1828800" cy="201168"/>
           </a:xfrm>
           <a:prstGeom prst="rect">
@@ -24392,7 +24392,7 @@
                 <a:ea typeface="Calibri" pitchFamily="34" charset="-122"/>
                 <a:cs typeface="Calibri" pitchFamily="34" charset="-120"/>
               </a:rPr>
-              <a:t>brave, admired person</a:t>
+              <a:t>relating to, having the quality of</a:t>
             </a:r>
             <a:endParaRPr lang="en-US" sz="850" dirty="0"/>
           </a:p>
@@ -24401,6 +24401,118 @@
       <p:sp>
         <p:nvSpPr>
           <p:cNvPr id="22" name="Shape 20"/>
+          <p:cNvSpPr/>
+          <p:nvPr/>
+        </p:nvSpPr>
+        <p:spPr>
+          <a:xfrm>
+            <a:off x="6519672" y="2258568"/>
+            <a:ext cx="1828800" cy="292608"/>
+          </a:xfrm>
+          <a:prstGeom prst="rect">
+            <a:avLst>
+              <a:gd name="adj" fmla="val 25000"/>
+            </a:avLst>
+          </a:prstGeom>
+          <a:solidFill>
+            <a:srgbClr val="FCE7F3"/>
+          </a:solidFill>
+          <a:ln w="19050">
+            <a:solidFill>
+              <a:srgbClr val="DB2777"/>
+            </a:solidFill>
+            <a:prstDash val="solid"/>
+          </a:ln>
+          <a:effectLst>
+            <a:outerShdw sx="100000" sy="100000" kx="0" ky="0" algn="bl" rotWithShape="0" blurRad="101600" dist="38100" dir="8100000">
+              <a:srgbClr val="000000">
+                <a:alpha val="12000"/>
+              </a:srgbClr>
+            </a:outerShdw>
+          </a:effectLst>
+        </p:spPr>
+      </p:sp>
+      <p:sp>
+        <p:nvSpPr>
+          <p:cNvPr id="23" name="Text 21"/>
+          <p:cNvSpPr/>
+          <p:nvPr/>
+        </p:nvSpPr>
+        <p:spPr>
+          <a:xfrm>
+            <a:off x="6519672" y="2258568"/>
+            <a:ext cx="1828800" cy="292608"/>
+          </a:xfrm>
+          <a:prstGeom prst="rect">
+            <a:avLst/>
+          </a:prstGeom>
+          <a:noFill/>
+          <a:ln/>
+        </p:spPr>
+        <p:txBody>
+          <a:bodyPr wrap="square" lIns="0" tIns="0" rIns="0" bIns="0" rtlCol="0" anchor="ctr"/>
+          <a:lstStyle/>
+          <a:p>
+            <a:pPr algn="ctr" indent="0" marL="0">
+              <a:buNone/>
+            </a:pPr>
+            <a:r>
+              <a:rPr lang="en-US" sz="1300" b="1" dirty="0">
+                <a:solidFill>
+                  <a:srgbClr val="9D174D"/>
+                </a:solidFill>
+                <a:latin typeface="Trebuchet MS" pitchFamily="34" charset="0"/>
+                <a:ea typeface="Trebuchet MS" pitchFamily="34" charset="-122"/>
+                <a:cs typeface="Trebuchet MS" pitchFamily="34" charset="-120"/>
+              </a:rPr>
+              <a:t>ally</a:t>
+            </a:r>
+            <a:endParaRPr lang="en-US" sz="1300" dirty="0"/>
+          </a:p>
+        </p:txBody>
+      </p:sp>
+      <p:sp>
+        <p:nvSpPr>
+          <p:cNvPr id="24" name="Text 22"/>
+          <p:cNvSpPr/>
+          <p:nvPr/>
+        </p:nvSpPr>
+        <p:spPr>
+          <a:xfrm>
+            <a:off x="6519672" y="2569464"/>
+            <a:ext cx="1828800" cy="201168"/>
+          </a:xfrm>
+          <a:prstGeom prst="rect">
+            <a:avLst/>
+          </a:prstGeom>
+          <a:noFill/>
+          <a:ln/>
+        </p:spPr>
+        <p:txBody>
+          <a:bodyPr wrap="square" lIns="0" tIns="0" rIns="0" bIns="0" rtlCol="0" anchor="t"/>
+          <a:lstStyle/>
+          <a:p>
+            <a:pPr algn="ctr" indent="0" marL="0">
+              <a:buNone/>
+            </a:pPr>
+            <a:r>
+              <a:rPr lang="en-US" sz="850" dirty="0">
+                <a:solidFill>
+                  <a:srgbClr val="475569"/>
+                </a:solidFill>
+                <a:latin typeface="Calibri" pitchFamily="34" charset="0"/>
+                <a:ea typeface="Calibri" pitchFamily="34" charset="-122"/>
+                <a:cs typeface="Calibri" pitchFamily="34" charset="-120"/>
+              </a:rPr>
+              <a:t>in the manner of</a:t>
+            </a:r>
+            <a:endParaRPr lang="en-US" sz="850" dirty="0"/>
+          </a:p>
+        </p:txBody>
+      </p:sp>
+      <p:sp>
+        <p:nvSpPr>
+          <p:cNvPr id="25" name="Shape 23"/>
           <p:cNvSpPr/>
           <p:nvPr/>
         </p:nvSpPr>
@@ -24427,7 +24539,7 @@
       </p:sp>
       <p:sp>
         <p:nvSpPr>
-          <p:cNvPr id="23" name="Text 21"/>
+          <p:cNvPr id="26" name="Text 24"/>
           <p:cNvSpPr/>
           <p:nvPr/>
         </p:nvSpPr>
@@ -24466,7 +24578,7 @@
       </p:sp>
       <p:sp>
         <p:nvSpPr>
-          <p:cNvPr id="24" name="Shape 22"/>
+          <p:cNvPr id="27" name="Shape 25"/>
           <p:cNvSpPr/>
           <p:nvPr/>
         </p:nvSpPr>
@@ -24493,7 +24605,7 @@
       </p:sp>
       <p:sp>
         <p:nvSpPr>
-          <p:cNvPr id="25" name="Text 23"/>
+          <p:cNvPr id="28" name="Text 26"/>
           <p:cNvSpPr/>
           <p:nvPr/>
         </p:nvSpPr>
@@ -24532,7 +24644,7 @@
       </p:sp>
       <p:sp>
         <p:nvSpPr>
-          <p:cNvPr id="26" name="Shape 24"/>
+          <p:cNvPr id="29" name="Shape 27"/>
           <p:cNvSpPr/>
           <p:nvPr/>
         </p:nvSpPr>
@@ -24559,7 +24671,7 @@
       </p:sp>
       <p:sp>
         <p:nvSpPr>
-          <p:cNvPr id="27" name="Text 25"/>
+          <p:cNvPr id="30" name="Text 28"/>
           <p:cNvSpPr/>
           <p:nvPr/>
         </p:nvSpPr>
@@ -24598,7 +24710,7 @@
       </p:sp>
       <p:sp>
         <p:nvSpPr>
-          <p:cNvPr id="28" name="Shape 26"/>
+          <p:cNvPr id="31" name="Shape 29"/>
           <p:cNvSpPr/>
           <p:nvPr/>
         </p:nvSpPr>
@@ -24625,7 +24737,7 @@
       </p:sp>
       <p:sp>
         <p:nvSpPr>
-          <p:cNvPr id="29" name="Text 27"/>
+          <p:cNvPr id="32" name="Text 30"/>
           <p:cNvSpPr/>
           <p:nvPr/>
         </p:nvSpPr>
@@ -25806,7 +25918,7 @@
                 <a:ea typeface="Trebuchet MS" pitchFamily="34" charset="-122"/>
                 <a:cs typeface="Trebuchet MS" pitchFamily="34" charset="-120"/>
               </a:rPr>
-              <a:t>antihero</a:t>
+              <a:t>heroically</a:t>
             </a:r>
             <a:endParaRPr lang="en-US" sz="2800" dirty="0"/>
           </a:p>
@@ -25886,7 +25998,7 @@
         </p:nvSpPr>
         <p:spPr>
           <a:xfrm>
-            <a:off x="2938272" y="2258568"/>
+            <a:off x="2221992" y="2258568"/>
             <a:ext cx="1828800" cy="292608"/>
           </a:xfrm>
           <a:prstGeom prst="rect">
@@ -25895,11 +26007,11 @@
             </a:avLst>
           </a:prstGeom>
           <a:solidFill>
-            <a:srgbClr val="DDD6FE"/>
+            <a:srgbClr val="CCFBF1"/>
           </a:solidFill>
           <a:ln w="19050">
             <a:solidFill>
-              <a:srgbClr val="7C3AED"/>
+              <a:srgbClr val="0D9488"/>
             </a:solidFill>
             <a:prstDash val="solid"/>
           </a:ln>
@@ -25920,7 +26032,7 @@
         </p:nvSpPr>
         <p:spPr>
           <a:xfrm>
-            <a:off x="2938272" y="2258568"/>
+            <a:off x="2221992" y="2258568"/>
             <a:ext cx="1828800" cy="292608"/>
           </a:xfrm>
           <a:prstGeom prst="rect">
@@ -25939,13 +26051,13 @@
             <a:r>
               <a:rPr lang="en-US" sz="1300" b="1" dirty="0">
                 <a:solidFill>
-                  <a:srgbClr val="4C1D95"/>
+                  <a:srgbClr val="0F766E"/>
                 </a:solidFill>
                 <a:latin typeface="Trebuchet MS" pitchFamily="34" charset="0"/>
                 <a:ea typeface="Trebuchet MS" pitchFamily="34" charset="-122"/>
                 <a:cs typeface="Trebuchet MS" pitchFamily="34" charset="-120"/>
               </a:rPr>
-              <a:t>anti</a:t>
+              <a:t>hero</a:t>
             </a:r>
             <a:endParaRPr lang="en-US" sz="1300" dirty="0"/>
           </a:p>
@@ -25959,7 +26071,7 @@
         </p:nvSpPr>
         <p:spPr>
           <a:xfrm>
-            <a:off x="2938272" y="2569464"/>
+            <a:off x="2221992" y="2569464"/>
             <a:ext cx="1828800" cy="201168"/>
           </a:xfrm>
           <a:prstGeom prst="rect">
@@ -25984,7 +26096,7 @@
                 <a:ea typeface="Calibri" pitchFamily="34" charset="-122"/>
                 <a:cs typeface="Calibri" pitchFamily="34" charset="-120"/>
               </a:rPr>
-              <a:t>against, opposite</a:t>
+              <a:t>brave, admired person</a:t>
             </a:r>
             <a:endParaRPr lang="en-US" sz="850" dirty="0"/>
           </a:p>
@@ -25998,7 +26110,7 @@
         </p:nvSpPr>
         <p:spPr>
           <a:xfrm>
-            <a:off x="5803392" y="2258568"/>
+            <a:off x="4370832" y="2258568"/>
             <a:ext cx="1828800" cy="292608"/>
           </a:xfrm>
           <a:prstGeom prst="rect">
@@ -26007,11 +26119,11 @@
             </a:avLst>
           </a:prstGeom>
           <a:solidFill>
-            <a:srgbClr val="CCFBF1"/>
+            <a:srgbClr val="FCE7F3"/>
           </a:solidFill>
           <a:ln w="19050">
             <a:solidFill>
-              <a:srgbClr val="0D9488"/>
+              <a:srgbClr val="DB2777"/>
             </a:solidFill>
             <a:prstDash val="solid"/>
           </a:ln>
@@ -26032,7 +26144,7 @@
         </p:nvSpPr>
         <p:spPr>
           <a:xfrm>
-            <a:off x="5803392" y="2258568"/>
+            <a:off x="4370832" y="2258568"/>
             <a:ext cx="1828800" cy="292608"/>
           </a:xfrm>
           <a:prstGeom prst="rect">
@@ -26051,13 +26163,13 @@
             <a:r>
               <a:rPr lang="en-US" sz="1300" b="1" dirty="0">
                 <a:solidFill>
-                  <a:srgbClr val="0F766E"/>
+                  <a:srgbClr val="9D174D"/>
                 </a:solidFill>
                 <a:latin typeface="Trebuchet MS" pitchFamily="34" charset="0"/>
                 <a:ea typeface="Trebuchet MS" pitchFamily="34" charset="-122"/>
                 <a:cs typeface="Trebuchet MS" pitchFamily="34" charset="-120"/>
               </a:rPr>
-              <a:t>hero</a:t>
+              <a:t>ic</a:t>
             </a:r>
             <a:endParaRPr lang="en-US" sz="1300" dirty="0"/>
           </a:p>
@@ -26071,7 +26183,7 @@
         </p:nvSpPr>
         <p:spPr>
           <a:xfrm>
-            <a:off x="5803392" y="2569464"/>
+            <a:off x="4370832" y="2569464"/>
             <a:ext cx="1828800" cy="201168"/>
           </a:xfrm>
           <a:prstGeom prst="rect">
@@ -26096,7 +26208,7 @@
                 <a:ea typeface="Calibri" pitchFamily="34" charset="-122"/>
                 <a:cs typeface="Calibri" pitchFamily="34" charset="-120"/>
               </a:rPr>
-              <a:t>brave, admired person</a:t>
+              <a:t>relating to, having the quality of</a:t>
             </a:r>
             <a:endParaRPr lang="en-US" sz="850" dirty="0"/>
           </a:p>
@@ -26105,6 +26217,118 @@
       <p:sp>
         <p:nvSpPr>
           <p:cNvPr id="22" name="Shape 20"/>
+          <p:cNvSpPr/>
+          <p:nvPr/>
+        </p:nvSpPr>
+        <p:spPr>
+          <a:xfrm>
+            <a:off x="6519672" y="2258568"/>
+            <a:ext cx="1828800" cy="292608"/>
+          </a:xfrm>
+          <a:prstGeom prst="rect">
+            <a:avLst>
+              <a:gd name="adj" fmla="val 25000"/>
+            </a:avLst>
+          </a:prstGeom>
+          <a:solidFill>
+            <a:srgbClr val="FCE7F3"/>
+          </a:solidFill>
+          <a:ln w="19050">
+            <a:solidFill>
+              <a:srgbClr val="DB2777"/>
+            </a:solidFill>
+            <a:prstDash val="solid"/>
+          </a:ln>
+          <a:effectLst>
+            <a:outerShdw sx="100000" sy="100000" kx="0" ky="0" algn="bl" rotWithShape="0" blurRad="101600" dist="38100" dir="8100000">
+              <a:srgbClr val="000000">
+                <a:alpha val="12000"/>
+              </a:srgbClr>
+            </a:outerShdw>
+          </a:effectLst>
+        </p:spPr>
+      </p:sp>
+      <p:sp>
+        <p:nvSpPr>
+          <p:cNvPr id="23" name="Text 21"/>
+          <p:cNvSpPr/>
+          <p:nvPr/>
+        </p:nvSpPr>
+        <p:spPr>
+          <a:xfrm>
+            <a:off x="6519672" y="2258568"/>
+            <a:ext cx="1828800" cy="292608"/>
+          </a:xfrm>
+          <a:prstGeom prst="rect">
+            <a:avLst/>
+          </a:prstGeom>
+          <a:noFill/>
+          <a:ln/>
+        </p:spPr>
+        <p:txBody>
+          <a:bodyPr wrap="square" lIns="0" tIns="0" rIns="0" bIns="0" rtlCol="0" anchor="ctr"/>
+          <a:lstStyle/>
+          <a:p>
+            <a:pPr algn="ctr" indent="0" marL="0">
+              <a:buNone/>
+            </a:pPr>
+            <a:r>
+              <a:rPr lang="en-US" sz="1300" b="1" dirty="0">
+                <a:solidFill>
+                  <a:srgbClr val="9D174D"/>
+                </a:solidFill>
+                <a:latin typeface="Trebuchet MS" pitchFamily="34" charset="0"/>
+                <a:ea typeface="Trebuchet MS" pitchFamily="34" charset="-122"/>
+                <a:cs typeface="Trebuchet MS" pitchFamily="34" charset="-120"/>
+              </a:rPr>
+              <a:t>ally</a:t>
+            </a:r>
+            <a:endParaRPr lang="en-US" sz="1300" dirty="0"/>
+          </a:p>
+        </p:txBody>
+      </p:sp>
+      <p:sp>
+        <p:nvSpPr>
+          <p:cNvPr id="24" name="Text 22"/>
+          <p:cNvSpPr/>
+          <p:nvPr/>
+        </p:nvSpPr>
+        <p:spPr>
+          <a:xfrm>
+            <a:off x="6519672" y="2569464"/>
+            <a:ext cx="1828800" cy="201168"/>
+          </a:xfrm>
+          <a:prstGeom prst="rect">
+            <a:avLst/>
+          </a:prstGeom>
+          <a:noFill/>
+          <a:ln/>
+        </p:spPr>
+        <p:txBody>
+          <a:bodyPr wrap="square" lIns="0" tIns="0" rIns="0" bIns="0" rtlCol="0" anchor="t"/>
+          <a:lstStyle/>
+          <a:p>
+            <a:pPr algn="ctr" indent="0" marL="0">
+              <a:buNone/>
+            </a:pPr>
+            <a:r>
+              <a:rPr lang="en-US" sz="850" dirty="0">
+                <a:solidFill>
+                  <a:srgbClr val="475569"/>
+                </a:solidFill>
+                <a:latin typeface="Calibri" pitchFamily="34" charset="0"/>
+                <a:ea typeface="Calibri" pitchFamily="34" charset="-122"/>
+                <a:cs typeface="Calibri" pitchFamily="34" charset="-120"/>
+              </a:rPr>
+              <a:t>in the manner of</a:t>
+            </a:r>
+            <a:endParaRPr lang="en-US" sz="850" dirty="0"/>
+          </a:p>
+        </p:txBody>
+      </p:sp>
+      <p:sp>
+        <p:nvSpPr>
+          <p:cNvPr id="25" name="Shape 23"/>
           <p:cNvSpPr/>
           <p:nvPr/>
         </p:nvSpPr>
@@ -26131,7 +26355,7 @@
       </p:sp>
       <p:sp>
         <p:nvSpPr>
-          <p:cNvPr id="23" name="Text 21"/>
+          <p:cNvPr id="26" name="Text 24"/>
           <p:cNvSpPr/>
           <p:nvPr/>
         </p:nvSpPr>
@@ -26170,7 +26394,7 @@
       </p:sp>
       <p:sp>
         <p:nvSpPr>
-          <p:cNvPr id="24" name="Shape 22"/>
+          <p:cNvPr id="27" name="Shape 25"/>
           <p:cNvSpPr/>
           <p:nvPr/>
         </p:nvSpPr>
@@ -26197,14 +26421,14 @@
       </p:sp>
       <p:sp>
         <p:nvSpPr>
-          <p:cNvPr id="25" name="Shape 23"/>
-          <p:cNvSpPr/>
-          <p:nvPr/>
-        </p:nvSpPr>
-        <p:spPr>
-          <a:xfrm>
-            <a:off x="1975104" y="3364992"/>
-            <a:ext cx="1554480" cy="475488"/>
+          <p:cNvPr id="28" name="Shape 26"/>
+          <p:cNvSpPr/>
+          <p:nvPr/>
+        </p:nvSpPr>
+        <p:spPr>
+          <a:xfrm>
+            <a:off x="1978152" y="3364992"/>
+            <a:ext cx="1225296" cy="475488"/>
           </a:xfrm>
           <a:prstGeom prst="rect">
             <a:avLst>
@@ -26224,14 +26448,14 @@
       </p:sp>
       <p:sp>
         <p:nvSpPr>
-          <p:cNvPr id="26" name="Text 24"/>
-          <p:cNvSpPr/>
-          <p:nvPr/>
-        </p:nvSpPr>
-        <p:spPr>
-          <a:xfrm>
-            <a:off x="1975104" y="3364992"/>
-            <a:ext cx="1554480" cy="475488"/>
+          <p:cNvPr id="29" name="Text 27"/>
+          <p:cNvSpPr/>
+          <p:nvPr/>
+        </p:nvSpPr>
+        <p:spPr>
+          <a:xfrm>
+            <a:off x="1978152" y="3364992"/>
+            <a:ext cx="1225296" cy="475488"/>
           </a:xfrm>
           <a:prstGeom prst="rect">
             <a:avLst/>
@@ -26255,7 +26479,7 @@
                 <a:ea typeface="Trebuchet MS" pitchFamily="34" charset="-122"/>
                 <a:cs typeface="Trebuchet MS" pitchFamily="34" charset="-120"/>
               </a:rPr>
-              <a:t>an</a:t>
+              <a:t>he</a:t>
             </a:r>
             <a:endParaRPr lang="en-US" sz="1400" dirty="0"/>
           </a:p>
@@ -26263,14 +26487,14 @@
       </p:sp>
       <p:sp>
         <p:nvSpPr>
-          <p:cNvPr id="27" name="Text 25"/>
-          <p:cNvSpPr/>
-          <p:nvPr/>
-        </p:nvSpPr>
-        <p:spPr>
-          <a:xfrm>
-            <a:off x="3529584" y="3364992"/>
-            <a:ext cx="73152" cy="475488"/>
+          <p:cNvPr id="30" name="Text 28"/>
+          <p:cNvSpPr/>
+          <p:nvPr/>
+        </p:nvSpPr>
+        <p:spPr>
+          <a:xfrm>
+            <a:off x="3203448" y="3364992"/>
+            <a:ext cx="76200" cy="475488"/>
           </a:xfrm>
           <a:prstGeom prst="rect">
             <a:avLst/>
@@ -26302,14 +26526,14 @@
       </p:sp>
       <p:sp>
         <p:nvSpPr>
-          <p:cNvPr id="28" name="Shape 26"/>
-          <p:cNvSpPr/>
-          <p:nvPr/>
-        </p:nvSpPr>
-        <p:spPr>
-          <a:xfrm>
-            <a:off x="3602736" y="3364992"/>
-            <a:ext cx="1554480" cy="475488"/>
+          <p:cNvPr id="31" name="Shape 29"/>
+          <p:cNvSpPr/>
+          <p:nvPr/>
+        </p:nvSpPr>
+        <p:spPr>
+          <a:xfrm>
+            <a:off x="3279648" y="3364992"/>
+            <a:ext cx="1225296" cy="475488"/>
           </a:xfrm>
           <a:prstGeom prst="rect">
             <a:avLst>
@@ -26329,14 +26553,14 @@
       </p:sp>
       <p:sp>
         <p:nvSpPr>
-          <p:cNvPr id="29" name="Text 27"/>
-          <p:cNvSpPr/>
-          <p:nvPr/>
-        </p:nvSpPr>
-        <p:spPr>
-          <a:xfrm>
-            <a:off x="3602736" y="3364992"/>
-            <a:ext cx="1554480" cy="475488"/>
+          <p:cNvPr id="32" name="Text 30"/>
+          <p:cNvSpPr/>
+          <p:nvPr/>
+        </p:nvSpPr>
+        <p:spPr>
+          <a:xfrm>
+            <a:off x="3279648" y="3364992"/>
+            <a:ext cx="1225296" cy="475488"/>
           </a:xfrm>
           <a:prstGeom prst="rect">
             <a:avLst/>
@@ -26360,7 +26584,7 @@
                 <a:ea typeface="Trebuchet MS" pitchFamily="34" charset="-122"/>
                 <a:cs typeface="Trebuchet MS" pitchFamily="34" charset="-120"/>
               </a:rPr>
-              <a:t>ti</a:t>
+              <a:t>ro</a:t>
             </a:r>
             <a:endParaRPr lang="en-US" sz="1400" dirty="0"/>
           </a:p>
@@ -26368,14 +26592,14 @@
       </p:sp>
       <p:sp>
         <p:nvSpPr>
-          <p:cNvPr id="30" name="Text 28"/>
-          <p:cNvSpPr/>
-          <p:nvPr/>
-        </p:nvSpPr>
-        <p:spPr>
-          <a:xfrm>
-            <a:off x="5157216" y="3364992"/>
-            <a:ext cx="73152" cy="475488"/>
+          <p:cNvPr id="33" name="Text 31"/>
+          <p:cNvSpPr/>
+          <p:nvPr/>
+        </p:nvSpPr>
+        <p:spPr>
+          <a:xfrm>
+            <a:off x="4504944" y="3364992"/>
+            <a:ext cx="76200" cy="475488"/>
           </a:xfrm>
           <a:prstGeom prst="rect">
             <a:avLst/>
@@ -26407,14 +26631,14 @@
       </p:sp>
       <p:sp>
         <p:nvSpPr>
-          <p:cNvPr id="31" name="Shape 29"/>
-          <p:cNvSpPr/>
-          <p:nvPr/>
-        </p:nvSpPr>
-        <p:spPr>
-          <a:xfrm>
-            <a:off x="5230368" y="3364992"/>
-            <a:ext cx="1554480" cy="475488"/>
+          <p:cNvPr id="34" name="Shape 32"/>
+          <p:cNvSpPr/>
+          <p:nvPr/>
+        </p:nvSpPr>
+        <p:spPr>
+          <a:xfrm>
+            <a:off x="4581144" y="3364992"/>
+            <a:ext cx="1225296" cy="475488"/>
           </a:xfrm>
           <a:prstGeom prst="rect">
             <a:avLst>
@@ -26434,14 +26658,14 @@
       </p:sp>
       <p:sp>
         <p:nvSpPr>
-          <p:cNvPr id="32" name="Text 30"/>
-          <p:cNvSpPr/>
-          <p:nvPr/>
-        </p:nvSpPr>
-        <p:spPr>
-          <a:xfrm>
-            <a:off x="5230368" y="3364992"/>
-            <a:ext cx="1554480" cy="475488"/>
+          <p:cNvPr id="35" name="Text 33"/>
+          <p:cNvSpPr/>
+          <p:nvPr/>
+        </p:nvSpPr>
+        <p:spPr>
+          <a:xfrm>
+            <a:off x="4581144" y="3364992"/>
+            <a:ext cx="1225296" cy="475488"/>
           </a:xfrm>
           <a:prstGeom prst="rect">
             <a:avLst/>
@@ -26465,7 +26689,7 @@
                 <a:ea typeface="Trebuchet MS" pitchFamily="34" charset="-122"/>
                 <a:cs typeface="Trebuchet MS" pitchFamily="34" charset="-120"/>
               </a:rPr>
-              <a:t>he</a:t>
+              <a:t>ic</a:t>
             </a:r>
             <a:endParaRPr lang="en-US" sz="1400" dirty="0"/>
           </a:p>
@@ -26473,14 +26697,14 @@
       </p:sp>
       <p:sp>
         <p:nvSpPr>
-          <p:cNvPr id="33" name="Text 31"/>
-          <p:cNvSpPr/>
-          <p:nvPr/>
-        </p:nvSpPr>
-        <p:spPr>
-          <a:xfrm>
-            <a:off x="6784848" y="3364992"/>
-            <a:ext cx="73152" cy="475488"/>
+          <p:cNvPr id="36" name="Text 34"/>
+          <p:cNvSpPr/>
+          <p:nvPr/>
+        </p:nvSpPr>
+        <p:spPr>
+          <a:xfrm>
+            <a:off x="5806440" y="3364992"/>
+            <a:ext cx="76200" cy="475488"/>
           </a:xfrm>
           <a:prstGeom prst="rect">
             <a:avLst/>
@@ -26512,14 +26736,14 @@
       </p:sp>
       <p:sp>
         <p:nvSpPr>
-          <p:cNvPr id="34" name="Shape 32"/>
-          <p:cNvSpPr/>
-          <p:nvPr/>
-        </p:nvSpPr>
-        <p:spPr>
-          <a:xfrm>
-            <a:off x="6858000" y="3364992"/>
-            <a:ext cx="1554480" cy="475488"/>
+          <p:cNvPr id="37" name="Shape 35"/>
+          <p:cNvSpPr/>
+          <p:nvPr/>
+        </p:nvSpPr>
+        <p:spPr>
+          <a:xfrm>
+            <a:off x="5882640" y="3364992"/>
+            <a:ext cx="1225296" cy="475488"/>
           </a:xfrm>
           <a:prstGeom prst="rect">
             <a:avLst>
@@ -26539,14 +26763,14 @@
       </p:sp>
       <p:sp>
         <p:nvSpPr>
-          <p:cNvPr id="35" name="Text 33"/>
-          <p:cNvSpPr/>
-          <p:nvPr/>
-        </p:nvSpPr>
-        <p:spPr>
-          <a:xfrm>
-            <a:off x="6858000" y="3364992"/>
-            <a:ext cx="1554480" cy="475488"/>
+          <p:cNvPr id="38" name="Text 36"/>
+          <p:cNvSpPr/>
+          <p:nvPr/>
+        </p:nvSpPr>
+        <p:spPr>
+          <a:xfrm>
+            <a:off x="5882640" y="3364992"/>
+            <a:ext cx="1225296" cy="475488"/>
           </a:xfrm>
           <a:prstGeom prst="rect">
             <a:avLst/>
@@ -26570,7 +26794,7 @@
                 <a:ea typeface="Trebuchet MS" pitchFamily="34" charset="-122"/>
                 <a:cs typeface="Trebuchet MS" pitchFamily="34" charset="-120"/>
               </a:rPr>
-              <a:t>ro</a:t>
+              <a:t>al</a:t>
             </a:r>
             <a:endParaRPr lang="en-US" sz="1400" dirty="0"/>
           </a:p>
@@ -26578,7 +26802,112 @@
       </p:sp>
       <p:sp>
         <p:nvSpPr>
-          <p:cNvPr id="36" name="Shape 34"/>
+          <p:cNvPr id="39" name="Text 37"/>
+          <p:cNvSpPr/>
+          <p:nvPr/>
+        </p:nvSpPr>
+        <p:spPr>
+          <a:xfrm>
+            <a:off x="7107936" y="3364992"/>
+            <a:ext cx="76200" cy="475488"/>
+          </a:xfrm>
+          <a:prstGeom prst="rect">
+            <a:avLst/>
+          </a:prstGeom>
+          <a:noFill/>
+          <a:ln/>
+        </p:spPr>
+        <p:txBody>
+          <a:bodyPr wrap="square" lIns="0" tIns="0" rIns="0" bIns="0" rtlCol="0" anchor="ctr"/>
+          <a:lstStyle/>
+          <a:p>
+            <a:pPr algn="ctr" indent="0" marL="0">
+              <a:buNone/>
+            </a:pPr>
+            <a:r>
+              <a:rPr lang="en-US" sz="1600" b="1" dirty="0">
+                <a:solidFill>
+                  <a:srgbClr val="0D9488"/>
+                </a:solidFill>
+                <a:latin typeface="Trebuchet MS" pitchFamily="34" charset="0"/>
+                <a:ea typeface="Trebuchet MS" pitchFamily="34" charset="-122"/>
+                <a:cs typeface="Trebuchet MS" pitchFamily="34" charset="-120"/>
+              </a:rPr>
+              <a:t>·</a:t>
+            </a:r>
+            <a:endParaRPr lang="en-US" sz="1600" dirty="0"/>
+          </a:p>
+        </p:txBody>
+      </p:sp>
+      <p:sp>
+        <p:nvSpPr>
+          <p:cNvPr id="40" name="Shape 38"/>
+          <p:cNvSpPr/>
+          <p:nvPr/>
+        </p:nvSpPr>
+        <p:spPr>
+          <a:xfrm>
+            <a:off x="7184136" y="3364992"/>
+            <a:ext cx="1225296" cy="475488"/>
+          </a:xfrm>
+          <a:prstGeom prst="rect">
+            <a:avLst>
+              <a:gd name="adj" fmla="val 9615"/>
+            </a:avLst>
+          </a:prstGeom>
+          <a:solidFill>
+            <a:srgbClr val="FFFFFF"/>
+          </a:solidFill>
+          <a:ln w="12700">
+            <a:solidFill>
+              <a:srgbClr val="0D9488"/>
+            </a:solidFill>
+            <a:prstDash val="solid"/>
+          </a:ln>
+        </p:spPr>
+      </p:sp>
+      <p:sp>
+        <p:nvSpPr>
+          <p:cNvPr id="41" name="Text 39"/>
+          <p:cNvSpPr/>
+          <p:nvPr/>
+        </p:nvSpPr>
+        <p:spPr>
+          <a:xfrm>
+            <a:off x="7184136" y="3364992"/>
+            <a:ext cx="1225296" cy="475488"/>
+          </a:xfrm>
+          <a:prstGeom prst="rect">
+            <a:avLst/>
+          </a:prstGeom>
+          <a:noFill/>
+          <a:ln/>
+        </p:spPr>
+        <p:txBody>
+          <a:bodyPr wrap="square" lIns="0" tIns="0" rIns="0" bIns="0" rtlCol="0" anchor="ctr"/>
+          <a:lstStyle/>
+          <a:p>
+            <a:pPr algn="ctr" indent="0" marL="0">
+              <a:buNone/>
+            </a:pPr>
+            <a:r>
+              <a:rPr lang="en-US" sz="1400" b="1" dirty="0">
+                <a:solidFill>
+                  <a:srgbClr val="0D9488"/>
+                </a:solidFill>
+                <a:latin typeface="Trebuchet MS" pitchFamily="34" charset="0"/>
+                <a:ea typeface="Trebuchet MS" pitchFamily="34" charset="-122"/>
+                <a:cs typeface="Trebuchet MS" pitchFamily="34" charset="-120"/>
+              </a:rPr>
+              <a:t>ly</a:t>
+            </a:r>
+            <a:endParaRPr lang="en-US" sz="1400" dirty="0"/>
+          </a:p>
+        </p:txBody>
+      </p:sp>
+      <p:sp>
+        <p:nvSpPr>
+          <p:cNvPr id="42" name="Shape 40"/>
           <p:cNvSpPr/>
           <p:nvPr/>
         </p:nvSpPr>
@@ -26605,7 +26934,7 @@
       </p:sp>
       <p:sp>
         <p:nvSpPr>
-          <p:cNvPr id="37" name="Text 35"/>
+          <p:cNvPr id="43" name="Text 41"/>
           <p:cNvSpPr/>
           <p:nvPr/>
         </p:nvSpPr>
@@ -26644,7 +26973,7 @@
       </p:sp>
       <p:sp>
         <p:nvSpPr>
-          <p:cNvPr id="38" name="Shape 36"/>
+          <p:cNvPr id="44" name="Shape 42"/>
           <p:cNvSpPr/>
           <p:nvPr/>
         </p:nvSpPr>
@@ -26671,7 +27000,7 @@
       </p:sp>
       <p:sp>
         <p:nvSpPr>
-          <p:cNvPr id="39" name="Text 37"/>
+          <p:cNvPr id="45" name="Text 43"/>
           <p:cNvSpPr/>
           <p:nvPr/>
         </p:nvSpPr>
@@ -27133,7 +27462,7 @@
                 <a:ea typeface="Trebuchet MS" pitchFamily="34" charset="-122"/>
                 <a:cs typeface="Trebuchet MS" pitchFamily="34" charset="-120"/>
               </a:rPr>
-              <a:t>antihero</a:t>
+              <a:t>heroically</a:t>
             </a:r>
             <a:endParaRPr lang="en-US" sz="2800" dirty="0"/>
           </a:p>
@@ -27213,7 +27542,7 @@
         </p:nvSpPr>
         <p:spPr>
           <a:xfrm>
-            <a:off x="2938272" y="2258568"/>
+            <a:off x="2221992" y="2258568"/>
             <a:ext cx="1828800" cy="292608"/>
           </a:xfrm>
           <a:prstGeom prst="rect">
@@ -27222,11 +27551,11 @@
             </a:avLst>
           </a:prstGeom>
           <a:solidFill>
-            <a:srgbClr val="DDD6FE"/>
+            <a:srgbClr val="CCFBF1"/>
           </a:solidFill>
           <a:ln w="19050">
             <a:solidFill>
-              <a:srgbClr val="7C3AED"/>
+              <a:srgbClr val="0D9488"/>
             </a:solidFill>
             <a:prstDash val="solid"/>
           </a:ln>
@@ -27247,7 +27576,7 @@
         </p:nvSpPr>
         <p:spPr>
           <a:xfrm>
-            <a:off x="2938272" y="2258568"/>
+            <a:off x="2221992" y="2258568"/>
             <a:ext cx="1828800" cy="292608"/>
           </a:xfrm>
           <a:prstGeom prst="rect">
@@ -27266,13 +27595,13 @@
             <a:r>
               <a:rPr lang="en-US" sz="1300" b="1" dirty="0">
                 <a:solidFill>
-                  <a:srgbClr val="4C1D95"/>
+                  <a:srgbClr val="0F766E"/>
                 </a:solidFill>
                 <a:latin typeface="Trebuchet MS" pitchFamily="34" charset="0"/>
                 <a:ea typeface="Trebuchet MS" pitchFamily="34" charset="-122"/>
                 <a:cs typeface="Trebuchet MS" pitchFamily="34" charset="-120"/>
               </a:rPr>
-              <a:t>anti</a:t>
+              <a:t>hero</a:t>
             </a:r>
             <a:endParaRPr lang="en-US" sz="1300" dirty="0"/>
           </a:p>
@@ -27286,7 +27615,7 @@
         </p:nvSpPr>
         <p:spPr>
           <a:xfrm>
-            <a:off x="2938272" y="2569464"/>
+            <a:off x="2221992" y="2569464"/>
             <a:ext cx="1828800" cy="201168"/>
           </a:xfrm>
           <a:prstGeom prst="rect">
@@ -27311,7 +27640,7 @@
                 <a:ea typeface="Calibri" pitchFamily="34" charset="-122"/>
                 <a:cs typeface="Calibri" pitchFamily="34" charset="-120"/>
               </a:rPr>
-              <a:t>against, opposite</a:t>
+              <a:t>brave, admired person</a:t>
             </a:r>
             <a:endParaRPr lang="en-US" sz="850" dirty="0"/>
           </a:p>
@@ -27325,7 +27654,7 @@
         </p:nvSpPr>
         <p:spPr>
           <a:xfrm>
-            <a:off x="5803392" y="2258568"/>
+            <a:off x="4370832" y="2258568"/>
             <a:ext cx="1828800" cy="292608"/>
           </a:xfrm>
           <a:prstGeom prst="rect">
@@ -27334,11 +27663,11 @@
             </a:avLst>
           </a:prstGeom>
           <a:solidFill>
-            <a:srgbClr val="CCFBF1"/>
+            <a:srgbClr val="FCE7F3"/>
           </a:solidFill>
           <a:ln w="19050">
             <a:solidFill>
-              <a:srgbClr val="0D9488"/>
+              <a:srgbClr val="DB2777"/>
             </a:solidFill>
             <a:prstDash val="solid"/>
           </a:ln>
@@ -27359,7 +27688,7 @@
         </p:nvSpPr>
         <p:spPr>
           <a:xfrm>
-            <a:off x="5803392" y="2258568"/>
+            <a:off x="4370832" y="2258568"/>
             <a:ext cx="1828800" cy="292608"/>
           </a:xfrm>
           <a:prstGeom prst="rect">
@@ -27378,13 +27707,13 @@
             <a:r>
               <a:rPr lang="en-US" sz="1300" b="1" dirty="0">
                 <a:solidFill>
-                  <a:srgbClr val="0F766E"/>
+                  <a:srgbClr val="9D174D"/>
                 </a:solidFill>
                 <a:latin typeface="Trebuchet MS" pitchFamily="34" charset="0"/>
                 <a:ea typeface="Trebuchet MS" pitchFamily="34" charset="-122"/>
                 <a:cs typeface="Trebuchet MS" pitchFamily="34" charset="-120"/>
               </a:rPr>
-              <a:t>hero</a:t>
+              <a:t>ic</a:t>
             </a:r>
             <a:endParaRPr lang="en-US" sz="1300" dirty="0"/>
           </a:p>
@@ -27398,7 +27727,7 @@
         </p:nvSpPr>
         <p:spPr>
           <a:xfrm>
-            <a:off x="5803392" y="2569464"/>
+            <a:off x="4370832" y="2569464"/>
             <a:ext cx="1828800" cy="201168"/>
           </a:xfrm>
           <a:prstGeom prst="rect">
@@ -27423,7 +27752,7 @@
                 <a:ea typeface="Calibri" pitchFamily="34" charset="-122"/>
                 <a:cs typeface="Calibri" pitchFamily="34" charset="-120"/>
               </a:rPr>
-              <a:t>brave, admired person</a:t>
+              <a:t>relating to, having the quality of</a:t>
             </a:r>
             <a:endParaRPr lang="en-US" sz="850" dirty="0"/>
           </a:p>
@@ -27432,6 +27761,118 @@
       <p:sp>
         <p:nvSpPr>
           <p:cNvPr id="22" name="Shape 20"/>
+          <p:cNvSpPr/>
+          <p:nvPr/>
+        </p:nvSpPr>
+        <p:spPr>
+          <a:xfrm>
+            <a:off x="6519672" y="2258568"/>
+            <a:ext cx="1828800" cy="292608"/>
+          </a:xfrm>
+          <a:prstGeom prst="rect">
+            <a:avLst>
+              <a:gd name="adj" fmla="val 25000"/>
+            </a:avLst>
+          </a:prstGeom>
+          <a:solidFill>
+            <a:srgbClr val="FCE7F3"/>
+          </a:solidFill>
+          <a:ln w="19050">
+            <a:solidFill>
+              <a:srgbClr val="DB2777"/>
+            </a:solidFill>
+            <a:prstDash val="solid"/>
+          </a:ln>
+          <a:effectLst>
+            <a:outerShdw sx="100000" sy="100000" kx="0" ky="0" algn="bl" rotWithShape="0" blurRad="101600" dist="38100" dir="8100000">
+              <a:srgbClr val="000000">
+                <a:alpha val="12000"/>
+              </a:srgbClr>
+            </a:outerShdw>
+          </a:effectLst>
+        </p:spPr>
+      </p:sp>
+      <p:sp>
+        <p:nvSpPr>
+          <p:cNvPr id="23" name="Text 21"/>
+          <p:cNvSpPr/>
+          <p:nvPr/>
+        </p:nvSpPr>
+        <p:spPr>
+          <a:xfrm>
+            <a:off x="6519672" y="2258568"/>
+            <a:ext cx="1828800" cy="292608"/>
+          </a:xfrm>
+          <a:prstGeom prst="rect">
+            <a:avLst/>
+          </a:prstGeom>
+          <a:noFill/>
+          <a:ln/>
+        </p:spPr>
+        <p:txBody>
+          <a:bodyPr wrap="square" lIns="0" tIns="0" rIns="0" bIns="0" rtlCol="0" anchor="ctr"/>
+          <a:lstStyle/>
+          <a:p>
+            <a:pPr algn="ctr" indent="0" marL="0">
+              <a:buNone/>
+            </a:pPr>
+            <a:r>
+              <a:rPr lang="en-US" sz="1300" b="1" dirty="0">
+                <a:solidFill>
+                  <a:srgbClr val="9D174D"/>
+                </a:solidFill>
+                <a:latin typeface="Trebuchet MS" pitchFamily="34" charset="0"/>
+                <a:ea typeface="Trebuchet MS" pitchFamily="34" charset="-122"/>
+                <a:cs typeface="Trebuchet MS" pitchFamily="34" charset="-120"/>
+              </a:rPr>
+              <a:t>ally</a:t>
+            </a:r>
+            <a:endParaRPr lang="en-US" sz="1300" dirty="0"/>
+          </a:p>
+        </p:txBody>
+      </p:sp>
+      <p:sp>
+        <p:nvSpPr>
+          <p:cNvPr id="24" name="Text 22"/>
+          <p:cNvSpPr/>
+          <p:nvPr/>
+        </p:nvSpPr>
+        <p:spPr>
+          <a:xfrm>
+            <a:off x="6519672" y="2569464"/>
+            <a:ext cx="1828800" cy="201168"/>
+          </a:xfrm>
+          <a:prstGeom prst="rect">
+            <a:avLst/>
+          </a:prstGeom>
+          <a:noFill/>
+          <a:ln/>
+        </p:spPr>
+        <p:txBody>
+          <a:bodyPr wrap="square" lIns="0" tIns="0" rIns="0" bIns="0" rtlCol="0" anchor="t"/>
+          <a:lstStyle/>
+          <a:p>
+            <a:pPr algn="ctr" indent="0" marL="0">
+              <a:buNone/>
+            </a:pPr>
+            <a:r>
+              <a:rPr lang="en-US" sz="850" dirty="0">
+                <a:solidFill>
+                  <a:srgbClr val="475569"/>
+                </a:solidFill>
+                <a:latin typeface="Calibri" pitchFamily="34" charset="0"/>
+                <a:ea typeface="Calibri" pitchFamily="34" charset="-122"/>
+                <a:cs typeface="Calibri" pitchFamily="34" charset="-120"/>
+              </a:rPr>
+              <a:t>in the manner of</a:t>
+            </a:r>
+            <a:endParaRPr lang="en-US" sz="850" dirty="0"/>
+          </a:p>
+        </p:txBody>
+      </p:sp>
+      <p:sp>
+        <p:nvSpPr>
+          <p:cNvPr id="25" name="Shape 23"/>
           <p:cNvSpPr/>
           <p:nvPr/>
         </p:nvSpPr>
@@ -27458,7 +27899,7 @@
       </p:sp>
       <p:sp>
         <p:nvSpPr>
-          <p:cNvPr id="23" name="Text 21"/>
+          <p:cNvPr id="26" name="Text 24"/>
           <p:cNvSpPr/>
           <p:nvPr/>
         </p:nvSpPr>
@@ -27497,7 +27938,7 @@
       </p:sp>
       <p:sp>
         <p:nvSpPr>
-          <p:cNvPr id="24" name="Shape 22"/>
+          <p:cNvPr id="27" name="Shape 25"/>
           <p:cNvSpPr/>
           <p:nvPr/>
         </p:nvSpPr>
@@ -27524,14 +27965,14 @@
       </p:sp>
       <p:sp>
         <p:nvSpPr>
-          <p:cNvPr id="25" name="Shape 23"/>
-          <p:cNvSpPr/>
-          <p:nvPr/>
-        </p:nvSpPr>
-        <p:spPr>
-          <a:xfrm>
-            <a:off x="1975104" y="3364992"/>
-            <a:ext cx="1554480" cy="475488"/>
+          <p:cNvPr id="28" name="Shape 26"/>
+          <p:cNvSpPr/>
+          <p:nvPr/>
+        </p:nvSpPr>
+        <p:spPr>
+          <a:xfrm>
+            <a:off x="1978152" y="3364992"/>
+            <a:ext cx="1225296" cy="475488"/>
           </a:xfrm>
           <a:prstGeom prst="rect">
             <a:avLst>
@@ -27551,14 +27992,14 @@
       </p:sp>
       <p:sp>
         <p:nvSpPr>
-          <p:cNvPr id="26" name="Text 24"/>
-          <p:cNvSpPr/>
-          <p:nvPr/>
-        </p:nvSpPr>
-        <p:spPr>
-          <a:xfrm>
-            <a:off x="1975104" y="3364992"/>
-            <a:ext cx="1554480" cy="475488"/>
+          <p:cNvPr id="29" name="Text 27"/>
+          <p:cNvSpPr/>
+          <p:nvPr/>
+        </p:nvSpPr>
+        <p:spPr>
+          <a:xfrm>
+            <a:off x="1978152" y="3364992"/>
+            <a:ext cx="1225296" cy="475488"/>
           </a:xfrm>
           <a:prstGeom prst="rect">
             <a:avLst/>
@@ -27582,7 +28023,7 @@
                 <a:ea typeface="Trebuchet MS" pitchFamily="34" charset="-122"/>
                 <a:cs typeface="Trebuchet MS" pitchFamily="34" charset="-120"/>
               </a:rPr>
-              <a:t>an</a:t>
+              <a:t>he</a:t>
             </a:r>
             <a:endParaRPr lang="en-US" sz="1400" dirty="0"/>
           </a:p>
@@ -27590,14 +28031,14 @@
       </p:sp>
       <p:sp>
         <p:nvSpPr>
-          <p:cNvPr id="27" name="Text 25"/>
-          <p:cNvSpPr/>
-          <p:nvPr/>
-        </p:nvSpPr>
-        <p:spPr>
-          <a:xfrm>
-            <a:off x="3529584" y="3364992"/>
-            <a:ext cx="73152" cy="475488"/>
+          <p:cNvPr id="30" name="Text 28"/>
+          <p:cNvSpPr/>
+          <p:nvPr/>
+        </p:nvSpPr>
+        <p:spPr>
+          <a:xfrm>
+            <a:off x="3203448" y="3364992"/>
+            <a:ext cx="76200" cy="475488"/>
           </a:xfrm>
           <a:prstGeom prst="rect">
             <a:avLst/>
@@ -27629,14 +28070,14 @@
       </p:sp>
       <p:sp>
         <p:nvSpPr>
-          <p:cNvPr id="28" name="Shape 26"/>
-          <p:cNvSpPr/>
-          <p:nvPr/>
-        </p:nvSpPr>
-        <p:spPr>
-          <a:xfrm>
-            <a:off x="3602736" y="3364992"/>
-            <a:ext cx="1554480" cy="475488"/>
+          <p:cNvPr id="31" name="Shape 29"/>
+          <p:cNvSpPr/>
+          <p:nvPr/>
+        </p:nvSpPr>
+        <p:spPr>
+          <a:xfrm>
+            <a:off x="3279648" y="3364992"/>
+            <a:ext cx="1225296" cy="475488"/>
           </a:xfrm>
           <a:prstGeom prst="rect">
             <a:avLst>
@@ -27656,14 +28097,14 @@
       </p:sp>
       <p:sp>
         <p:nvSpPr>
-          <p:cNvPr id="29" name="Text 27"/>
-          <p:cNvSpPr/>
-          <p:nvPr/>
-        </p:nvSpPr>
-        <p:spPr>
-          <a:xfrm>
-            <a:off x="3602736" y="3364992"/>
-            <a:ext cx="1554480" cy="475488"/>
+          <p:cNvPr id="32" name="Text 30"/>
+          <p:cNvSpPr/>
+          <p:nvPr/>
+        </p:nvSpPr>
+        <p:spPr>
+          <a:xfrm>
+            <a:off x="3279648" y="3364992"/>
+            <a:ext cx="1225296" cy="475488"/>
           </a:xfrm>
           <a:prstGeom prst="rect">
             <a:avLst/>
@@ -27687,7 +28128,7 @@
                 <a:ea typeface="Trebuchet MS" pitchFamily="34" charset="-122"/>
                 <a:cs typeface="Trebuchet MS" pitchFamily="34" charset="-120"/>
               </a:rPr>
-              <a:t>ti</a:t>
+              <a:t>ro</a:t>
             </a:r>
             <a:endParaRPr lang="en-US" sz="1400" dirty="0"/>
           </a:p>
@@ -27695,14 +28136,14 @@
       </p:sp>
       <p:sp>
         <p:nvSpPr>
-          <p:cNvPr id="30" name="Text 28"/>
-          <p:cNvSpPr/>
-          <p:nvPr/>
-        </p:nvSpPr>
-        <p:spPr>
-          <a:xfrm>
-            <a:off x="5157216" y="3364992"/>
-            <a:ext cx="73152" cy="475488"/>
+          <p:cNvPr id="33" name="Text 31"/>
+          <p:cNvSpPr/>
+          <p:nvPr/>
+        </p:nvSpPr>
+        <p:spPr>
+          <a:xfrm>
+            <a:off x="4504944" y="3364992"/>
+            <a:ext cx="76200" cy="475488"/>
           </a:xfrm>
           <a:prstGeom prst="rect">
             <a:avLst/>
@@ -27734,14 +28175,14 @@
       </p:sp>
       <p:sp>
         <p:nvSpPr>
-          <p:cNvPr id="31" name="Shape 29"/>
-          <p:cNvSpPr/>
-          <p:nvPr/>
-        </p:nvSpPr>
-        <p:spPr>
-          <a:xfrm>
-            <a:off x="5230368" y="3364992"/>
-            <a:ext cx="1554480" cy="475488"/>
+          <p:cNvPr id="34" name="Shape 32"/>
+          <p:cNvSpPr/>
+          <p:nvPr/>
+        </p:nvSpPr>
+        <p:spPr>
+          <a:xfrm>
+            <a:off x="4581144" y="3364992"/>
+            <a:ext cx="1225296" cy="475488"/>
           </a:xfrm>
           <a:prstGeom prst="rect">
             <a:avLst>
@@ -27761,14 +28202,14 @@
       </p:sp>
       <p:sp>
         <p:nvSpPr>
-          <p:cNvPr id="32" name="Text 30"/>
-          <p:cNvSpPr/>
-          <p:nvPr/>
-        </p:nvSpPr>
-        <p:spPr>
-          <a:xfrm>
-            <a:off x="5230368" y="3364992"/>
-            <a:ext cx="1554480" cy="475488"/>
+          <p:cNvPr id="35" name="Text 33"/>
+          <p:cNvSpPr/>
+          <p:nvPr/>
+        </p:nvSpPr>
+        <p:spPr>
+          <a:xfrm>
+            <a:off x="4581144" y="3364992"/>
+            <a:ext cx="1225296" cy="475488"/>
           </a:xfrm>
           <a:prstGeom prst="rect">
             <a:avLst/>
@@ -27792,7 +28233,7 @@
                 <a:ea typeface="Trebuchet MS" pitchFamily="34" charset="-122"/>
                 <a:cs typeface="Trebuchet MS" pitchFamily="34" charset="-120"/>
               </a:rPr>
-              <a:t>he</a:t>
+              <a:t>ic</a:t>
             </a:r>
             <a:endParaRPr lang="en-US" sz="1400" dirty="0"/>
           </a:p>
@@ -27800,14 +28241,14 @@
       </p:sp>
       <p:sp>
         <p:nvSpPr>
-          <p:cNvPr id="33" name="Text 31"/>
-          <p:cNvSpPr/>
-          <p:nvPr/>
-        </p:nvSpPr>
-        <p:spPr>
-          <a:xfrm>
-            <a:off x="6784848" y="3364992"/>
-            <a:ext cx="73152" cy="475488"/>
+          <p:cNvPr id="36" name="Text 34"/>
+          <p:cNvSpPr/>
+          <p:nvPr/>
+        </p:nvSpPr>
+        <p:spPr>
+          <a:xfrm>
+            <a:off x="5806440" y="3364992"/>
+            <a:ext cx="76200" cy="475488"/>
           </a:xfrm>
           <a:prstGeom prst="rect">
             <a:avLst/>
@@ -27839,14 +28280,14 @@
       </p:sp>
       <p:sp>
         <p:nvSpPr>
-          <p:cNvPr id="34" name="Shape 32"/>
-          <p:cNvSpPr/>
-          <p:nvPr/>
-        </p:nvSpPr>
-        <p:spPr>
-          <a:xfrm>
-            <a:off x="6858000" y="3364992"/>
-            <a:ext cx="1554480" cy="475488"/>
+          <p:cNvPr id="37" name="Shape 35"/>
+          <p:cNvSpPr/>
+          <p:nvPr/>
+        </p:nvSpPr>
+        <p:spPr>
+          <a:xfrm>
+            <a:off x="5882640" y="3364992"/>
+            <a:ext cx="1225296" cy="475488"/>
           </a:xfrm>
           <a:prstGeom prst="rect">
             <a:avLst>
@@ -27866,14 +28307,14 @@
       </p:sp>
       <p:sp>
         <p:nvSpPr>
-          <p:cNvPr id="35" name="Text 33"/>
-          <p:cNvSpPr/>
-          <p:nvPr/>
-        </p:nvSpPr>
-        <p:spPr>
-          <a:xfrm>
-            <a:off x="6858000" y="3364992"/>
-            <a:ext cx="1554480" cy="475488"/>
+          <p:cNvPr id="38" name="Text 36"/>
+          <p:cNvSpPr/>
+          <p:nvPr/>
+        </p:nvSpPr>
+        <p:spPr>
+          <a:xfrm>
+            <a:off x="5882640" y="3364992"/>
+            <a:ext cx="1225296" cy="475488"/>
           </a:xfrm>
           <a:prstGeom prst="rect">
             <a:avLst/>
@@ -27897,7 +28338,7 @@
                 <a:ea typeface="Trebuchet MS" pitchFamily="34" charset="-122"/>
                 <a:cs typeface="Trebuchet MS" pitchFamily="34" charset="-120"/>
               </a:rPr>
-              <a:t>ro</a:t>
+              <a:t>al</a:t>
             </a:r>
             <a:endParaRPr lang="en-US" sz="1400" dirty="0"/>
           </a:p>
@@ -27905,7 +28346,112 @@
       </p:sp>
       <p:sp>
         <p:nvSpPr>
-          <p:cNvPr id="36" name="Shape 34"/>
+          <p:cNvPr id="39" name="Text 37"/>
+          <p:cNvSpPr/>
+          <p:nvPr/>
+        </p:nvSpPr>
+        <p:spPr>
+          <a:xfrm>
+            <a:off x="7107936" y="3364992"/>
+            <a:ext cx="76200" cy="475488"/>
+          </a:xfrm>
+          <a:prstGeom prst="rect">
+            <a:avLst/>
+          </a:prstGeom>
+          <a:noFill/>
+          <a:ln/>
+        </p:spPr>
+        <p:txBody>
+          <a:bodyPr wrap="square" lIns="0" tIns="0" rIns="0" bIns="0" rtlCol="0" anchor="ctr"/>
+          <a:lstStyle/>
+          <a:p>
+            <a:pPr algn="ctr" indent="0" marL="0">
+              <a:buNone/>
+            </a:pPr>
+            <a:r>
+              <a:rPr lang="en-US" sz="1600" b="1" dirty="0">
+                <a:solidFill>
+                  <a:srgbClr val="0D9488"/>
+                </a:solidFill>
+                <a:latin typeface="Trebuchet MS" pitchFamily="34" charset="0"/>
+                <a:ea typeface="Trebuchet MS" pitchFamily="34" charset="-122"/>
+                <a:cs typeface="Trebuchet MS" pitchFamily="34" charset="-120"/>
+              </a:rPr>
+              <a:t>·</a:t>
+            </a:r>
+            <a:endParaRPr lang="en-US" sz="1600" dirty="0"/>
+          </a:p>
+        </p:txBody>
+      </p:sp>
+      <p:sp>
+        <p:nvSpPr>
+          <p:cNvPr id="40" name="Shape 38"/>
+          <p:cNvSpPr/>
+          <p:nvPr/>
+        </p:nvSpPr>
+        <p:spPr>
+          <a:xfrm>
+            <a:off x="7184136" y="3364992"/>
+            <a:ext cx="1225296" cy="475488"/>
+          </a:xfrm>
+          <a:prstGeom prst="rect">
+            <a:avLst>
+              <a:gd name="adj" fmla="val 9615"/>
+            </a:avLst>
+          </a:prstGeom>
+          <a:solidFill>
+            <a:srgbClr val="FFFFFF"/>
+          </a:solidFill>
+          <a:ln w="12700">
+            <a:solidFill>
+              <a:srgbClr val="0D9488"/>
+            </a:solidFill>
+            <a:prstDash val="solid"/>
+          </a:ln>
+        </p:spPr>
+      </p:sp>
+      <p:sp>
+        <p:nvSpPr>
+          <p:cNvPr id="41" name="Text 39"/>
+          <p:cNvSpPr/>
+          <p:nvPr/>
+        </p:nvSpPr>
+        <p:spPr>
+          <a:xfrm>
+            <a:off x="7184136" y="3364992"/>
+            <a:ext cx="1225296" cy="475488"/>
+          </a:xfrm>
+          <a:prstGeom prst="rect">
+            <a:avLst/>
+          </a:prstGeom>
+          <a:noFill/>
+          <a:ln/>
+        </p:spPr>
+        <p:txBody>
+          <a:bodyPr wrap="square" lIns="0" tIns="0" rIns="0" bIns="0" rtlCol="0" anchor="ctr"/>
+          <a:lstStyle/>
+          <a:p>
+            <a:pPr algn="ctr" indent="0" marL="0">
+              <a:buNone/>
+            </a:pPr>
+            <a:r>
+              <a:rPr lang="en-US" sz="1400" b="1" dirty="0">
+                <a:solidFill>
+                  <a:srgbClr val="0D9488"/>
+                </a:solidFill>
+                <a:latin typeface="Trebuchet MS" pitchFamily="34" charset="0"/>
+                <a:ea typeface="Trebuchet MS" pitchFamily="34" charset="-122"/>
+                <a:cs typeface="Trebuchet MS" pitchFamily="34" charset="-120"/>
+              </a:rPr>
+              <a:t>ly</a:t>
+            </a:r>
+            <a:endParaRPr lang="en-US" sz="1400" dirty="0"/>
+          </a:p>
+        </p:txBody>
+      </p:sp>
+      <p:sp>
+        <p:nvSpPr>
+          <p:cNvPr id="42" name="Shape 40"/>
           <p:cNvSpPr/>
           <p:nvPr/>
         </p:nvSpPr>
@@ -27932,7 +28478,7 @@
       </p:sp>
       <p:sp>
         <p:nvSpPr>
-          <p:cNvPr id="37" name="Text 35"/>
+          <p:cNvPr id="43" name="Text 41"/>
           <p:cNvSpPr/>
           <p:nvPr/>
         </p:nvSpPr>
@@ -27971,18 +28517,18 @@
       </p:sp>
       <p:sp>
         <p:nvSpPr>
-          <p:cNvPr id="38" name="Shape 36"/>
+          <p:cNvPr id="44" name="Shape 42"/>
           <p:cNvSpPr/>
           <p:nvPr/>
         </p:nvSpPr>
         <p:spPr>
           <a:xfrm>
             <a:off x="1874520" y="4096512"/>
-            <a:ext cx="6903720" cy="658368"/>
+            <a:ext cx="6903720" cy="804672"/>
           </a:xfrm>
           <a:prstGeom prst="rect">
             <a:avLst>
-              <a:gd name="adj" fmla="val 8333"/>
+              <a:gd name="adj" fmla="val 6818"/>
             </a:avLst>
           </a:prstGeom>
           <a:solidFill>
@@ -27998,18 +28544,18 @@
       </p:sp>
       <p:sp>
         <p:nvSpPr>
-          <p:cNvPr id="39" name="Shape 37"/>
-          <p:cNvSpPr/>
-          <p:nvPr/>
-        </p:nvSpPr>
-        <p:spPr>
-          <a:xfrm>
-            <a:off x="2023872" y="4169664"/>
-            <a:ext cx="685800" cy="475488"/>
+          <p:cNvPr id="45" name="Shape 43"/>
+          <p:cNvSpPr/>
+          <p:nvPr/>
+        </p:nvSpPr>
+        <p:spPr>
+          <a:xfrm>
+            <a:off x="1951828" y="4169664"/>
+            <a:ext cx="603504" cy="384048"/>
           </a:xfrm>
           <a:prstGeom prst="rect">
             <a:avLst>
-              <a:gd name="adj" fmla="val 7692"/>
+              <a:gd name="adj" fmla="val 9524"/>
             </a:avLst>
           </a:prstGeom>
           <a:solidFill>
@@ -28025,14 +28571,14 @@
       </p:sp>
       <p:sp>
         <p:nvSpPr>
-          <p:cNvPr id="40" name="Text 38"/>
-          <p:cNvSpPr/>
-          <p:nvPr/>
-        </p:nvSpPr>
-        <p:spPr>
-          <a:xfrm>
-            <a:off x="2023872" y="4169664"/>
-            <a:ext cx="685800" cy="475488"/>
+          <p:cNvPr id="46" name="Text 44"/>
+          <p:cNvSpPr/>
+          <p:nvPr/>
+        </p:nvSpPr>
+        <p:spPr>
+          <a:xfrm>
+            <a:off x="1951828" y="4169664"/>
+            <a:ext cx="603504" cy="384048"/>
           </a:xfrm>
           <a:prstGeom prst="rect">
             <a:avLst/>
@@ -28056,7 +28602,7 @@
                 <a:ea typeface="Trebuchet MS" pitchFamily="34" charset="-122"/>
                 <a:cs typeface="Trebuchet MS" pitchFamily="34" charset="-120"/>
               </a:rPr>
-              <a:t>a</a:t>
+              <a:t>h</a:t>
             </a:r>
             <a:endParaRPr lang="en-US" sz="900" dirty="0"/>
           </a:p>
@@ -28064,18 +28610,18 @@
       </p:sp>
       <p:sp>
         <p:nvSpPr>
-          <p:cNvPr id="41" name="Shape 39"/>
-          <p:cNvSpPr/>
-          <p:nvPr/>
-        </p:nvSpPr>
-        <p:spPr>
-          <a:xfrm>
-            <a:off x="2831592" y="4169664"/>
-            <a:ext cx="685800" cy="475488"/>
+          <p:cNvPr id="47" name="Shape 45"/>
+          <p:cNvSpPr/>
+          <p:nvPr/>
+        </p:nvSpPr>
+        <p:spPr>
+          <a:xfrm>
+            <a:off x="2605209" y="4169664"/>
+            <a:ext cx="603504" cy="384048"/>
           </a:xfrm>
           <a:prstGeom prst="rect">
             <a:avLst>
-              <a:gd name="adj" fmla="val 7692"/>
+              <a:gd name="adj" fmla="val 9524"/>
             </a:avLst>
           </a:prstGeom>
           <a:solidFill>
@@ -28091,14 +28637,14 @@
       </p:sp>
       <p:sp>
         <p:nvSpPr>
-          <p:cNvPr id="42" name="Text 40"/>
-          <p:cNvSpPr/>
-          <p:nvPr/>
-        </p:nvSpPr>
-        <p:spPr>
-          <a:xfrm>
-            <a:off x="2831592" y="4169664"/>
-            <a:ext cx="685800" cy="475488"/>
+          <p:cNvPr id="48" name="Text 46"/>
+          <p:cNvSpPr/>
+          <p:nvPr/>
+        </p:nvSpPr>
+        <p:spPr>
+          <a:xfrm>
+            <a:off x="2605209" y="4169664"/>
+            <a:ext cx="603504" cy="384048"/>
           </a:xfrm>
           <a:prstGeom prst="rect">
             <a:avLst/>
@@ -28122,7 +28668,7 @@
                 <a:ea typeface="Trebuchet MS" pitchFamily="34" charset="-122"/>
                 <a:cs typeface="Trebuchet MS" pitchFamily="34" charset="-120"/>
               </a:rPr>
-              <a:t>n</a:t>
+              <a:t>e</a:t>
             </a:r>
             <a:endParaRPr lang="en-US" sz="900" dirty="0"/>
           </a:p>
@@ -28130,18 +28676,18 @@
       </p:sp>
       <p:sp>
         <p:nvSpPr>
-          <p:cNvPr id="43" name="Shape 41"/>
-          <p:cNvSpPr/>
-          <p:nvPr/>
-        </p:nvSpPr>
-        <p:spPr>
-          <a:xfrm>
-            <a:off x="3639312" y="4169664"/>
-            <a:ext cx="685800" cy="475488"/>
+          <p:cNvPr id="49" name="Shape 47"/>
+          <p:cNvSpPr/>
+          <p:nvPr/>
+        </p:nvSpPr>
+        <p:spPr>
+          <a:xfrm>
+            <a:off x="3258589" y="4169664"/>
+            <a:ext cx="603504" cy="384048"/>
           </a:xfrm>
           <a:prstGeom prst="rect">
             <a:avLst>
-              <a:gd name="adj" fmla="val 7692"/>
+              <a:gd name="adj" fmla="val 9524"/>
             </a:avLst>
           </a:prstGeom>
           <a:solidFill>
@@ -28157,14 +28703,14 @@
       </p:sp>
       <p:sp>
         <p:nvSpPr>
-          <p:cNvPr id="44" name="Text 42"/>
-          <p:cNvSpPr/>
-          <p:nvPr/>
-        </p:nvSpPr>
-        <p:spPr>
-          <a:xfrm>
-            <a:off x="3639312" y="4169664"/>
-            <a:ext cx="685800" cy="475488"/>
+          <p:cNvPr id="50" name="Text 48"/>
+          <p:cNvSpPr/>
+          <p:nvPr/>
+        </p:nvSpPr>
+        <p:spPr>
+          <a:xfrm>
+            <a:off x="3258589" y="4169664"/>
+            <a:ext cx="603504" cy="384048"/>
           </a:xfrm>
           <a:prstGeom prst="rect">
             <a:avLst/>
@@ -28188,7 +28734,7 @@
                 <a:ea typeface="Trebuchet MS" pitchFamily="34" charset="-122"/>
                 <a:cs typeface="Trebuchet MS" pitchFamily="34" charset="-120"/>
               </a:rPr>
-              <a:t>t</a:t>
+              <a:t>r</a:t>
             </a:r>
             <a:endParaRPr lang="en-US" sz="900" dirty="0"/>
           </a:p>
@@ -28196,18 +28742,18 @@
       </p:sp>
       <p:sp>
         <p:nvSpPr>
-          <p:cNvPr id="45" name="Shape 43"/>
-          <p:cNvSpPr/>
-          <p:nvPr/>
-        </p:nvSpPr>
-        <p:spPr>
-          <a:xfrm>
-            <a:off x="4447032" y="4169664"/>
-            <a:ext cx="685800" cy="475488"/>
+          <p:cNvPr id="51" name="Shape 49"/>
+          <p:cNvSpPr/>
+          <p:nvPr/>
+        </p:nvSpPr>
+        <p:spPr>
+          <a:xfrm>
+            <a:off x="3911969" y="4169664"/>
+            <a:ext cx="603504" cy="384048"/>
           </a:xfrm>
           <a:prstGeom prst="rect">
             <a:avLst>
-              <a:gd name="adj" fmla="val 7692"/>
+              <a:gd name="adj" fmla="val 9524"/>
             </a:avLst>
           </a:prstGeom>
           <a:solidFill>
@@ -28223,14 +28769,14 @@
       </p:sp>
       <p:sp>
         <p:nvSpPr>
-          <p:cNvPr id="46" name="Text 44"/>
-          <p:cNvSpPr/>
-          <p:nvPr/>
-        </p:nvSpPr>
-        <p:spPr>
-          <a:xfrm>
-            <a:off x="4447032" y="4169664"/>
-            <a:ext cx="685800" cy="475488"/>
+          <p:cNvPr id="52" name="Text 50"/>
+          <p:cNvSpPr/>
+          <p:nvPr/>
+        </p:nvSpPr>
+        <p:spPr>
+          <a:xfrm>
+            <a:off x="3911969" y="4169664"/>
+            <a:ext cx="603504" cy="384048"/>
           </a:xfrm>
           <a:prstGeom prst="rect">
             <a:avLst/>
@@ -28254,7 +28800,7 @@
                 <a:ea typeface="Trebuchet MS" pitchFamily="34" charset="-122"/>
                 <a:cs typeface="Trebuchet MS" pitchFamily="34" charset="-120"/>
               </a:rPr>
-              <a:t>i</a:t>
+              <a:t>o</a:t>
             </a:r>
             <a:endParaRPr lang="en-US" sz="900" dirty="0"/>
           </a:p>
@@ -28262,18 +28808,18 @@
       </p:sp>
       <p:sp>
         <p:nvSpPr>
-          <p:cNvPr id="47" name="Shape 45"/>
-          <p:cNvSpPr/>
-          <p:nvPr/>
-        </p:nvSpPr>
-        <p:spPr>
-          <a:xfrm>
-            <a:off x="5254752" y="4169664"/>
-            <a:ext cx="685800" cy="475488"/>
+          <p:cNvPr id="53" name="Shape 51"/>
+          <p:cNvSpPr/>
+          <p:nvPr/>
+        </p:nvSpPr>
+        <p:spPr>
+          <a:xfrm>
+            <a:off x="4565350" y="4169664"/>
+            <a:ext cx="603504" cy="384048"/>
           </a:xfrm>
           <a:prstGeom prst="rect">
             <a:avLst>
-              <a:gd name="adj" fmla="val 7692"/>
+              <a:gd name="adj" fmla="val 9524"/>
             </a:avLst>
           </a:prstGeom>
           <a:solidFill>
@@ -28289,14 +28835,14 @@
       </p:sp>
       <p:sp>
         <p:nvSpPr>
-          <p:cNvPr id="48" name="Text 46"/>
-          <p:cNvSpPr/>
-          <p:nvPr/>
-        </p:nvSpPr>
-        <p:spPr>
-          <a:xfrm>
-            <a:off x="5254752" y="4169664"/>
-            <a:ext cx="685800" cy="475488"/>
+          <p:cNvPr id="54" name="Text 52"/>
+          <p:cNvSpPr/>
+          <p:nvPr/>
+        </p:nvSpPr>
+        <p:spPr>
+          <a:xfrm>
+            <a:off x="4565350" y="4169664"/>
+            <a:ext cx="603504" cy="384048"/>
           </a:xfrm>
           <a:prstGeom prst="rect">
             <a:avLst/>
@@ -28320,7 +28866,7 @@
                 <a:ea typeface="Trebuchet MS" pitchFamily="34" charset="-122"/>
                 <a:cs typeface="Trebuchet MS" pitchFamily="34" charset="-120"/>
               </a:rPr>
-              <a:t>h</a:t>
+              <a:t>i</a:t>
             </a:r>
             <a:endParaRPr lang="en-US" sz="900" dirty="0"/>
           </a:p>
@@ -28328,18 +28874,18 @@
       </p:sp>
       <p:sp>
         <p:nvSpPr>
-          <p:cNvPr id="49" name="Shape 47"/>
-          <p:cNvSpPr/>
-          <p:nvPr/>
-        </p:nvSpPr>
-        <p:spPr>
-          <a:xfrm>
-            <a:off x="6062472" y="4169664"/>
-            <a:ext cx="685800" cy="475488"/>
+          <p:cNvPr id="55" name="Shape 53"/>
+          <p:cNvSpPr/>
+          <p:nvPr/>
+        </p:nvSpPr>
+        <p:spPr>
+          <a:xfrm>
+            <a:off x="5218730" y="4169664"/>
+            <a:ext cx="603504" cy="384048"/>
           </a:xfrm>
           <a:prstGeom prst="rect">
             <a:avLst>
-              <a:gd name="adj" fmla="val 7692"/>
+              <a:gd name="adj" fmla="val 9524"/>
             </a:avLst>
           </a:prstGeom>
           <a:solidFill>
@@ -28355,14 +28901,14 @@
       </p:sp>
       <p:sp>
         <p:nvSpPr>
-          <p:cNvPr id="50" name="Text 48"/>
-          <p:cNvSpPr/>
-          <p:nvPr/>
-        </p:nvSpPr>
-        <p:spPr>
-          <a:xfrm>
-            <a:off x="6062472" y="4169664"/>
-            <a:ext cx="685800" cy="475488"/>
+          <p:cNvPr id="56" name="Text 54"/>
+          <p:cNvSpPr/>
+          <p:nvPr/>
+        </p:nvSpPr>
+        <p:spPr>
+          <a:xfrm>
+            <a:off x="5218730" y="4169664"/>
+            <a:ext cx="603504" cy="384048"/>
           </a:xfrm>
           <a:prstGeom prst="rect">
             <a:avLst/>
@@ -28386,7 +28932,7 @@
                 <a:ea typeface="Trebuchet MS" pitchFamily="34" charset="-122"/>
                 <a:cs typeface="Trebuchet MS" pitchFamily="34" charset="-120"/>
               </a:rPr>
-              <a:t>e</a:t>
+              <a:t>c</a:t>
             </a:r>
             <a:endParaRPr lang="en-US" sz="900" dirty="0"/>
           </a:p>
@@ -28394,18 +28940,57 @@
       </p:sp>
       <p:sp>
         <p:nvSpPr>
-          <p:cNvPr id="51" name="Shape 49"/>
-          <p:cNvSpPr/>
-          <p:nvPr/>
-        </p:nvSpPr>
-        <p:spPr>
-          <a:xfrm>
-            <a:off x="6870192" y="4169664"/>
-            <a:ext cx="685800" cy="475488"/>
+          <p:cNvPr id="57" name="Text 55"/>
+          <p:cNvSpPr/>
+          <p:nvPr/>
+        </p:nvSpPr>
+        <p:spPr>
+          <a:xfrm>
+            <a:off x="5218730" y="4572000"/>
+            <a:ext cx="603504" cy="219456"/>
+          </a:xfrm>
+          <a:prstGeom prst="rect">
+            <a:avLst/>
+          </a:prstGeom>
+          <a:noFill/>
+          <a:ln/>
+        </p:spPr>
+        <p:txBody>
+          <a:bodyPr wrap="square" lIns="0" tIns="0" rIns="0" bIns="0" rtlCol="0" anchor="t"/>
+          <a:lstStyle/>
+          <a:p>
+            <a:pPr algn="ctr" indent="0" marL="0">
+              <a:buNone/>
+            </a:pPr>
+            <a:r>
+              <a:rPr lang="en-US" sz="750" i="1" dirty="0">
+                <a:solidFill>
+                  <a:srgbClr val="94A3B8"/>
+                </a:solidFill>
+                <a:latin typeface="Calibri" pitchFamily="34" charset="0"/>
+                <a:ea typeface="Calibri" pitchFamily="34" charset="-122"/>
+                <a:cs typeface="Calibri" pitchFamily="34" charset="-120"/>
+              </a:rPr>
+              <a:t>/k/</a:t>
+            </a:r>
+            <a:endParaRPr lang="en-US" sz="750" dirty="0"/>
+          </a:p>
+        </p:txBody>
+      </p:sp>
+      <p:sp>
+        <p:nvSpPr>
+          <p:cNvPr id="58" name="Shape 56"/>
+          <p:cNvSpPr/>
+          <p:nvPr/>
+        </p:nvSpPr>
+        <p:spPr>
+          <a:xfrm>
+            <a:off x="5872111" y="4169664"/>
+            <a:ext cx="603504" cy="384048"/>
           </a:xfrm>
           <a:prstGeom prst="rect">
             <a:avLst>
-              <a:gd name="adj" fmla="val 7692"/>
+              <a:gd name="adj" fmla="val 9524"/>
             </a:avLst>
           </a:prstGeom>
           <a:solidFill>
@@ -28421,14 +29006,14 @@
       </p:sp>
       <p:sp>
         <p:nvSpPr>
-          <p:cNvPr id="52" name="Text 50"/>
-          <p:cNvSpPr/>
-          <p:nvPr/>
-        </p:nvSpPr>
-        <p:spPr>
-          <a:xfrm>
-            <a:off x="6870192" y="4169664"/>
-            <a:ext cx="685800" cy="475488"/>
+          <p:cNvPr id="59" name="Text 57"/>
+          <p:cNvSpPr/>
+          <p:nvPr/>
+        </p:nvSpPr>
+        <p:spPr>
+          <a:xfrm>
+            <a:off x="5872111" y="4169664"/>
+            <a:ext cx="603504" cy="384048"/>
           </a:xfrm>
           <a:prstGeom prst="rect">
             <a:avLst/>
@@ -28452,7 +29037,7 @@
                 <a:ea typeface="Trebuchet MS" pitchFamily="34" charset="-122"/>
                 <a:cs typeface="Trebuchet MS" pitchFamily="34" charset="-120"/>
               </a:rPr>
-              <a:t>r</a:t>
+              <a:t>a</a:t>
             </a:r>
             <a:endParaRPr lang="en-US" sz="900" dirty="0"/>
           </a:p>
@@ -28460,18 +29045,18 @@
       </p:sp>
       <p:sp>
         <p:nvSpPr>
-          <p:cNvPr id="53" name="Shape 51"/>
-          <p:cNvSpPr/>
-          <p:nvPr/>
-        </p:nvSpPr>
-        <p:spPr>
-          <a:xfrm>
-            <a:off x="7677912" y="4169664"/>
-            <a:ext cx="685800" cy="475488"/>
+          <p:cNvPr id="60" name="Shape 58"/>
+          <p:cNvSpPr/>
+          <p:nvPr/>
+        </p:nvSpPr>
+        <p:spPr>
+          <a:xfrm>
+            <a:off x="6525491" y="4169664"/>
+            <a:ext cx="603504" cy="384048"/>
           </a:xfrm>
           <a:prstGeom prst="rect">
             <a:avLst>
-              <a:gd name="adj" fmla="val 7692"/>
+              <a:gd name="adj" fmla="val 9524"/>
             </a:avLst>
           </a:prstGeom>
           <a:solidFill>
@@ -28487,14 +29072,14 @@
       </p:sp>
       <p:sp>
         <p:nvSpPr>
-          <p:cNvPr id="54" name="Text 52"/>
-          <p:cNvSpPr/>
-          <p:nvPr/>
-        </p:nvSpPr>
-        <p:spPr>
-          <a:xfrm>
-            <a:off x="7677912" y="4169664"/>
-            <a:ext cx="685800" cy="475488"/>
+          <p:cNvPr id="61" name="Text 59"/>
+          <p:cNvSpPr/>
+          <p:nvPr/>
+        </p:nvSpPr>
+        <p:spPr>
+          <a:xfrm>
+            <a:off x="6525491" y="4169664"/>
+            <a:ext cx="603504" cy="384048"/>
           </a:xfrm>
           <a:prstGeom prst="rect">
             <a:avLst/>
@@ -28518,7 +29103,139 @@
                 <a:ea typeface="Trebuchet MS" pitchFamily="34" charset="-122"/>
                 <a:cs typeface="Trebuchet MS" pitchFamily="34" charset="-120"/>
               </a:rPr>
-              <a:t>o</a:t>
+              <a:t>l</a:t>
+            </a:r>
+            <a:endParaRPr lang="en-US" sz="900" dirty="0"/>
+          </a:p>
+        </p:txBody>
+      </p:sp>
+      <p:sp>
+        <p:nvSpPr>
+          <p:cNvPr id="62" name="Shape 60"/>
+          <p:cNvSpPr/>
+          <p:nvPr/>
+        </p:nvSpPr>
+        <p:spPr>
+          <a:xfrm>
+            <a:off x="7178871" y="4169664"/>
+            <a:ext cx="603504" cy="384048"/>
+          </a:xfrm>
+          <a:prstGeom prst="rect">
+            <a:avLst>
+              <a:gd name="adj" fmla="val 9524"/>
+            </a:avLst>
+          </a:prstGeom>
+          <a:solidFill>
+            <a:srgbClr val="FFFFFF"/>
+          </a:solidFill>
+          <a:ln w="12700">
+            <a:solidFill>
+              <a:srgbClr val="DB2777"/>
+            </a:solidFill>
+            <a:prstDash val="solid"/>
+          </a:ln>
+        </p:spPr>
+      </p:sp>
+      <p:sp>
+        <p:nvSpPr>
+          <p:cNvPr id="63" name="Text 61"/>
+          <p:cNvSpPr/>
+          <p:nvPr/>
+        </p:nvSpPr>
+        <p:spPr>
+          <a:xfrm>
+            <a:off x="7178871" y="4169664"/>
+            <a:ext cx="603504" cy="384048"/>
+          </a:xfrm>
+          <a:prstGeom prst="rect">
+            <a:avLst/>
+          </a:prstGeom>
+          <a:noFill/>
+          <a:ln/>
+        </p:spPr>
+        <p:txBody>
+          <a:bodyPr wrap="square" lIns="0" tIns="0" rIns="0" bIns="0" rtlCol="0" anchor="ctr"/>
+          <a:lstStyle/>
+          <a:p>
+            <a:pPr algn="ctr" indent="0" marL="0">
+              <a:buNone/>
+            </a:pPr>
+            <a:r>
+              <a:rPr lang="en-US" sz="900" b="1" dirty="0">
+                <a:solidFill>
+                  <a:srgbClr val="9D174D"/>
+                </a:solidFill>
+                <a:latin typeface="Trebuchet MS" pitchFamily="34" charset="0"/>
+                <a:ea typeface="Trebuchet MS" pitchFamily="34" charset="-122"/>
+                <a:cs typeface="Trebuchet MS" pitchFamily="34" charset="-120"/>
+              </a:rPr>
+              <a:t>l</a:t>
+            </a:r>
+            <a:endParaRPr lang="en-US" sz="900" dirty="0"/>
+          </a:p>
+        </p:txBody>
+      </p:sp>
+      <p:sp>
+        <p:nvSpPr>
+          <p:cNvPr id="64" name="Shape 62"/>
+          <p:cNvSpPr/>
+          <p:nvPr/>
+        </p:nvSpPr>
+        <p:spPr>
+          <a:xfrm>
+            <a:off x="7832252" y="4169664"/>
+            <a:ext cx="603504" cy="384048"/>
+          </a:xfrm>
+          <a:prstGeom prst="rect">
+            <a:avLst>
+              <a:gd name="adj" fmla="val 9524"/>
+            </a:avLst>
+          </a:prstGeom>
+          <a:solidFill>
+            <a:srgbClr val="FFFFFF"/>
+          </a:solidFill>
+          <a:ln w="12700">
+            <a:solidFill>
+              <a:srgbClr val="DB2777"/>
+            </a:solidFill>
+            <a:prstDash val="solid"/>
+          </a:ln>
+        </p:spPr>
+      </p:sp>
+      <p:sp>
+        <p:nvSpPr>
+          <p:cNvPr id="65" name="Text 63"/>
+          <p:cNvSpPr/>
+          <p:nvPr/>
+        </p:nvSpPr>
+        <p:spPr>
+          <a:xfrm>
+            <a:off x="7832252" y="4169664"/>
+            <a:ext cx="603504" cy="384048"/>
+          </a:xfrm>
+          <a:prstGeom prst="rect">
+            <a:avLst/>
+          </a:prstGeom>
+          <a:noFill/>
+          <a:ln/>
+        </p:spPr>
+        <p:txBody>
+          <a:bodyPr wrap="square" lIns="0" tIns="0" rIns="0" bIns="0" rtlCol="0" anchor="ctr"/>
+          <a:lstStyle/>
+          <a:p>
+            <a:pPr algn="ctr" indent="0" marL="0">
+              <a:buNone/>
+            </a:pPr>
+            <a:r>
+              <a:rPr lang="en-US" sz="900" b="1" dirty="0">
+                <a:solidFill>
+                  <a:srgbClr val="9D174D"/>
+                </a:solidFill>
+                <a:latin typeface="Trebuchet MS" pitchFamily="34" charset="0"/>
+                <a:ea typeface="Trebuchet MS" pitchFamily="34" charset="-122"/>
+                <a:cs typeface="Trebuchet MS" pitchFamily="34" charset="-120"/>
+              </a:rPr>
+              <a:t>y</a:t>
             </a:r>
             <a:endParaRPr lang="en-US" sz="900" dirty="0"/>
           </a:p>
@@ -28949,7 +29666,7 @@
                 <a:ea typeface="Trebuchet MS" pitchFamily="34" charset="-122"/>
                 <a:cs typeface="Trebuchet MS" pitchFamily="34" charset="-120"/>
               </a:rPr>
-              <a:t>heroism</a:t>
+              <a:t>antihero</a:t>
             </a:r>
             <a:endParaRPr lang="en-US" sz="2800" dirty="0"/>
           </a:p>
@@ -29776,7 +30493,7 @@
                 <a:ea typeface="Trebuchet MS" pitchFamily="34" charset="-122"/>
                 <a:cs typeface="Trebuchet MS" pitchFamily="34" charset="-120"/>
               </a:rPr>
-              <a:t>heroism</a:t>
+              <a:t>antihero</a:t>
             </a:r>
             <a:endParaRPr lang="en-US" sz="2800" dirty="0"/>
           </a:p>
@@ -29865,11 +30582,11 @@
             </a:avLst>
           </a:prstGeom>
           <a:solidFill>
-            <a:srgbClr val="CCFBF1"/>
+            <a:srgbClr val="DDD6FE"/>
           </a:solidFill>
           <a:ln w="19050">
             <a:solidFill>
-              <a:srgbClr val="0D9488"/>
+              <a:srgbClr val="7C3AED"/>
             </a:solidFill>
             <a:prstDash val="solid"/>
           </a:ln>
@@ -29909,13 +30626,13 @@
             <a:r>
               <a:rPr lang="en-US" sz="1300" b="1" dirty="0">
                 <a:solidFill>
-                  <a:srgbClr val="0F766E"/>
+                  <a:srgbClr val="4C1D95"/>
                 </a:solidFill>
                 <a:latin typeface="Trebuchet MS" pitchFamily="34" charset="0"/>
                 <a:ea typeface="Trebuchet MS" pitchFamily="34" charset="-122"/>
                 <a:cs typeface="Trebuchet MS" pitchFamily="34" charset="-120"/>
               </a:rPr>
-              <a:t>hero</a:t>
+              <a:t>anti</a:t>
             </a:r>
             <a:endParaRPr lang="en-US" sz="1300" dirty="0"/>
           </a:p>
@@ -29954,7 +30671,7 @@
                 <a:ea typeface="Calibri" pitchFamily="34" charset="-122"/>
                 <a:cs typeface="Calibri" pitchFamily="34" charset="-120"/>
               </a:rPr>
-              <a:t>brave, admired person</a:t>
+              <a:t>against, opposite</a:t>
             </a:r>
             <a:endParaRPr lang="en-US" sz="850" dirty="0"/>
           </a:p>
@@ -29977,11 +30694,11 @@
             </a:avLst>
           </a:prstGeom>
           <a:solidFill>
-            <a:srgbClr val="FCE7F3"/>
+            <a:srgbClr val="CCFBF1"/>
           </a:solidFill>
           <a:ln w="19050">
             <a:solidFill>
-              <a:srgbClr val="DB2777"/>
+              <a:srgbClr val="0D9488"/>
             </a:solidFill>
             <a:prstDash val="solid"/>
           </a:ln>
@@ -30021,13 +30738,13 @@
             <a:r>
               <a:rPr lang="en-US" sz="1300" b="1" dirty="0">
                 <a:solidFill>
-                  <a:srgbClr val="9D174D"/>
+                  <a:srgbClr val="0F766E"/>
                 </a:solidFill>
                 <a:latin typeface="Trebuchet MS" pitchFamily="34" charset="0"/>
                 <a:ea typeface="Trebuchet MS" pitchFamily="34" charset="-122"/>
                 <a:cs typeface="Trebuchet MS" pitchFamily="34" charset="-120"/>
               </a:rPr>
-              <a:t>ism</a:t>
+              <a:t>hero</a:t>
             </a:r>
             <a:endParaRPr lang="en-US" sz="1300" dirty="0"/>
           </a:p>
@@ -30066,7 +30783,7 @@
                 <a:ea typeface="Calibri" pitchFamily="34" charset="-122"/>
                 <a:cs typeface="Calibri" pitchFamily="34" charset="-120"/>
               </a:rPr>
-              <a:t>quality or belief</a:t>
+              <a:t>brave, admired person</a:t>
             </a:r>
             <a:endParaRPr lang="en-US" sz="850" dirty="0"/>
           </a:p>
@@ -30761,7 +31478,7 @@
                 <a:ea typeface="Trebuchet MS" pitchFamily="34" charset="-122"/>
                 <a:cs typeface="Trebuchet MS" pitchFamily="34" charset="-120"/>
               </a:rPr>
-              <a:t>heroism</a:t>
+              <a:t>antihero</a:t>
             </a:r>
             <a:endParaRPr lang="en-US" sz="2800" dirty="0"/>
           </a:p>
@@ -30850,11 +31567,11 @@
             </a:avLst>
           </a:prstGeom>
           <a:solidFill>
-            <a:srgbClr val="CCFBF1"/>
+            <a:srgbClr val="DDD6FE"/>
           </a:solidFill>
           <a:ln w="19050">
             <a:solidFill>
-              <a:srgbClr val="0D9488"/>
+              <a:srgbClr val="7C3AED"/>
             </a:solidFill>
             <a:prstDash val="solid"/>
           </a:ln>
@@ -30894,13 +31611,13 @@
             <a:r>
               <a:rPr lang="en-US" sz="1300" b="1" dirty="0">
                 <a:solidFill>
-                  <a:srgbClr val="0F766E"/>
+                  <a:srgbClr val="4C1D95"/>
                 </a:solidFill>
                 <a:latin typeface="Trebuchet MS" pitchFamily="34" charset="0"/>
                 <a:ea typeface="Trebuchet MS" pitchFamily="34" charset="-122"/>
                 <a:cs typeface="Trebuchet MS" pitchFamily="34" charset="-120"/>
               </a:rPr>
-              <a:t>hero</a:t>
+              <a:t>anti</a:t>
             </a:r>
             <a:endParaRPr lang="en-US" sz="1300" dirty="0"/>
           </a:p>
@@ -30939,7 +31656,7 @@
                 <a:ea typeface="Calibri" pitchFamily="34" charset="-122"/>
                 <a:cs typeface="Calibri" pitchFamily="34" charset="-120"/>
               </a:rPr>
-              <a:t>brave, admired person</a:t>
+              <a:t>against, opposite</a:t>
             </a:r>
             <a:endParaRPr lang="en-US" sz="850" dirty="0"/>
           </a:p>
@@ -30962,11 +31679,11 @@
             </a:avLst>
           </a:prstGeom>
           <a:solidFill>
-            <a:srgbClr val="FCE7F3"/>
+            <a:srgbClr val="CCFBF1"/>
           </a:solidFill>
           <a:ln w="19050">
             <a:solidFill>
-              <a:srgbClr val="DB2777"/>
+              <a:srgbClr val="0D9488"/>
             </a:solidFill>
             <a:prstDash val="solid"/>
           </a:ln>
@@ -31006,13 +31723,13 @@
             <a:r>
               <a:rPr lang="en-US" sz="1300" b="1" dirty="0">
                 <a:solidFill>
-                  <a:srgbClr val="9D174D"/>
+                  <a:srgbClr val="0F766E"/>
                 </a:solidFill>
                 <a:latin typeface="Trebuchet MS" pitchFamily="34" charset="0"/>
                 <a:ea typeface="Trebuchet MS" pitchFamily="34" charset="-122"/>
                 <a:cs typeface="Trebuchet MS" pitchFamily="34" charset="-120"/>
               </a:rPr>
-              <a:t>ism</a:t>
+              <a:t>hero</a:t>
             </a:r>
             <a:endParaRPr lang="en-US" sz="1300" dirty="0"/>
           </a:p>
@@ -31051,7 +31768,7 @@
                 <a:ea typeface="Calibri" pitchFamily="34" charset="-122"/>
                 <a:cs typeface="Calibri" pitchFamily="34" charset="-120"/>
               </a:rPr>
-              <a:t>quality or belief</a:t>
+              <a:t>brave, admired person</a:t>
             </a:r>
             <a:endParaRPr lang="en-US" sz="850" dirty="0"/>
           </a:p>
@@ -31158,8 +31875,8 @@
         </p:nvSpPr>
         <p:spPr>
           <a:xfrm>
-            <a:off x="2313432" y="3364992"/>
-            <a:ext cx="1645920" cy="475488"/>
+            <a:off x="1975104" y="3364992"/>
+            <a:ext cx="1554480" cy="475488"/>
           </a:xfrm>
           <a:prstGeom prst="rect">
             <a:avLst>
@@ -31185,8 +31902,8 @@
         </p:nvSpPr>
         <p:spPr>
           <a:xfrm>
-            <a:off x="2313432" y="3364992"/>
-            <a:ext cx="1645920" cy="475488"/>
+            <a:off x="1975104" y="3364992"/>
+            <a:ext cx="1554480" cy="475488"/>
           </a:xfrm>
           <a:prstGeom prst="rect">
             <a:avLst/>
@@ -31210,7 +31927,7 @@
                 <a:ea typeface="Trebuchet MS" pitchFamily="34" charset="-122"/>
                 <a:cs typeface="Trebuchet MS" pitchFamily="34" charset="-120"/>
               </a:rPr>
-              <a:t>he</a:t>
+              <a:t>an</a:t>
             </a:r>
             <a:endParaRPr lang="en-US" sz="1400" dirty="0"/>
           </a:p>
@@ -31224,8 +31941,8 @@
         </p:nvSpPr>
         <p:spPr>
           <a:xfrm>
-            <a:off x="3959352" y="3364992"/>
-            <a:ext cx="411480" cy="475488"/>
+            <a:off x="3529584" y="3364992"/>
+            <a:ext cx="73152" cy="475488"/>
           </a:xfrm>
           <a:prstGeom prst="rect">
             <a:avLst/>
@@ -31263,8 +31980,8 @@
         </p:nvSpPr>
         <p:spPr>
           <a:xfrm>
-            <a:off x="4370832" y="3364992"/>
-            <a:ext cx="1645920" cy="475488"/>
+            <a:off x="3602736" y="3364992"/>
+            <a:ext cx="1554480" cy="475488"/>
           </a:xfrm>
           <a:prstGeom prst="rect">
             <a:avLst>
@@ -31290,8 +32007,8 @@
         </p:nvSpPr>
         <p:spPr>
           <a:xfrm>
-            <a:off x="4370832" y="3364992"/>
-            <a:ext cx="1645920" cy="475488"/>
+            <a:off x="3602736" y="3364992"/>
+            <a:ext cx="1554480" cy="475488"/>
           </a:xfrm>
           <a:prstGeom prst="rect">
             <a:avLst/>
@@ -31315,7 +32032,7 @@
                 <a:ea typeface="Trebuchet MS" pitchFamily="34" charset="-122"/>
                 <a:cs typeface="Trebuchet MS" pitchFamily="34" charset="-120"/>
               </a:rPr>
-              <a:t>ro</a:t>
+              <a:t>ti</a:t>
             </a:r>
             <a:endParaRPr lang="en-US" sz="1400" dirty="0"/>
           </a:p>
@@ -31329,8 +32046,8 @@
         </p:nvSpPr>
         <p:spPr>
           <a:xfrm>
-            <a:off x="6016752" y="3364992"/>
-            <a:ext cx="411480" cy="475488"/>
+            <a:off x="5157216" y="3364992"/>
+            <a:ext cx="73152" cy="475488"/>
           </a:xfrm>
           <a:prstGeom prst="rect">
             <a:avLst/>
@@ -31368,8 +32085,8 @@
         </p:nvSpPr>
         <p:spPr>
           <a:xfrm>
-            <a:off x="6428232" y="3364992"/>
-            <a:ext cx="1645920" cy="475488"/>
+            <a:off x="5230368" y="3364992"/>
+            <a:ext cx="1554480" cy="475488"/>
           </a:xfrm>
           <a:prstGeom prst="rect">
             <a:avLst>
@@ -31395,8 +32112,8 @@
         </p:nvSpPr>
         <p:spPr>
           <a:xfrm>
-            <a:off x="6428232" y="3364992"/>
-            <a:ext cx="1645920" cy="475488"/>
+            <a:off x="5230368" y="3364992"/>
+            <a:ext cx="1554480" cy="475488"/>
           </a:xfrm>
           <a:prstGeom prst="rect">
             <a:avLst/>
@@ -31420,7 +32137,7 @@
                 <a:ea typeface="Trebuchet MS" pitchFamily="34" charset="-122"/>
                 <a:cs typeface="Trebuchet MS" pitchFamily="34" charset="-120"/>
               </a:rPr>
-              <a:t>ism</a:t>
+              <a:t>he</a:t>
             </a:r>
             <a:endParaRPr lang="en-US" sz="1400" dirty="0"/>
           </a:p>
@@ -31428,7 +32145,112 @@
       </p:sp>
       <p:sp>
         <p:nvSpPr>
-          <p:cNvPr id="33" name="Shape 31"/>
+          <p:cNvPr id="33" name="Text 31"/>
+          <p:cNvSpPr/>
+          <p:nvPr/>
+        </p:nvSpPr>
+        <p:spPr>
+          <a:xfrm>
+            <a:off x="6784848" y="3364992"/>
+            <a:ext cx="73152" cy="475488"/>
+          </a:xfrm>
+          <a:prstGeom prst="rect">
+            <a:avLst/>
+          </a:prstGeom>
+          <a:noFill/>
+          <a:ln/>
+        </p:spPr>
+        <p:txBody>
+          <a:bodyPr wrap="square" lIns="0" tIns="0" rIns="0" bIns="0" rtlCol="0" anchor="ctr"/>
+          <a:lstStyle/>
+          <a:p>
+            <a:pPr algn="ctr" indent="0" marL="0">
+              <a:buNone/>
+            </a:pPr>
+            <a:r>
+              <a:rPr lang="en-US" sz="1600" b="1" dirty="0">
+                <a:solidFill>
+                  <a:srgbClr val="0D9488"/>
+                </a:solidFill>
+                <a:latin typeface="Trebuchet MS" pitchFamily="34" charset="0"/>
+                <a:ea typeface="Trebuchet MS" pitchFamily="34" charset="-122"/>
+                <a:cs typeface="Trebuchet MS" pitchFamily="34" charset="-120"/>
+              </a:rPr>
+              <a:t>·</a:t>
+            </a:r>
+            <a:endParaRPr lang="en-US" sz="1600" dirty="0"/>
+          </a:p>
+        </p:txBody>
+      </p:sp>
+      <p:sp>
+        <p:nvSpPr>
+          <p:cNvPr id="34" name="Shape 32"/>
+          <p:cNvSpPr/>
+          <p:nvPr/>
+        </p:nvSpPr>
+        <p:spPr>
+          <a:xfrm>
+            <a:off x="6858000" y="3364992"/>
+            <a:ext cx="1554480" cy="475488"/>
+          </a:xfrm>
+          <a:prstGeom prst="rect">
+            <a:avLst>
+              <a:gd name="adj" fmla="val 9615"/>
+            </a:avLst>
+          </a:prstGeom>
+          <a:solidFill>
+            <a:srgbClr val="FFFFFF"/>
+          </a:solidFill>
+          <a:ln w="12700">
+            <a:solidFill>
+              <a:srgbClr val="0D9488"/>
+            </a:solidFill>
+            <a:prstDash val="solid"/>
+          </a:ln>
+        </p:spPr>
+      </p:sp>
+      <p:sp>
+        <p:nvSpPr>
+          <p:cNvPr id="35" name="Text 33"/>
+          <p:cNvSpPr/>
+          <p:nvPr/>
+        </p:nvSpPr>
+        <p:spPr>
+          <a:xfrm>
+            <a:off x="6858000" y="3364992"/>
+            <a:ext cx="1554480" cy="475488"/>
+          </a:xfrm>
+          <a:prstGeom prst="rect">
+            <a:avLst/>
+          </a:prstGeom>
+          <a:noFill/>
+          <a:ln/>
+        </p:spPr>
+        <p:txBody>
+          <a:bodyPr wrap="square" lIns="0" tIns="0" rIns="0" bIns="0" rtlCol="0" anchor="ctr"/>
+          <a:lstStyle/>
+          <a:p>
+            <a:pPr algn="ctr" indent="0" marL="0">
+              <a:buNone/>
+            </a:pPr>
+            <a:r>
+              <a:rPr lang="en-US" sz="1400" b="1" dirty="0">
+                <a:solidFill>
+                  <a:srgbClr val="0D9488"/>
+                </a:solidFill>
+                <a:latin typeface="Trebuchet MS" pitchFamily="34" charset="0"/>
+                <a:ea typeface="Trebuchet MS" pitchFamily="34" charset="-122"/>
+                <a:cs typeface="Trebuchet MS" pitchFamily="34" charset="-120"/>
+              </a:rPr>
+              <a:t>ro</a:t>
+            </a:r>
+            <a:endParaRPr lang="en-US" sz="1400" dirty="0"/>
+          </a:p>
+        </p:txBody>
+      </p:sp>
+      <p:sp>
+        <p:nvSpPr>
+          <p:cNvPr id="36" name="Shape 34"/>
           <p:cNvSpPr/>
           <p:nvPr/>
         </p:nvSpPr>
@@ -31455,7 +32277,7 @@
       </p:sp>
       <p:sp>
         <p:nvSpPr>
-          <p:cNvPr id="34" name="Text 32"/>
+          <p:cNvPr id="37" name="Text 35"/>
           <p:cNvSpPr/>
           <p:nvPr/>
         </p:nvSpPr>
@@ -31494,7 +32316,7 @@
       </p:sp>
       <p:sp>
         <p:nvSpPr>
-          <p:cNvPr id="35" name="Shape 33"/>
+          <p:cNvPr id="38" name="Shape 36"/>
           <p:cNvSpPr/>
           <p:nvPr/>
         </p:nvSpPr>
@@ -31521,7 +32343,7 @@
       </p:sp>
       <p:sp>
         <p:nvSpPr>
-          <p:cNvPr id="36" name="Text 34"/>
+          <p:cNvPr id="39" name="Text 37"/>
           <p:cNvSpPr/>
           <p:nvPr/>
         </p:nvSpPr>
@@ -31983,7 +32805,7 @@
                 <a:ea typeface="Trebuchet MS" pitchFamily="34" charset="-122"/>
                 <a:cs typeface="Trebuchet MS" pitchFamily="34" charset="-120"/>
               </a:rPr>
-              <a:t>heroism</a:t>
+              <a:t>antihero</a:t>
             </a:r>
             <a:endParaRPr lang="en-US" sz="2800" dirty="0"/>
           </a:p>
@@ -32072,11 +32894,11 @@
             </a:avLst>
           </a:prstGeom>
           <a:solidFill>
-            <a:srgbClr val="CCFBF1"/>
+            <a:srgbClr val="DDD6FE"/>
           </a:solidFill>
           <a:ln w="19050">
             <a:solidFill>
-              <a:srgbClr val="0D9488"/>
+              <a:srgbClr val="7C3AED"/>
             </a:solidFill>
             <a:prstDash val="solid"/>
           </a:ln>
@@ -32116,13 +32938,13 @@
             <a:r>
               <a:rPr lang="en-US" sz="1300" b="1" dirty="0">
                 <a:solidFill>
-                  <a:srgbClr val="0F766E"/>
+                  <a:srgbClr val="4C1D95"/>
                 </a:solidFill>
                 <a:latin typeface="Trebuchet MS" pitchFamily="34" charset="0"/>
                 <a:ea typeface="Trebuchet MS" pitchFamily="34" charset="-122"/>
                 <a:cs typeface="Trebuchet MS" pitchFamily="34" charset="-120"/>
               </a:rPr>
-              <a:t>hero</a:t>
+              <a:t>anti</a:t>
             </a:r>
             <a:endParaRPr lang="en-US" sz="1300" dirty="0"/>
           </a:p>
@@ -32161,7 +32983,7 @@
                 <a:ea typeface="Calibri" pitchFamily="34" charset="-122"/>
                 <a:cs typeface="Calibri" pitchFamily="34" charset="-120"/>
               </a:rPr>
-              <a:t>brave, admired person</a:t>
+              <a:t>against, opposite</a:t>
             </a:r>
             <a:endParaRPr lang="en-US" sz="850" dirty="0"/>
           </a:p>
@@ -32184,11 +33006,11 @@
             </a:avLst>
           </a:prstGeom>
           <a:solidFill>
-            <a:srgbClr val="FCE7F3"/>
+            <a:srgbClr val="CCFBF1"/>
           </a:solidFill>
           <a:ln w="19050">
             <a:solidFill>
-              <a:srgbClr val="DB2777"/>
+              <a:srgbClr val="0D9488"/>
             </a:solidFill>
             <a:prstDash val="solid"/>
           </a:ln>
@@ -32228,13 +33050,13 @@
             <a:r>
               <a:rPr lang="en-US" sz="1300" b="1" dirty="0">
                 <a:solidFill>
-                  <a:srgbClr val="9D174D"/>
+                  <a:srgbClr val="0F766E"/>
                 </a:solidFill>
                 <a:latin typeface="Trebuchet MS" pitchFamily="34" charset="0"/>
                 <a:ea typeface="Trebuchet MS" pitchFamily="34" charset="-122"/>
                 <a:cs typeface="Trebuchet MS" pitchFamily="34" charset="-120"/>
               </a:rPr>
-              <a:t>ism</a:t>
+              <a:t>hero</a:t>
             </a:r>
             <a:endParaRPr lang="en-US" sz="1300" dirty="0"/>
           </a:p>
@@ -32273,7 +33095,7 @@
                 <a:ea typeface="Calibri" pitchFamily="34" charset="-122"/>
                 <a:cs typeface="Calibri" pitchFamily="34" charset="-120"/>
               </a:rPr>
-              <a:t>quality or belief</a:t>
+              <a:t>brave, admired person</a:t>
             </a:r>
             <a:endParaRPr lang="en-US" sz="850" dirty="0"/>
           </a:p>
@@ -32380,8 +33202,8 @@
         </p:nvSpPr>
         <p:spPr>
           <a:xfrm>
-            <a:off x="2313432" y="3364992"/>
-            <a:ext cx="1645920" cy="475488"/>
+            <a:off x="1975104" y="3364992"/>
+            <a:ext cx="1554480" cy="475488"/>
           </a:xfrm>
           <a:prstGeom prst="rect">
             <a:avLst>
@@ -32407,8 +33229,8 @@
         </p:nvSpPr>
         <p:spPr>
           <a:xfrm>
-            <a:off x="2313432" y="3364992"/>
-            <a:ext cx="1645920" cy="475488"/>
+            <a:off x="1975104" y="3364992"/>
+            <a:ext cx="1554480" cy="475488"/>
           </a:xfrm>
           <a:prstGeom prst="rect">
             <a:avLst/>
@@ -32432,7 +33254,7 @@
                 <a:ea typeface="Trebuchet MS" pitchFamily="34" charset="-122"/>
                 <a:cs typeface="Trebuchet MS" pitchFamily="34" charset="-120"/>
               </a:rPr>
-              <a:t>he</a:t>
+              <a:t>an</a:t>
             </a:r>
             <a:endParaRPr lang="en-US" sz="1400" dirty="0"/>
           </a:p>
@@ -32446,8 +33268,8 @@
         </p:nvSpPr>
         <p:spPr>
           <a:xfrm>
-            <a:off x="3959352" y="3364992"/>
-            <a:ext cx="411480" cy="475488"/>
+            <a:off x="3529584" y="3364992"/>
+            <a:ext cx="73152" cy="475488"/>
           </a:xfrm>
           <a:prstGeom prst="rect">
             <a:avLst/>
@@ -32485,8 +33307,8 @@
         </p:nvSpPr>
         <p:spPr>
           <a:xfrm>
-            <a:off x="4370832" y="3364992"/>
-            <a:ext cx="1645920" cy="475488"/>
+            <a:off x="3602736" y="3364992"/>
+            <a:ext cx="1554480" cy="475488"/>
           </a:xfrm>
           <a:prstGeom prst="rect">
             <a:avLst>
@@ -32512,8 +33334,8 @@
         </p:nvSpPr>
         <p:spPr>
           <a:xfrm>
-            <a:off x="4370832" y="3364992"/>
-            <a:ext cx="1645920" cy="475488"/>
+            <a:off x="3602736" y="3364992"/>
+            <a:ext cx="1554480" cy="475488"/>
           </a:xfrm>
           <a:prstGeom prst="rect">
             <a:avLst/>
@@ -32537,7 +33359,7 @@
                 <a:ea typeface="Trebuchet MS" pitchFamily="34" charset="-122"/>
                 <a:cs typeface="Trebuchet MS" pitchFamily="34" charset="-120"/>
               </a:rPr>
-              <a:t>ro</a:t>
+              <a:t>ti</a:t>
             </a:r>
             <a:endParaRPr lang="en-US" sz="1400" dirty="0"/>
           </a:p>
@@ -32551,8 +33373,8 @@
         </p:nvSpPr>
         <p:spPr>
           <a:xfrm>
-            <a:off x="6016752" y="3364992"/>
-            <a:ext cx="411480" cy="475488"/>
+            <a:off x="5157216" y="3364992"/>
+            <a:ext cx="73152" cy="475488"/>
           </a:xfrm>
           <a:prstGeom prst="rect">
             <a:avLst/>
@@ -32590,8 +33412,8 @@
         </p:nvSpPr>
         <p:spPr>
           <a:xfrm>
-            <a:off x="6428232" y="3364992"/>
-            <a:ext cx="1645920" cy="475488"/>
+            <a:off x="5230368" y="3364992"/>
+            <a:ext cx="1554480" cy="475488"/>
           </a:xfrm>
           <a:prstGeom prst="rect">
             <a:avLst>
@@ -32617,8 +33439,8 @@
         </p:nvSpPr>
         <p:spPr>
           <a:xfrm>
-            <a:off x="6428232" y="3364992"/>
-            <a:ext cx="1645920" cy="475488"/>
+            <a:off x="5230368" y="3364992"/>
+            <a:ext cx="1554480" cy="475488"/>
           </a:xfrm>
           <a:prstGeom prst="rect">
             <a:avLst/>
@@ -32642,7 +33464,7 @@
                 <a:ea typeface="Trebuchet MS" pitchFamily="34" charset="-122"/>
                 <a:cs typeface="Trebuchet MS" pitchFamily="34" charset="-120"/>
               </a:rPr>
-              <a:t>ism</a:t>
+              <a:t>he</a:t>
             </a:r>
             <a:endParaRPr lang="en-US" sz="1400" dirty="0"/>
           </a:p>
@@ -32650,7 +33472,112 @@
       </p:sp>
       <p:sp>
         <p:nvSpPr>
-          <p:cNvPr id="33" name="Shape 31"/>
+          <p:cNvPr id="33" name="Text 31"/>
+          <p:cNvSpPr/>
+          <p:nvPr/>
+        </p:nvSpPr>
+        <p:spPr>
+          <a:xfrm>
+            <a:off x="6784848" y="3364992"/>
+            <a:ext cx="73152" cy="475488"/>
+          </a:xfrm>
+          <a:prstGeom prst="rect">
+            <a:avLst/>
+          </a:prstGeom>
+          <a:noFill/>
+          <a:ln/>
+        </p:spPr>
+        <p:txBody>
+          <a:bodyPr wrap="square" lIns="0" tIns="0" rIns="0" bIns="0" rtlCol="0" anchor="ctr"/>
+          <a:lstStyle/>
+          <a:p>
+            <a:pPr algn="ctr" indent="0" marL="0">
+              <a:buNone/>
+            </a:pPr>
+            <a:r>
+              <a:rPr lang="en-US" sz="1600" b="1" dirty="0">
+                <a:solidFill>
+                  <a:srgbClr val="0D9488"/>
+                </a:solidFill>
+                <a:latin typeface="Trebuchet MS" pitchFamily="34" charset="0"/>
+                <a:ea typeface="Trebuchet MS" pitchFamily="34" charset="-122"/>
+                <a:cs typeface="Trebuchet MS" pitchFamily="34" charset="-120"/>
+              </a:rPr>
+              <a:t>·</a:t>
+            </a:r>
+            <a:endParaRPr lang="en-US" sz="1600" dirty="0"/>
+          </a:p>
+        </p:txBody>
+      </p:sp>
+      <p:sp>
+        <p:nvSpPr>
+          <p:cNvPr id="34" name="Shape 32"/>
+          <p:cNvSpPr/>
+          <p:nvPr/>
+        </p:nvSpPr>
+        <p:spPr>
+          <a:xfrm>
+            <a:off x="6858000" y="3364992"/>
+            <a:ext cx="1554480" cy="475488"/>
+          </a:xfrm>
+          <a:prstGeom prst="rect">
+            <a:avLst>
+              <a:gd name="adj" fmla="val 9615"/>
+            </a:avLst>
+          </a:prstGeom>
+          <a:solidFill>
+            <a:srgbClr val="FFFFFF"/>
+          </a:solidFill>
+          <a:ln w="12700">
+            <a:solidFill>
+              <a:srgbClr val="0D9488"/>
+            </a:solidFill>
+            <a:prstDash val="solid"/>
+          </a:ln>
+        </p:spPr>
+      </p:sp>
+      <p:sp>
+        <p:nvSpPr>
+          <p:cNvPr id="35" name="Text 33"/>
+          <p:cNvSpPr/>
+          <p:nvPr/>
+        </p:nvSpPr>
+        <p:spPr>
+          <a:xfrm>
+            <a:off x="6858000" y="3364992"/>
+            <a:ext cx="1554480" cy="475488"/>
+          </a:xfrm>
+          <a:prstGeom prst="rect">
+            <a:avLst/>
+          </a:prstGeom>
+          <a:noFill/>
+          <a:ln/>
+        </p:spPr>
+        <p:txBody>
+          <a:bodyPr wrap="square" lIns="0" tIns="0" rIns="0" bIns="0" rtlCol="0" anchor="ctr"/>
+          <a:lstStyle/>
+          <a:p>
+            <a:pPr algn="ctr" indent="0" marL="0">
+              <a:buNone/>
+            </a:pPr>
+            <a:r>
+              <a:rPr lang="en-US" sz="1400" b="1" dirty="0">
+                <a:solidFill>
+                  <a:srgbClr val="0D9488"/>
+                </a:solidFill>
+                <a:latin typeface="Trebuchet MS" pitchFamily="34" charset="0"/>
+                <a:ea typeface="Trebuchet MS" pitchFamily="34" charset="-122"/>
+                <a:cs typeface="Trebuchet MS" pitchFamily="34" charset="-120"/>
+              </a:rPr>
+              <a:t>ro</a:t>
+            </a:r>
+            <a:endParaRPr lang="en-US" sz="1400" dirty="0"/>
+          </a:p>
+        </p:txBody>
+      </p:sp>
+      <p:sp>
+        <p:nvSpPr>
+          <p:cNvPr id="36" name="Shape 34"/>
           <p:cNvSpPr/>
           <p:nvPr/>
         </p:nvSpPr>
@@ -32677,7 +33604,7 @@
       </p:sp>
       <p:sp>
         <p:nvSpPr>
-          <p:cNvPr id="34" name="Text 32"/>
+          <p:cNvPr id="37" name="Text 35"/>
           <p:cNvSpPr/>
           <p:nvPr/>
         </p:nvSpPr>
@@ -32716,7 +33643,7 @@
       </p:sp>
       <p:sp>
         <p:nvSpPr>
-          <p:cNvPr id="35" name="Shape 33"/>
+          <p:cNvPr id="38" name="Shape 36"/>
           <p:cNvSpPr/>
           <p:nvPr/>
         </p:nvSpPr>
@@ -32743,13 +33670,13 @@
       </p:sp>
       <p:sp>
         <p:nvSpPr>
-          <p:cNvPr id="36" name="Shape 34"/>
-          <p:cNvSpPr/>
-          <p:nvPr/>
-        </p:nvSpPr>
-        <p:spPr>
-          <a:xfrm>
-            <a:off x="2124837" y="4169664"/>
+          <p:cNvPr id="39" name="Shape 37"/>
+          <p:cNvSpPr/>
+          <p:nvPr/>
+        </p:nvSpPr>
+        <p:spPr>
+          <a:xfrm>
+            <a:off x="2023872" y="4169664"/>
             <a:ext cx="685800" cy="475488"/>
           </a:xfrm>
           <a:prstGeom prst="rect">
@@ -32770,13 +33697,13 @@
       </p:sp>
       <p:sp>
         <p:nvSpPr>
-          <p:cNvPr id="37" name="Text 35"/>
-          <p:cNvSpPr/>
-          <p:nvPr/>
-        </p:nvSpPr>
-        <p:spPr>
-          <a:xfrm>
-            <a:off x="2124837" y="4169664"/>
+          <p:cNvPr id="40" name="Text 38"/>
+          <p:cNvSpPr/>
+          <p:nvPr/>
+        </p:nvSpPr>
+        <p:spPr>
+          <a:xfrm>
+            <a:off x="2023872" y="4169664"/>
             <a:ext cx="685800" cy="475488"/>
           </a:xfrm>
           <a:prstGeom prst="rect">
@@ -32801,7 +33728,7 @@
                 <a:ea typeface="Trebuchet MS" pitchFamily="34" charset="-122"/>
                 <a:cs typeface="Trebuchet MS" pitchFamily="34" charset="-120"/>
               </a:rPr>
-              <a:t>h</a:t>
+              <a:t>a</a:t>
             </a:r>
             <a:endParaRPr lang="en-US" sz="900" dirty="0"/>
           </a:p>
@@ -32809,13 +33736,13 @@
       </p:sp>
       <p:sp>
         <p:nvSpPr>
-          <p:cNvPr id="38" name="Shape 36"/>
-          <p:cNvSpPr/>
-          <p:nvPr/>
-        </p:nvSpPr>
-        <p:spPr>
-          <a:xfrm>
-            <a:off x="3033522" y="4169664"/>
+          <p:cNvPr id="41" name="Shape 39"/>
+          <p:cNvSpPr/>
+          <p:nvPr/>
+        </p:nvSpPr>
+        <p:spPr>
+          <a:xfrm>
+            <a:off x="2831592" y="4169664"/>
             <a:ext cx="685800" cy="475488"/>
           </a:xfrm>
           <a:prstGeom prst="rect">
@@ -32836,13 +33763,13 @@
       </p:sp>
       <p:sp>
         <p:nvSpPr>
-          <p:cNvPr id="39" name="Text 37"/>
-          <p:cNvSpPr/>
-          <p:nvPr/>
-        </p:nvSpPr>
-        <p:spPr>
-          <a:xfrm>
-            <a:off x="3033522" y="4169664"/>
+          <p:cNvPr id="42" name="Text 40"/>
+          <p:cNvSpPr/>
+          <p:nvPr/>
+        </p:nvSpPr>
+        <p:spPr>
+          <a:xfrm>
+            <a:off x="2831592" y="4169664"/>
             <a:ext cx="685800" cy="475488"/>
           </a:xfrm>
           <a:prstGeom prst="rect">
@@ -32867,7 +33794,7 @@
                 <a:ea typeface="Trebuchet MS" pitchFamily="34" charset="-122"/>
                 <a:cs typeface="Trebuchet MS" pitchFamily="34" charset="-120"/>
               </a:rPr>
-              <a:t>e</a:t>
+              <a:t>n</a:t>
             </a:r>
             <a:endParaRPr lang="en-US" sz="900" dirty="0"/>
           </a:p>
@@ -32875,13 +33802,13 @@
       </p:sp>
       <p:sp>
         <p:nvSpPr>
-          <p:cNvPr id="40" name="Shape 38"/>
-          <p:cNvSpPr/>
-          <p:nvPr/>
-        </p:nvSpPr>
-        <p:spPr>
-          <a:xfrm>
-            <a:off x="3942207" y="4169664"/>
+          <p:cNvPr id="43" name="Shape 41"/>
+          <p:cNvSpPr/>
+          <p:nvPr/>
+        </p:nvSpPr>
+        <p:spPr>
+          <a:xfrm>
+            <a:off x="3639312" y="4169664"/>
             <a:ext cx="685800" cy="475488"/>
           </a:xfrm>
           <a:prstGeom prst="rect">
@@ -32902,13 +33829,13 @@
       </p:sp>
       <p:sp>
         <p:nvSpPr>
-          <p:cNvPr id="41" name="Text 39"/>
-          <p:cNvSpPr/>
-          <p:nvPr/>
-        </p:nvSpPr>
-        <p:spPr>
-          <a:xfrm>
-            <a:off x="3942207" y="4169664"/>
+          <p:cNvPr id="44" name="Text 42"/>
+          <p:cNvSpPr/>
+          <p:nvPr/>
+        </p:nvSpPr>
+        <p:spPr>
+          <a:xfrm>
+            <a:off x="3639312" y="4169664"/>
             <a:ext cx="685800" cy="475488"/>
           </a:xfrm>
           <a:prstGeom prst="rect">
@@ -32933,7 +33860,7 @@
                 <a:ea typeface="Trebuchet MS" pitchFamily="34" charset="-122"/>
                 <a:cs typeface="Trebuchet MS" pitchFamily="34" charset="-120"/>
               </a:rPr>
-              <a:t>r</a:t>
+              <a:t>t</a:t>
             </a:r>
             <a:endParaRPr lang="en-US" sz="900" dirty="0"/>
           </a:p>
@@ -32941,13 +33868,13 @@
       </p:sp>
       <p:sp>
         <p:nvSpPr>
-          <p:cNvPr id="42" name="Shape 40"/>
-          <p:cNvSpPr/>
-          <p:nvPr/>
-        </p:nvSpPr>
-        <p:spPr>
-          <a:xfrm>
-            <a:off x="4850892" y="4169664"/>
+          <p:cNvPr id="45" name="Shape 43"/>
+          <p:cNvSpPr/>
+          <p:nvPr/>
+        </p:nvSpPr>
+        <p:spPr>
+          <a:xfrm>
+            <a:off x="4447032" y="4169664"/>
             <a:ext cx="685800" cy="475488"/>
           </a:xfrm>
           <a:prstGeom prst="rect">
@@ -32968,13 +33895,13 @@
       </p:sp>
       <p:sp>
         <p:nvSpPr>
-          <p:cNvPr id="43" name="Text 41"/>
-          <p:cNvSpPr/>
-          <p:nvPr/>
-        </p:nvSpPr>
-        <p:spPr>
-          <a:xfrm>
-            <a:off x="4850892" y="4169664"/>
+          <p:cNvPr id="46" name="Text 44"/>
+          <p:cNvSpPr/>
+          <p:nvPr/>
+        </p:nvSpPr>
+        <p:spPr>
+          <a:xfrm>
+            <a:off x="4447032" y="4169664"/>
             <a:ext cx="685800" cy="475488"/>
           </a:xfrm>
           <a:prstGeom prst="rect">
@@ -32999,7 +33926,7 @@
                 <a:ea typeface="Trebuchet MS" pitchFamily="34" charset="-122"/>
                 <a:cs typeface="Trebuchet MS" pitchFamily="34" charset="-120"/>
               </a:rPr>
-              <a:t>o</a:t>
+              <a:t>i</a:t>
             </a:r>
             <a:endParaRPr lang="en-US" sz="900" dirty="0"/>
           </a:p>
@@ -33007,13 +33934,13 @@
       </p:sp>
       <p:sp>
         <p:nvSpPr>
-          <p:cNvPr id="44" name="Shape 42"/>
-          <p:cNvSpPr/>
-          <p:nvPr/>
-        </p:nvSpPr>
-        <p:spPr>
-          <a:xfrm>
-            <a:off x="5759577" y="4169664"/>
+          <p:cNvPr id="47" name="Shape 45"/>
+          <p:cNvSpPr/>
+          <p:nvPr/>
+        </p:nvSpPr>
+        <p:spPr>
+          <a:xfrm>
+            <a:off x="5254752" y="4169664"/>
             <a:ext cx="685800" cy="475488"/>
           </a:xfrm>
           <a:prstGeom prst="rect">
@@ -33034,13 +33961,13 @@
       </p:sp>
       <p:sp>
         <p:nvSpPr>
-          <p:cNvPr id="45" name="Text 43"/>
-          <p:cNvSpPr/>
-          <p:nvPr/>
-        </p:nvSpPr>
-        <p:spPr>
-          <a:xfrm>
-            <a:off x="5759577" y="4169664"/>
+          <p:cNvPr id="48" name="Text 46"/>
+          <p:cNvSpPr/>
+          <p:nvPr/>
+        </p:nvSpPr>
+        <p:spPr>
+          <a:xfrm>
+            <a:off x="5254752" y="4169664"/>
             <a:ext cx="685800" cy="475488"/>
           </a:xfrm>
           <a:prstGeom prst="rect">
@@ -33065,7 +33992,7 @@
                 <a:ea typeface="Trebuchet MS" pitchFamily="34" charset="-122"/>
                 <a:cs typeface="Trebuchet MS" pitchFamily="34" charset="-120"/>
               </a:rPr>
-              <a:t>i</a:t>
+              <a:t>h</a:t>
             </a:r>
             <a:endParaRPr lang="en-US" sz="900" dirty="0"/>
           </a:p>
@@ -33073,13 +34000,13 @@
       </p:sp>
       <p:sp>
         <p:nvSpPr>
-          <p:cNvPr id="46" name="Shape 44"/>
-          <p:cNvSpPr/>
-          <p:nvPr/>
-        </p:nvSpPr>
-        <p:spPr>
-          <a:xfrm>
-            <a:off x="6668262" y="4169664"/>
+          <p:cNvPr id="49" name="Shape 47"/>
+          <p:cNvSpPr/>
+          <p:nvPr/>
+        </p:nvSpPr>
+        <p:spPr>
+          <a:xfrm>
+            <a:off x="6062472" y="4169664"/>
             <a:ext cx="685800" cy="475488"/>
           </a:xfrm>
           <a:prstGeom prst="rect">
@@ -33100,13 +34027,13 @@
       </p:sp>
       <p:sp>
         <p:nvSpPr>
-          <p:cNvPr id="47" name="Text 45"/>
-          <p:cNvSpPr/>
-          <p:nvPr/>
-        </p:nvSpPr>
-        <p:spPr>
-          <a:xfrm>
-            <a:off x="6668262" y="4169664"/>
+          <p:cNvPr id="50" name="Text 48"/>
+          <p:cNvSpPr/>
+          <p:nvPr/>
+        </p:nvSpPr>
+        <p:spPr>
+          <a:xfrm>
+            <a:off x="6062472" y="4169664"/>
             <a:ext cx="685800" cy="475488"/>
           </a:xfrm>
           <a:prstGeom prst="rect">
@@ -33131,7 +34058,7 @@
                 <a:ea typeface="Trebuchet MS" pitchFamily="34" charset="-122"/>
                 <a:cs typeface="Trebuchet MS" pitchFamily="34" charset="-120"/>
               </a:rPr>
-              <a:t>s</a:t>
+              <a:t>e</a:t>
             </a:r>
             <a:endParaRPr lang="en-US" sz="900" dirty="0"/>
           </a:p>
@@ -33139,13 +34066,13 @@
       </p:sp>
       <p:sp>
         <p:nvSpPr>
-          <p:cNvPr id="48" name="Shape 46"/>
-          <p:cNvSpPr/>
-          <p:nvPr/>
-        </p:nvSpPr>
-        <p:spPr>
-          <a:xfrm>
-            <a:off x="7576947" y="4169664"/>
+          <p:cNvPr id="51" name="Shape 49"/>
+          <p:cNvSpPr/>
+          <p:nvPr/>
+        </p:nvSpPr>
+        <p:spPr>
+          <a:xfrm>
+            <a:off x="6870192" y="4169664"/>
             <a:ext cx="685800" cy="475488"/>
           </a:xfrm>
           <a:prstGeom prst="rect">
@@ -33166,13 +34093,13 @@
       </p:sp>
       <p:sp>
         <p:nvSpPr>
-          <p:cNvPr id="49" name="Text 47"/>
-          <p:cNvSpPr/>
-          <p:nvPr/>
-        </p:nvSpPr>
-        <p:spPr>
-          <a:xfrm>
-            <a:off x="7576947" y="4169664"/>
+          <p:cNvPr id="52" name="Text 50"/>
+          <p:cNvSpPr/>
+          <p:nvPr/>
+        </p:nvSpPr>
+        <p:spPr>
+          <a:xfrm>
+            <a:off x="6870192" y="4169664"/>
             <a:ext cx="685800" cy="475488"/>
           </a:xfrm>
           <a:prstGeom prst="rect">
@@ -33197,7 +34124,73 @@
                 <a:ea typeface="Trebuchet MS" pitchFamily="34" charset="-122"/>
                 <a:cs typeface="Trebuchet MS" pitchFamily="34" charset="-120"/>
               </a:rPr>
-              <a:t>m</a:t>
+              <a:t>r</a:t>
+            </a:r>
+            <a:endParaRPr lang="en-US" sz="900" dirty="0"/>
+          </a:p>
+        </p:txBody>
+      </p:sp>
+      <p:sp>
+        <p:nvSpPr>
+          <p:cNvPr id="53" name="Shape 51"/>
+          <p:cNvSpPr/>
+          <p:nvPr/>
+        </p:nvSpPr>
+        <p:spPr>
+          <a:xfrm>
+            <a:off x="7677912" y="4169664"/>
+            <a:ext cx="685800" cy="475488"/>
+          </a:xfrm>
+          <a:prstGeom prst="rect">
+            <a:avLst>
+              <a:gd name="adj" fmla="val 7692"/>
+            </a:avLst>
+          </a:prstGeom>
+          <a:solidFill>
+            <a:srgbClr val="FFFFFF"/>
+          </a:solidFill>
+          <a:ln w="12700">
+            <a:solidFill>
+              <a:srgbClr val="DB2777"/>
+            </a:solidFill>
+            <a:prstDash val="solid"/>
+          </a:ln>
+        </p:spPr>
+      </p:sp>
+      <p:sp>
+        <p:nvSpPr>
+          <p:cNvPr id="54" name="Text 52"/>
+          <p:cNvSpPr/>
+          <p:nvPr/>
+        </p:nvSpPr>
+        <p:spPr>
+          <a:xfrm>
+            <a:off x="7677912" y="4169664"/>
+            <a:ext cx="685800" cy="475488"/>
+          </a:xfrm>
+          <a:prstGeom prst="rect">
+            <a:avLst/>
+          </a:prstGeom>
+          <a:noFill/>
+          <a:ln/>
+        </p:spPr>
+        <p:txBody>
+          <a:bodyPr wrap="square" lIns="0" tIns="0" rIns="0" bIns="0" rtlCol="0" anchor="ctr"/>
+          <a:lstStyle/>
+          <a:p>
+            <a:pPr algn="ctr" indent="0" marL="0">
+              <a:buNone/>
+            </a:pPr>
+            <a:r>
+              <a:rPr lang="en-US" sz="900" b="1" dirty="0">
+                <a:solidFill>
+                  <a:srgbClr val="9D174D"/>
+                </a:solidFill>
+                <a:latin typeface="Trebuchet MS" pitchFamily="34" charset="0"/>
+                <a:ea typeface="Trebuchet MS" pitchFamily="34" charset="-122"/>
+                <a:cs typeface="Trebuchet MS" pitchFamily="34" charset="-120"/>
+              </a:rPr>
+              <a:t>o</a:t>
             </a:r>
             <a:endParaRPr lang="en-US" sz="900" dirty="0"/>
           </a:p>
@@ -35087,7 +36080,7 @@
                 <a:ea typeface="Trebuchet MS" pitchFamily="34" charset="-122"/>
                 <a:cs typeface="Trebuchet MS" pitchFamily="34" charset="-120"/>
               </a:rPr>
-              <a:t>-ess</a:t>
+              <a:t>-ic</a:t>
             </a:r>
             <a:endParaRPr lang="en-US" sz="1300" dirty="0"/>
           </a:p>
@@ -35151,7 +36144,7 @@
                 <a:ea typeface="Trebuchet MS" pitchFamily="34" charset="-122"/>
                 <a:cs typeface="Trebuchet MS" pitchFamily="34" charset="-120"/>
               </a:rPr>
-              <a:t>non-</a:t>
+              <a:t>un-</a:t>
             </a:r>
             <a:endParaRPr lang="en-US" sz="1300" dirty="0"/>
           </a:p>
@@ -35240,7 +36233,7 @@
                 <a:ea typeface="Trebuchet MS" pitchFamily="34" charset="-122"/>
                 <a:cs typeface="Trebuchet MS" pitchFamily="34" charset="-120"/>
               </a:rPr>
-              <a:t>-ic</a:t>
+              <a:t>-ism</a:t>
             </a:r>
             <a:endParaRPr lang="en-US" sz="1300" dirty="0"/>
           </a:p>
@@ -35304,7 +36297,7 @@
                 <a:ea typeface="Trebuchet MS" pitchFamily="34" charset="-122"/>
                 <a:cs typeface="Trebuchet MS" pitchFamily="34" charset="-120"/>
               </a:rPr>
-              <a:t>pseudo-</a:t>
+              <a:t>super-</a:t>
             </a:r>
             <a:endParaRPr lang="en-US" sz="1300" dirty="0"/>
           </a:p>
@@ -35393,7 +36386,7 @@
                 <a:ea typeface="Trebuchet MS" pitchFamily="34" charset="-122"/>
                 <a:cs typeface="Trebuchet MS" pitchFamily="34" charset="-120"/>
               </a:rPr>
-              <a:t>-ically</a:t>
+              <a:t>-ine</a:t>
             </a:r>
             <a:endParaRPr lang="en-US" sz="1300" dirty="0"/>
           </a:p>
@@ -35457,7 +36450,7 @@
                 <a:ea typeface="Trebuchet MS" pitchFamily="34" charset="-122"/>
                 <a:cs typeface="Trebuchet MS" pitchFamily="34" charset="-120"/>
               </a:rPr>
-              <a:t>super-</a:t>
+              <a:t>pro-</a:t>
             </a:r>
             <a:endParaRPr lang="en-US" sz="1300" dirty="0"/>
           </a:p>
@@ -35610,7 +36603,7 @@
                 <a:ea typeface="Trebuchet MS" pitchFamily="34" charset="-122"/>
                 <a:cs typeface="Trebuchet MS" pitchFamily="34" charset="-120"/>
               </a:rPr>
-              <a:t>un-</a:t>
+              <a:t>pseudo-</a:t>
             </a:r>
             <a:endParaRPr lang="en-US" sz="1300" dirty="0"/>
           </a:p>
@@ -35699,7 +36692,7 @@
                 <a:ea typeface="Trebuchet MS" pitchFamily="34" charset="-122"/>
                 <a:cs typeface="Trebuchet MS" pitchFamily="34" charset="-120"/>
               </a:rPr>
-              <a:t>-ism</a:t>
+              <a:t>-ically</a:t>
             </a:r>
             <a:endParaRPr lang="en-US" sz="1300" dirty="0"/>
           </a:p>
@@ -35707,152 +36700,104 @@
       </p:sp>
       <p:sp>
         <p:nvSpPr>
-          <p:cNvPr id="43" name="Shape 41"/>
-          <p:cNvSpPr/>
-          <p:nvPr/>
-        </p:nvSpPr>
-        <p:spPr>
-          <a:xfrm>
-            <a:off x="365760" y="3666744"/>
-            <a:ext cx="2468880" cy="402336"/>
-          </a:xfrm>
-          <a:prstGeom prst="rect">
-            <a:avLst/>
-          </a:prstGeom>
-          <a:solidFill>
-            <a:srgbClr val="F1F5F9"/>
-          </a:solidFill>
-          <a:ln w="12700">
-            <a:solidFill>
-              <a:srgbClr val="E2E8F0"/>
-            </a:solidFill>
-            <a:prstDash val="solid"/>
-          </a:ln>
-        </p:spPr>
-      </p:sp>
-      <p:sp>
-        <p:nvSpPr>
-          <p:cNvPr id="44" name="Shape 42"/>
-          <p:cNvSpPr/>
-          <p:nvPr/>
-        </p:nvSpPr>
-        <p:spPr>
-          <a:xfrm>
-            <a:off x="2971800" y="3666744"/>
-            <a:ext cx="2834640" cy="402336"/>
-          </a:xfrm>
-          <a:prstGeom prst="rect">
-            <a:avLst/>
-          </a:prstGeom>
-          <a:solidFill>
-            <a:srgbClr val="F1F5F9"/>
-          </a:solidFill>
-          <a:ln w="12700">
-            <a:solidFill>
-              <a:srgbClr val="E2E8F0"/>
-            </a:solidFill>
-            <a:prstDash val="solid"/>
-          </a:ln>
-        </p:spPr>
-      </p:sp>
-      <p:sp>
-        <p:nvSpPr>
-          <p:cNvPr id="45" name="Shape 43"/>
-          <p:cNvSpPr/>
-          <p:nvPr/>
-        </p:nvSpPr>
-        <p:spPr>
-          <a:xfrm>
-            <a:off x="5943600" y="3666744"/>
-            <a:ext cx="2834640" cy="402336"/>
-          </a:xfrm>
-          <a:prstGeom prst="rect">
-            <a:avLst/>
-          </a:prstGeom>
-          <a:solidFill>
-            <a:srgbClr val="FCE7F3"/>
-          </a:solidFill>
-          <a:ln w="12700">
-            <a:solidFill>
-              <a:srgbClr val="E2E8F0"/>
-            </a:solidFill>
-            <a:prstDash val="solid"/>
-          </a:ln>
-        </p:spPr>
-      </p:sp>
-      <p:sp>
-        <p:nvSpPr>
-          <p:cNvPr id="46" name="Text 44"/>
-          <p:cNvSpPr/>
-          <p:nvPr/>
-        </p:nvSpPr>
-        <p:spPr>
-          <a:xfrm>
-            <a:off x="5943600" y="3666744"/>
-            <a:ext cx="2834640" cy="402336"/>
-          </a:xfrm>
-          <a:prstGeom prst="rect">
-            <a:avLst/>
-          </a:prstGeom>
-          <a:noFill/>
-          <a:ln/>
-        </p:spPr>
-        <p:txBody>
-          <a:bodyPr wrap="square" lIns="0" tIns="0" rIns="0" bIns="0" rtlCol="0" anchor="ctr"/>
-          <a:lstStyle/>
-          <a:p>
-            <a:pPr algn="ctr" indent="0" marL="0">
-              <a:buNone/>
-            </a:pPr>
-            <a:r>
-              <a:rPr lang="en-US" sz="1300" b="1" dirty="0">
-                <a:solidFill>
-                  <a:srgbClr val="9D174D"/>
+          <p:cNvPr id="43" name="Text 41"/>
+          <p:cNvSpPr/>
+          <p:nvPr/>
+        </p:nvSpPr>
+        <p:spPr>
+          <a:xfrm>
+            <a:off x="365760" y="3611880"/>
+            <a:ext cx="1828800" cy="347472"/>
+          </a:xfrm>
+          <a:prstGeom prst="rect">
+            <a:avLst/>
+          </a:prstGeom>
+          <a:noFill/>
+          <a:ln/>
+        </p:spPr>
+        <p:txBody>
+          <a:bodyPr wrap="square" lIns="0" tIns="0" rIns="0" bIns="0" rtlCol="0" anchor="ctr"/>
+          <a:lstStyle/>
+          <a:p>
+            <a:pPr algn="l" indent="0" marL="0">
+              <a:buNone/>
+            </a:pPr>
+            <a:r>
+              <a:rPr lang="en-US" sz="1200" b="1" dirty="0">
+                <a:solidFill>
+                  <a:srgbClr val="0F172A"/>
                 </a:solidFill>
                 <a:latin typeface="Trebuchet MS" pitchFamily="34" charset="0"/>
                 <a:ea typeface="Trebuchet MS" pitchFamily="34" charset="-122"/>
                 <a:cs typeface="Trebuchet MS" pitchFamily="34" charset="-120"/>
               </a:rPr>
-              <a:t>-ine</a:t>
-            </a:r>
-            <a:endParaRPr lang="en-US" sz="1300" dirty="0"/>
-          </a:p>
-        </p:txBody>
-      </p:sp>
-      <p:sp>
-        <p:nvSpPr>
-          <p:cNvPr id="47" name="Text 45"/>
-          <p:cNvSpPr/>
-          <p:nvPr/>
-        </p:nvSpPr>
-        <p:spPr>
-          <a:xfrm>
-            <a:off x="365760" y="3611880"/>
-            <a:ext cx="1828800" cy="347472"/>
-          </a:xfrm>
-          <a:prstGeom prst="rect">
-            <a:avLst/>
-          </a:prstGeom>
-          <a:noFill/>
-          <a:ln/>
-        </p:spPr>
-        <p:txBody>
-          <a:bodyPr wrap="square" lIns="0" tIns="0" rIns="0" bIns="0" rtlCol="0" anchor="ctr"/>
-          <a:lstStyle/>
-          <a:p>
-            <a:pPr algn="l" indent="0" marL="0">
+              <a:t>Sample words:</a:t>
+            </a:r>
+            <a:endParaRPr lang="en-US" sz="1200" dirty="0"/>
+          </a:p>
+        </p:txBody>
+      </p:sp>
+      <p:sp>
+        <p:nvSpPr>
+          <p:cNvPr id="44" name="Shape 42"/>
+          <p:cNvSpPr/>
+          <p:nvPr/>
+        </p:nvSpPr>
+        <p:spPr>
+          <a:xfrm>
+            <a:off x="365760" y="4023360"/>
+            <a:ext cx="2011680" cy="402336"/>
+          </a:xfrm>
+          <a:prstGeom prst="rect">
+            <a:avLst>
+              <a:gd name="adj" fmla="val 13636"/>
+            </a:avLst>
+          </a:prstGeom>
+          <a:solidFill>
+            <a:srgbClr val="EEF2FF"/>
+          </a:solidFill>
+          <a:ln w="12700">
+            <a:solidFill>
+              <a:srgbClr val="6366F1"/>
+            </a:solidFill>
+            <a:prstDash val="solid"/>
+          </a:ln>
+        </p:spPr>
+      </p:sp>
+      <p:sp>
+        <p:nvSpPr>
+          <p:cNvPr id="45" name="Text 43"/>
+          <p:cNvSpPr/>
+          <p:nvPr/>
+        </p:nvSpPr>
+        <p:spPr>
+          <a:xfrm>
+            <a:off x="365760" y="4023360"/>
+            <a:ext cx="2011680" cy="402336"/>
+          </a:xfrm>
+          <a:prstGeom prst="rect">
+            <a:avLst/>
+          </a:prstGeom>
+          <a:noFill/>
+          <a:ln/>
+        </p:spPr>
+        <p:txBody>
+          <a:bodyPr wrap="square" lIns="0" tIns="0" rIns="0" bIns="0" rtlCol="0" anchor="ctr"/>
+          <a:lstStyle/>
+          <a:p>
+            <a:pPr algn="ctr" indent="0" marL="0">
               <a:buNone/>
             </a:pPr>
             <a:r>
               <a:rPr lang="en-US" sz="1200" b="1" dirty="0">
                 <a:solidFill>
-                  <a:srgbClr val="0F172A"/>
+                  <a:srgbClr val="4338CA"/>
                 </a:solidFill>
                 <a:latin typeface="Trebuchet MS" pitchFamily="34" charset="0"/>
                 <a:ea typeface="Trebuchet MS" pitchFamily="34" charset="-122"/>
                 <a:cs typeface="Trebuchet MS" pitchFamily="34" charset="-120"/>
               </a:rPr>
-              <a:t>Sample words:</a:t>
+              <a:t>hero</a:t>
             </a:r>
             <a:endParaRPr lang="en-US" sz="1200" dirty="0"/>
           </a:p>
@@ -35860,13 +36805,13 @@
       </p:sp>
       <p:sp>
         <p:nvSpPr>
-          <p:cNvPr id="48" name="Shape 46"/>
-          <p:cNvSpPr/>
-          <p:nvPr/>
-        </p:nvSpPr>
-        <p:spPr>
-          <a:xfrm>
-            <a:off x="365760" y="4023360"/>
+          <p:cNvPr id="46" name="Shape 44"/>
+          <p:cNvSpPr/>
+          <p:nvPr/>
+        </p:nvSpPr>
+        <p:spPr>
+          <a:xfrm>
+            <a:off x="2542032" y="4023360"/>
             <a:ext cx="2011680" cy="402336"/>
           </a:xfrm>
           <a:prstGeom prst="rect">
@@ -35887,13 +36832,13 @@
       </p:sp>
       <p:sp>
         <p:nvSpPr>
-          <p:cNvPr id="49" name="Text 47"/>
-          <p:cNvSpPr/>
-          <p:nvPr/>
-        </p:nvSpPr>
-        <p:spPr>
-          <a:xfrm>
-            <a:off x="365760" y="4023360"/>
+          <p:cNvPr id="47" name="Text 45"/>
+          <p:cNvSpPr/>
+          <p:nvPr/>
+        </p:nvSpPr>
+        <p:spPr>
+          <a:xfrm>
+            <a:off x="2542032" y="4023360"/>
             <a:ext cx="2011680" cy="402336"/>
           </a:xfrm>
           <a:prstGeom prst="rect">
@@ -35918,7 +36863,7 @@
                 <a:ea typeface="Trebuchet MS" pitchFamily="34" charset="-122"/>
                 <a:cs typeface="Trebuchet MS" pitchFamily="34" charset="-120"/>
               </a:rPr>
-              <a:t>hero</a:t>
+              <a:t>heroic</a:t>
             </a:r>
             <a:endParaRPr lang="en-US" sz="1200" dirty="0"/>
           </a:p>
@@ -35926,13 +36871,13 @@
       </p:sp>
       <p:sp>
         <p:nvSpPr>
-          <p:cNvPr id="50" name="Shape 48"/>
-          <p:cNvSpPr/>
-          <p:nvPr/>
-        </p:nvSpPr>
-        <p:spPr>
-          <a:xfrm>
-            <a:off x="2542032" y="4023360"/>
+          <p:cNvPr id="48" name="Shape 46"/>
+          <p:cNvSpPr/>
+          <p:nvPr/>
+        </p:nvSpPr>
+        <p:spPr>
+          <a:xfrm>
+            <a:off x="4718304" y="4023360"/>
             <a:ext cx="2011680" cy="402336"/>
           </a:xfrm>
           <a:prstGeom prst="rect">
@@ -35953,13 +36898,13 @@
       </p:sp>
       <p:sp>
         <p:nvSpPr>
-          <p:cNvPr id="51" name="Text 49"/>
-          <p:cNvSpPr/>
-          <p:nvPr/>
-        </p:nvSpPr>
-        <p:spPr>
-          <a:xfrm>
-            <a:off x="2542032" y="4023360"/>
+          <p:cNvPr id="49" name="Text 47"/>
+          <p:cNvSpPr/>
+          <p:nvPr/>
+        </p:nvSpPr>
+        <p:spPr>
+          <a:xfrm>
+            <a:off x="4718304" y="4023360"/>
             <a:ext cx="2011680" cy="402336"/>
           </a:xfrm>
           <a:prstGeom prst="rect">
@@ -35984,7 +36929,7 @@
                 <a:ea typeface="Trebuchet MS" pitchFamily="34" charset="-122"/>
                 <a:cs typeface="Trebuchet MS" pitchFamily="34" charset="-120"/>
               </a:rPr>
-              <a:t>heroes</a:t>
+              <a:t>heroine</a:t>
             </a:r>
             <a:endParaRPr lang="en-US" sz="1200" dirty="0"/>
           </a:p>
@@ -35992,13 +36937,13 @@
       </p:sp>
       <p:sp>
         <p:nvSpPr>
-          <p:cNvPr id="52" name="Shape 50"/>
-          <p:cNvSpPr/>
-          <p:nvPr/>
-        </p:nvSpPr>
-        <p:spPr>
-          <a:xfrm>
-            <a:off x="4718304" y="4023360"/>
+          <p:cNvPr id="50" name="Shape 48"/>
+          <p:cNvSpPr/>
+          <p:nvPr/>
+        </p:nvSpPr>
+        <p:spPr>
+          <a:xfrm>
+            <a:off x="6894576" y="4023360"/>
             <a:ext cx="2011680" cy="402336"/>
           </a:xfrm>
           <a:prstGeom prst="rect">
@@ -36019,13 +36964,13 @@
       </p:sp>
       <p:sp>
         <p:nvSpPr>
-          <p:cNvPr id="53" name="Text 51"/>
-          <p:cNvSpPr/>
-          <p:nvPr/>
-        </p:nvSpPr>
-        <p:spPr>
-          <a:xfrm>
-            <a:off x="4718304" y="4023360"/>
+          <p:cNvPr id="51" name="Text 49"/>
+          <p:cNvSpPr/>
+          <p:nvPr/>
+        </p:nvSpPr>
+        <p:spPr>
+          <a:xfrm>
+            <a:off x="6894576" y="4023360"/>
             <a:ext cx="2011680" cy="402336"/>
           </a:xfrm>
           <a:prstGeom prst="rect">
@@ -36050,7 +36995,7 @@
                 <a:ea typeface="Trebuchet MS" pitchFamily="34" charset="-122"/>
                 <a:cs typeface="Trebuchet MS" pitchFamily="34" charset="-120"/>
               </a:rPr>
-              <a:t>heroine</a:t>
+              <a:t>heroism</a:t>
             </a:r>
             <a:endParaRPr lang="en-US" sz="1200" dirty="0"/>
           </a:p>
@@ -36058,13 +37003,13 @@
       </p:sp>
       <p:sp>
         <p:nvSpPr>
-          <p:cNvPr id="54" name="Shape 52"/>
-          <p:cNvSpPr/>
-          <p:nvPr/>
-        </p:nvSpPr>
-        <p:spPr>
-          <a:xfrm>
-            <a:off x="6894576" y="4023360"/>
+          <p:cNvPr id="52" name="Shape 50"/>
+          <p:cNvSpPr/>
+          <p:nvPr/>
+        </p:nvSpPr>
+        <p:spPr>
+          <a:xfrm>
+            <a:off x="365760" y="4498848"/>
             <a:ext cx="2011680" cy="402336"/>
           </a:xfrm>
           <a:prstGeom prst="rect">
@@ -36085,13 +37030,13 @@
       </p:sp>
       <p:sp>
         <p:nvSpPr>
-          <p:cNvPr id="55" name="Text 53"/>
-          <p:cNvSpPr/>
-          <p:nvPr/>
-        </p:nvSpPr>
-        <p:spPr>
-          <a:xfrm>
-            <a:off x="6894576" y="4023360"/>
+          <p:cNvPr id="53" name="Text 51"/>
+          <p:cNvSpPr/>
+          <p:nvPr/>
+        </p:nvSpPr>
+        <p:spPr>
+          <a:xfrm>
+            <a:off x="365760" y="4498848"/>
             <a:ext cx="2011680" cy="402336"/>
           </a:xfrm>
           <a:prstGeom prst="rect">
@@ -36116,7 +37061,7 @@
                 <a:ea typeface="Trebuchet MS" pitchFamily="34" charset="-122"/>
                 <a:cs typeface="Trebuchet MS" pitchFamily="34" charset="-120"/>
               </a:rPr>
-              <a:t>heroic</a:t>
+              <a:t>heroes</a:t>
             </a:r>
             <a:endParaRPr lang="en-US" sz="1200" dirty="0"/>
           </a:p>
@@ -36124,13 +37069,13 @@
       </p:sp>
       <p:sp>
         <p:nvSpPr>
-          <p:cNvPr id="56" name="Shape 54"/>
-          <p:cNvSpPr/>
-          <p:nvPr/>
-        </p:nvSpPr>
-        <p:spPr>
-          <a:xfrm>
-            <a:off x="365760" y="4498848"/>
+          <p:cNvPr id="54" name="Shape 52"/>
+          <p:cNvSpPr/>
+          <p:nvPr/>
+        </p:nvSpPr>
+        <p:spPr>
+          <a:xfrm>
+            <a:off x="2542032" y="4498848"/>
             <a:ext cx="2011680" cy="402336"/>
           </a:xfrm>
           <a:prstGeom prst="rect">
@@ -36151,13 +37096,13 @@
       </p:sp>
       <p:sp>
         <p:nvSpPr>
-          <p:cNvPr id="57" name="Text 55"/>
-          <p:cNvSpPr/>
-          <p:nvPr/>
-        </p:nvSpPr>
-        <p:spPr>
-          <a:xfrm>
-            <a:off x="365760" y="4498848"/>
+          <p:cNvPr id="55" name="Text 53"/>
+          <p:cNvSpPr/>
+          <p:nvPr/>
+        </p:nvSpPr>
+        <p:spPr>
+          <a:xfrm>
+            <a:off x="2542032" y="4498848"/>
             <a:ext cx="2011680" cy="402336"/>
           </a:xfrm>
           <a:prstGeom prst="rect">
@@ -36182,7 +37127,7 @@
                 <a:ea typeface="Trebuchet MS" pitchFamily="34" charset="-122"/>
                 <a:cs typeface="Trebuchet MS" pitchFamily="34" charset="-120"/>
               </a:rPr>
-              <a:t>heroism</a:t>
+              <a:t>heroically</a:t>
             </a:r>
             <a:endParaRPr lang="en-US" sz="1200" dirty="0"/>
           </a:p>
@@ -36190,13 +37135,13 @@
       </p:sp>
       <p:sp>
         <p:nvSpPr>
-          <p:cNvPr id="58" name="Shape 56"/>
-          <p:cNvSpPr/>
-          <p:nvPr/>
-        </p:nvSpPr>
-        <p:spPr>
-          <a:xfrm>
-            <a:off x="2542032" y="4498848"/>
+          <p:cNvPr id="56" name="Shape 54"/>
+          <p:cNvSpPr/>
+          <p:nvPr/>
+        </p:nvSpPr>
+        <p:spPr>
+          <a:xfrm>
+            <a:off x="4718304" y="4498848"/>
             <a:ext cx="2011680" cy="402336"/>
           </a:xfrm>
           <a:prstGeom prst="rect">
@@ -36217,13 +37162,13 @@
       </p:sp>
       <p:sp>
         <p:nvSpPr>
-          <p:cNvPr id="59" name="Text 57"/>
-          <p:cNvSpPr/>
-          <p:nvPr/>
-        </p:nvSpPr>
-        <p:spPr>
-          <a:xfrm>
-            <a:off x="2542032" y="4498848"/>
+          <p:cNvPr id="57" name="Text 55"/>
+          <p:cNvSpPr/>
+          <p:nvPr/>
+        </p:nvSpPr>
+        <p:spPr>
+          <a:xfrm>
+            <a:off x="4718304" y="4498848"/>
             <a:ext cx="2011680" cy="402336"/>
           </a:xfrm>
           <a:prstGeom prst="rect">
@@ -36248,7 +37193,7 @@
                 <a:ea typeface="Trebuchet MS" pitchFamily="34" charset="-122"/>
                 <a:cs typeface="Trebuchet MS" pitchFamily="34" charset="-120"/>
               </a:rPr>
-              <a:t>heroics</a:t>
+              <a:t>antihero</a:t>
             </a:r>
             <a:endParaRPr lang="en-US" sz="1200" dirty="0"/>
           </a:p>
@@ -36256,13 +37201,13 @@
       </p:sp>
       <p:sp>
         <p:nvSpPr>
-          <p:cNvPr id="60" name="Shape 58"/>
-          <p:cNvSpPr/>
-          <p:nvPr/>
-        </p:nvSpPr>
-        <p:spPr>
-          <a:xfrm>
-            <a:off x="4718304" y="4498848"/>
+          <p:cNvPr id="58" name="Shape 56"/>
+          <p:cNvSpPr/>
+          <p:nvPr/>
+        </p:nvSpPr>
+        <p:spPr>
+          <a:xfrm>
+            <a:off x="6894576" y="4498848"/>
             <a:ext cx="2011680" cy="402336"/>
           </a:xfrm>
           <a:prstGeom prst="rect">
@@ -36283,73 +37228,7 @@
       </p:sp>
       <p:sp>
         <p:nvSpPr>
-          <p:cNvPr id="61" name="Text 59"/>
-          <p:cNvSpPr/>
-          <p:nvPr/>
-        </p:nvSpPr>
-        <p:spPr>
-          <a:xfrm>
-            <a:off x="4718304" y="4498848"/>
-            <a:ext cx="2011680" cy="402336"/>
-          </a:xfrm>
-          <a:prstGeom prst="rect">
-            <a:avLst/>
-          </a:prstGeom>
-          <a:noFill/>
-          <a:ln/>
-        </p:spPr>
-        <p:txBody>
-          <a:bodyPr wrap="square" lIns="0" tIns="0" rIns="0" bIns="0" rtlCol="0" anchor="ctr"/>
-          <a:lstStyle/>
-          <a:p>
-            <a:pPr algn="ctr" indent="0" marL="0">
-              <a:buNone/>
-            </a:pPr>
-            <a:r>
-              <a:rPr lang="en-US" sz="1200" b="1" dirty="0">
-                <a:solidFill>
-                  <a:srgbClr val="4338CA"/>
-                </a:solidFill>
-                <a:latin typeface="Trebuchet MS" pitchFamily="34" charset="0"/>
-                <a:ea typeface="Trebuchet MS" pitchFamily="34" charset="-122"/>
-                <a:cs typeface="Trebuchet MS" pitchFamily="34" charset="-120"/>
-              </a:rPr>
-              <a:t>antihero</a:t>
-            </a:r>
-            <a:endParaRPr lang="en-US" sz="1200" dirty="0"/>
-          </a:p>
-        </p:txBody>
-      </p:sp>
-      <p:sp>
-        <p:nvSpPr>
-          <p:cNvPr id="62" name="Shape 60"/>
-          <p:cNvSpPr/>
-          <p:nvPr/>
-        </p:nvSpPr>
-        <p:spPr>
-          <a:xfrm>
-            <a:off x="6894576" y="4498848"/>
-            <a:ext cx="2011680" cy="402336"/>
-          </a:xfrm>
-          <a:prstGeom prst="rect">
-            <a:avLst>
-              <a:gd name="adj" fmla="val 13636"/>
-            </a:avLst>
-          </a:prstGeom>
-          <a:solidFill>
-            <a:srgbClr val="EEF2FF"/>
-          </a:solidFill>
-          <a:ln w="12700">
-            <a:solidFill>
-              <a:srgbClr val="6366F1"/>
-            </a:solidFill>
-            <a:prstDash val="solid"/>
-          </a:ln>
-        </p:spPr>
-      </p:sp>
-      <p:sp>
-        <p:nvSpPr>
-          <p:cNvPr id="63" name="Text 61"/>
+          <p:cNvPr id="59" name="Text 57"/>
           <p:cNvSpPr/>
           <p:nvPr/>
         </p:nvSpPr>
@@ -37568,7 +38447,7 @@
                 <a:ea typeface="Calibri" pitchFamily="34" charset="-122"/>
                 <a:cs typeface="Calibri" pitchFamily="34" charset="-120"/>
               </a:rPr>
-              <a:t>1.  The root 'hero' comes from the Greek word 'heros'.</a:t>
+              <a:t>1.  A superhero is a hero with special powers.</a:t>
             </a:r>
             <a:endParaRPr lang="en-US" sz="1300" dirty="0"/>
           </a:p>
@@ -37707,7 +38586,7 @@
                 <a:ea typeface="Calibri" pitchFamily="34" charset="-122"/>
                 <a:cs typeface="Calibri" pitchFamily="34" charset="-120"/>
               </a:rPr>
-              <a:t>2.  The word 'heroic' means being cowardly and afraid.</a:t>
+              <a:t>2.  An antihero is a type of character who is different from a typical hero.</a:t>
             </a:r>
             <a:endParaRPr lang="en-US" sz="1300" dirty="0"/>
           </a:p>
@@ -37730,11 +38609,11 @@
             </a:avLst>
           </a:prstGeom>
           <a:solidFill>
-            <a:srgbClr val="FEE2E2"/>
-          </a:solidFill>
-          <a:ln w="12700">
-            <a:solidFill>
-              <a:srgbClr val="DC2626"/>
+            <a:srgbClr val="DCFCE7"/>
+          </a:solidFill>
+          <a:ln w="12700">
+            <a:solidFill>
+              <a:srgbClr val="16A34A"/>
             </a:solidFill>
             <a:prstDash val="solid"/>
           </a:ln>
@@ -37767,13 +38646,13 @@
             <a:r>
               <a:rPr lang="en-US" sz="1100" b="1" dirty="0">
                 <a:solidFill>
-                  <a:srgbClr val="DC2626"/>
+                  <a:srgbClr val="16A34A"/>
                 </a:solidFill>
                 <a:latin typeface="Trebuchet MS" pitchFamily="34" charset="0"/>
                 <a:ea typeface="Trebuchet MS" pitchFamily="34" charset="-122"/>
                 <a:cs typeface="Trebuchet MS" pitchFamily="34" charset="-120"/>
               </a:rPr>
-              <a:t>FALSE</a:t>
+              <a:t>TRUE</a:t>
             </a:r>
             <a:endParaRPr lang="en-US" sz="1100" dirty="0"/>
           </a:p>
@@ -37846,7 +38725,7 @@
                 <a:ea typeface="Calibri" pitchFamily="34" charset="-122"/>
                 <a:cs typeface="Calibri" pitchFamily="34" charset="-120"/>
               </a:rPr>
-              <a:t>3.  A superhero is a type of hero with special or extraordinary powers.</a:t>
+              <a:t>3.  The suffix '-ism' means 'to do again'.</a:t>
             </a:r>
             <a:endParaRPr lang="en-US" sz="1300" dirty="0"/>
           </a:p>
@@ -37869,11 +38748,11 @@
             </a:avLst>
           </a:prstGeom>
           <a:solidFill>
-            <a:srgbClr val="DCFCE7"/>
-          </a:solidFill>
-          <a:ln w="12700">
-            <a:solidFill>
-              <a:srgbClr val="16A34A"/>
+            <a:srgbClr val="FEE2E2"/>
+          </a:solidFill>
+          <a:ln w="12700">
+            <a:solidFill>
+              <a:srgbClr val="DC2626"/>
             </a:solidFill>
             <a:prstDash val="solid"/>
           </a:ln>
@@ -37906,13 +38785,13 @@
             <a:r>
               <a:rPr lang="en-US" sz="1100" b="1" dirty="0">
                 <a:solidFill>
-                  <a:srgbClr val="16A34A"/>
+                  <a:srgbClr val="DC2626"/>
                 </a:solidFill>
                 <a:latin typeface="Trebuchet MS" pitchFamily="34" charset="0"/>
                 <a:ea typeface="Trebuchet MS" pitchFamily="34" charset="-122"/>
                 <a:cs typeface="Trebuchet MS" pitchFamily="34" charset="-120"/>
               </a:rPr>
-              <a:t>TRUE</a:t>
+              <a:t>FALSE</a:t>
             </a:r>
             <a:endParaRPr lang="en-US" sz="1100" dirty="0"/>
           </a:p>
@@ -37985,7 +38864,7 @@
                 <a:ea typeface="Calibri" pitchFamily="34" charset="-122"/>
                 <a:cs typeface="Calibri" pitchFamily="34" charset="-120"/>
               </a:rPr>
-              <a:t>4.  The word 'heroine' refers to a brave or admired female character.</a:t>
+              <a:t>4.  The word 'heroic' means being cowardly and afraid.</a:t>
             </a:r>
             <a:endParaRPr lang="en-US" sz="1300" dirty="0"/>
           </a:p>
@@ -38008,11 +38887,11 @@
             </a:avLst>
           </a:prstGeom>
           <a:solidFill>
-            <a:srgbClr val="DCFCE7"/>
-          </a:solidFill>
-          <a:ln w="12700">
-            <a:solidFill>
-              <a:srgbClr val="16A34A"/>
+            <a:srgbClr val="FEE2E2"/>
+          </a:solidFill>
+          <a:ln w="12700">
+            <a:solidFill>
+              <a:srgbClr val="DC2626"/>
             </a:solidFill>
             <a:prstDash val="solid"/>
           </a:ln>
@@ -38045,13 +38924,13 @@
             <a:r>
               <a:rPr lang="en-US" sz="1100" b="1" dirty="0">
                 <a:solidFill>
-                  <a:srgbClr val="16A34A"/>
+                  <a:srgbClr val="DC2626"/>
                 </a:solidFill>
                 <a:latin typeface="Trebuchet MS" pitchFamily="34" charset="0"/>
                 <a:ea typeface="Trebuchet MS" pitchFamily="34" charset="-122"/>
                 <a:cs typeface="Trebuchet MS" pitchFamily="34" charset="-120"/>
               </a:rPr>
-              <a:t>TRUE</a:t>
+              <a:t>FALSE</a:t>
             </a:r>
             <a:endParaRPr lang="en-US" sz="1100" dirty="0"/>
           </a:p>
@@ -38124,7 +39003,7 @@
                 <a:ea typeface="Calibri" pitchFamily="34" charset="-122"/>
                 <a:cs typeface="Calibri" pitchFamily="34" charset="-120"/>
               </a:rPr>
-              <a:t>5.  The prefix 'anti' in 'antihero' means 'with' or 'together'.</a:t>
+              <a:t>5.  The root 'hero' comes from the Greek word 'heros'.</a:t>
             </a:r>
             <a:endParaRPr lang="en-US" sz="1300" dirty="0"/>
           </a:p>
@@ -38147,11 +39026,11 @@
             </a:avLst>
           </a:prstGeom>
           <a:solidFill>
-            <a:srgbClr val="FEE2E2"/>
-          </a:solidFill>
-          <a:ln w="12700">
-            <a:solidFill>
-              <a:srgbClr val="DC2626"/>
+            <a:srgbClr val="DCFCE7"/>
+          </a:solidFill>
+          <a:ln w="12700">
+            <a:solidFill>
+              <a:srgbClr val="16A34A"/>
             </a:solidFill>
             <a:prstDash val="solid"/>
           </a:ln>
@@ -38184,13 +39063,13 @@
             <a:r>
               <a:rPr lang="en-US" sz="1100" b="1" dirty="0">
                 <a:solidFill>
-                  <a:srgbClr val="DC2626"/>
+                  <a:srgbClr val="16A34A"/>
                 </a:solidFill>
                 <a:latin typeface="Trebuchet MS" pitchFamily="34" charset="0"/>
                 <a:ea typeface="Trebuchet MS" pitchFamily="34" charset="-122"/>
                 <a:cs typeface="Trebuchet MS" pitchFamily="34" charset="-120"/>
               </a:rPr>
-              <a:t>FALSE</a:t>
+              <a:t>TRUE</a:t>
             </a:r>
             <a:endParaRPr lang="en-US" sz="1100" dirty="0"/>
           </a:p>
@@ -38829,7 +39708,7 @@
                 <a:ea typeface="Trebuchet MS" pitchFamily="34" charset="-122"/>
                 <a:cs typeface="Trebuchet MS" pitchFamily="34" charset="-120"/>
               </a:rPr>
-              <a:t>heroes</a:t>
+              <a:t>heroic</a:t>
             </a:r>
             <a:endParaRPr lang="en-US" sz="1300" dirty="0"/>
           </a:p>
@@ -38961,7 +39840,7 @@
                 <a:ea typeface="Trebuchet MS" pitchFamily="34" charset="-122"/>
                 <a:cs typeface="Trebuchet MS" pitchFamily="34" charset="-120"/>
               </a:rPr>
-              <a:t>heroic</a:t>
+              <a:t>heroism</a:t>
             </a:r>
             <a:endParaRPr lang="en-US" sz="1300" dirty="0"/>
           </a:p>
@@ -39027,7 +39906,7 @@
                 <a:ea typeface="Trebuchet MS" pitchFamily="34" charset="-122"/>
                 <a:cs typeface="Trebuchet MS" pitchFamily="34" charset="-120"/>
               </a:rPr>
-              <a:t>heroism</a:t>
+              <a:t>heroes</a:t>
             </a:r>
             <a:endParaRPr lang="en-US" sz="1300" dirty="0"/>
           </a:p>
@@ -39093,7 +39972,7 @@
                 <a:ea typeface="Trebuchet MS" pitchFamily="34" charset="-122"/>
                 <a:cs typeface="Trebuchet MS" pitchFamily="34" charset="-120"/>
               </a:rPr>
-              <a:t>heroics</a:t>
+              <a:t>heroically</a:t>
             </a:r>
             <a:endParaRPr lang="en-US" sz="1300" dirty="0"/>
           </a:p>
@@ -39880,7 +40759,7 @@
                 <a:ea typeface="Trebuchet MS" pitchFamily="34" charset="-122"/>
                 <a:cs typeface="Trebuchet MS" pitchFamily="34" charset="-120"/>
               </a:rPr>
-              <a:t>-ess</a:t>
+              <a:t>-ic</a:t>
             </a:r>
             <a:endParaRPr lang="en-US" sz="1300" dirty="0"/>
           </a:p>
@@ -39944,7 +40823,7 @@
                 <a:ea typeface="Trebuchet MS" pitchFamily="34" charset="-122"/>
                 <a:cs typeface="Trebuchet MS" pitchFamily="34" charset="-120"/>
               </a:rPr>
-              <a:t>non-</a:t>
+              <a:t>un-</a:t>
             </a:r>
             <a:endParaRPr lang="en-US" sz="1300" dirty="0"/>
           </a:p>
@@ -40033,7 +40912,7 @@
                 <a:ea typeface="Trebuchet MS" pitchFamily="34" charset="-122"/>
                 <a:cs typeface="Trebuchet MS" pitchFamily="34" charset="-120"/>
               </a:rPr>
-              <a:t>-ic</a:t>
+              <a:t>-ism</a:t>
             </a:r>
             <a:endParaRPr lang="en-US" sz="1300" dirty="0"/>
           </a:p>
@@ -40097,7 +40976,7 @@
                 <a:ea typeface="Trebuchet MS" pitchFamily="34" charset="-122"/>
                 <a:cs typeface="Trebuchet MS" pitchFamily="34" charset="-120"/>
               </a:rPr>
-              <a:t>pseudo-</a:t>
+              <a:t>super-</a:t>
             </a:r>
             <a:endParaRPr lang="en-US" sz="1300" dirty="0"/>
           </a:p>
@@ -40186,7 +41065,7 @@
                 <a:ea typeface="Trebuchet MS" pitchFamily="34" charset="-122"/>
                 <a:cs typeface="Trebuchet MS" pitchFamily="34" charset="-120"/>
               </a:rPr>
-              <a:t>-ically</a:t>
+              <a:t>-ine</a:t>
             </a:r>
             <a:endParaRPr lang="en-US" sz="1300" dirty="0"/>
           </a:p>
@@ -40250,7 +41129,7 @@
                 <a:ea typeface="Trebuchet MS" pitchFamily="34" charset="-122"/>
                 <a:cs typeface="Trebuchet MS" pitchFamily="34" charset="-120"/>
               </a:rPr>
-              <a:t>super-</a:t>
+              <a:t>pro-</a:t>
             </a:r>
             <a:endParaRPr lang="en-US" sz="1300" dirty="0"/>
           </a:p>
@@ -40403,7 +41282,7 @@
                 <a:ea typeface="Trebuchet MS" pitchFamily="34" charset="-122"/>
                 <a:cs typeface="Trebuchet MS" pitchFamily="34" charset="-120"/>
               </a:rPr>
-              <a:t>un-</a:t>
+              <a:t>pseudo-</a:t>
             </a:r>
             <a:endParaRPr lang="en-US" sz="1300" dirty="0"/>
           </a:p>
@@ -40492,7 +41371,7 @@
                 <a:ea typeface="Trebuchet MS" pitchFamily="34" charset="-122"/>
                 <a:cs typeface="Trebuchet MS" pitchFamily="34" charset="-120"/>
               </a:rPr>
-              <a:t>-ism</a:t>
+              <a:t>-ically</a:t>
             </a:r>
             <a:endParaRPr lang="en-US" sz="1300" dirty="0"/>
           </a:p>
@@ -40500,127 +41379,13 @@
       </p:sp>
       <p:sp>
         <p:nvSpPr>
-          <p:cNvPr id="43" name="Shape 41"/>
-          <p:cNvSpPr/>
-          <p:nvPr/>
-        </p:nvSpPr>
-        <p:spPr>
-          <a:xfrm>
-            <a:off x="640080" y="4041648"/>
-            <a:ext cx="1463040" cy="420624"/>
-          </a:xfrm>
-          <a:prstGeom prst="rect">
-            <a:avLst/>
-          </a:prstGeom>
-          <a:solidFill>
-            <a:srgbClr val="F1F5F9"/>
-          </a:solidFill>
-          <a:ln w="12700">
-            <a:solidFill>
-              <a:srgbClr val="E5E7EB"/>
-            </a:solidFill>
-            <a:prstDash val="solid"/>
-          </a:ln>
-        </p:spPr>
-      </p:sp>
-      <p:sp>
-        <p:nvSpPr>
-          <p:cNvPr id="44" name="Shape 42"/>
-          <p:cNvSpPr/>
-          <p:nvPr/>
-        </p:nvSpPr>
-        <p:spPr>
-          <a:xfrm>
-            <a:off x="3291840" y="4041648"/>
-            <a:ext cx="1645920" cy="420624"/>
-          </a:xfrm>
-          <a:prstGeom prst="rect">
-            <a:avLst/>
-          </a:prstGeom>
-          <a:solidFill>
-            <a:srgbClr val="F1F5F9"/>
-          </a:solidFill>
-          <a:ln w="12700">
-            <a:solidFill>
-              <a:srgbClr val="E5E7EB"/>
-            </a:solidFill>
-            <a:prstDash val="solid"/>
-          </a:ln>
-        </p:spPr>
-      </p:sp>
-      <p:sp>
-        <p:nvSpPr>
-          <p:cNvPr id="45" name="Shape 43"/>
-          <p:cNvSpPr/>
-          <p:nvPr/>
-        </p:nvSpPr>
-        <p:spPr>
-          <a:xfrm>
-            <a:off x="5943600" y="4041648"/>
-            <a:ext cx="1463040" cy="420624"/>
-          </a:xfrm>
-          <a:prstGeom prst="rect">
-            <a:avLst/>
-          </a:prstGeom>
-          <a:solidFill>
-            <a:srgbClr val="FCE7F3"/>
-          </a:solidFill>
-          <a:ln w="12700">
-            <a:solidFill>
-              <a:srgbClr val="E5E7EB"/>
-            </a:solidFill>
-            <a:prstDash val="solid"/>
-          </a:ln>
-        </p:spPr>
-      </p:sp>
-      <p:sp>
-        <p:nvSpPr>
-          <p:cNvPr id="46" name="Text 44"/>
-          <p:cNvSpPr/>
-          <p:nvPr/>
-        </p:nvSpPr>
-        <p:spPr>
-          <a:xfrm>
-            <a:off x="5943600" y="4041648"/>
-            <a:ext cx="1463040" cy="420624"/>
-          </a:xfrm>
-          <a:prstGeom prst="rect">
-            <a:avLst/>
-          </a:prstGeom>
-          <a:noFill/>
-          <a:ln/>
-        </p:spPr>
-        <p:txBody>
-          <a:bodyPr wrap="square" lIns="0" tIns="0" rIns="0" bIns="0" rtlCol="0" anchor="ctr"/>
-          <a:lstStyle/>
-          <a:p>
-            <a:pPr algn="ctr" indent="0" marL="0">
-              <a:buNone/>
-            </a:pPr>
-            <a:r>
-              <a:rPr lang="en-US" sz="1300" b="1" dirty="0">
-                <a:solidFill>
-                  <a:srgbClr val="9D174D"/>
-                </a:solidFill>
-                <a:latin typeface="Trebuchet MS" pitchFamily="34" charset="0"/>
-                <a:ea typeface="Trebuchet MS" pitchFamily="34" charset="-122"/>
-                <a:cs typeface="Trebuchet MS" pitchFamily="34" charset="-120"/>
-              </a:rPr>
-              <a:t>-ine</a:t>
-            </a:r>
-            <a:endParaRPr lang="en-US" sz="1300" dirty="0"/>
-          </a:p>
-        </p:txBody>
-      </p:sp>
-      <p:sp>
-        <p:nvSpPr>
-          <p:cNvPr id="47" name="Text 45"/>
-          <p:cNvSpPr/>
-          <p:nvPr/>
-        </p:nvSpPr>
-        <p:spPr>
-          <a:xfrm>
-            <a:off x="365760" y="4636008"/>
+          <p:cNvPr id="43" name="Text 41"/>
+          <p:cNvSpPr/>
+          <p:nvPr/>
+        </p:nvSpPr>
+        <p:spPr>
+          <a:xfrm>
+            <a:off x="365760" y="4178808"/>
             <a:ext cx="1097280" cy="420624"/>
           </a:xfrm>
           <a:prstGeom prst="rect">
@@ -40653,13 +41418,13 @@
       </p:sp>
       <p:sp>
         <p:nvSpPr>
-          <p:cNvPr id="48" name="Shape 46"/>
-          <p:cNvSpPr/>
-          <p:nvPr/>
-        </p:nvSpPr>
-        <p:spPr>
-          <a:xfrm>
-            <a:off x="1508760" y="4636008"/>
+          <p:cNvPr id="44" name="Shape 42"/>
+          <p:cNvSpPr/>
+          <p:nvPr/>
+        </p:nvSpPr>
+        <p:spPr>
+          <a:xfrm>
+            <a:off x="1508760" y="4178808"/>
             <a:ext cx="1097280" cy="420624"/>
           </a:xfrm>
           <a:prstGeom prst="rect">
@@ -40687,13 +41452,13 @@
       </p:sp>
       <p:sp>
         <p:nvSpPr>
-          <p:cNvPr id="49" name="Text 47"/>
-          <p:cNvSpPr/>
-          <p:nvPr/>
-        </p:nvSpPr>
-        <p:spPr>
-          <a:xfrm>
-            <a:off x="1508760" y="4636008"/>
+          <p:cNvPr id="45" name="Text 43"/>
+          <p:cNvSpPr/>
+          <p:nvPr/>
+        </p:nvSpPr>
+        <p:spPr>
+          <a:xfrm>
+            <a:off x="1508760" y="4178808"/>
             <a:ext cx="1097280" cy="420624"/>
           </a:xfrm>
           <a:prstGeom prst="rect">
@@ -40726,13 +41491,13 @@
       </p:sp>
       <p:sp>
         <p:nvSpPr>
-          <p:cNvPr id="50" name="Text 48"/>
-          <p:cNvSpPr/>
-          <p:nvPr/>
-        </p:nvSpPr>
-        <p:spPr>
-          <a:xfrm>
-            <a:off x="2633472" y="4636008"/>
+          <p:cNvPr id="46" name="Text 44"/>
+          <p:cNvSpPr/>
+          <p:nvPr/>
+        </p:nvSpPr>
+        <p:spPr>
+          <a:xfrm>
+            <a:off x="2633472" y="4178808"/>
             <a:ext cx="320040" cy="420624"/>
           </a:xfrm>
           <a:prstGeom prst="rect">
@@ -40765,13 +41530,13 @@
       </p:sp>
       <p:sp>
         <p:nvSpPr>
-          <p:cNvPr id="51" name="Shape 49"/>
-          <p:cNvSpPr/>
-          <p:nvPr/>
-        </p:nvSpPr>
-        <p:spPr>
-          <a:xfrm>
-            <a:off x="2980944" y="4636008"/>
+          <p:cNvPr id="47" name="Shape 45"/>
+          <p:cNvSpPr/>
+          <p:nvPr/>
+        </p:nvSpPr>
+        <p:spPr>
+          <a:xfrm>
+            <a:off x="2980944" y="4178808"/>
             <a:ext cx="1243584" cy="420624"/>
           </a:xfrm>
           <a:prstGeom prst="rect">
@@ -40799,13 +41564,13 @@
       </p:sp>
       <p:sp>
         <p:nvSpPr>
-          <p:cNvPr id="52" name="Text 50"/>
-          <p:cNvSpPr/>
-          <p:nvPr/>
-        </p:nvSpPr>
-        <p:spPr>
-          <a:xfrm>
-            <a:off x="2980944" y="4636008"/>
+          <p:cNvPr id="48" name="Text 46"/>
+          <p:cNvSpPr/>
+          <p:nvPr/>
+        </p:nvSpPr>
+        <p:spPr>
+          <a:xfrm>
+            <a:off x="2980944" y="4178808"/>
             <a:ext cx="1243584" cy="420624"/>
           </a:xfrm>
           <a:prstGeom prst="rect">
@@ -40838,13 +41603,13 @@
       </p:sp>
       <p:sp>
         <p:nvSpPr>
-          <p:cNvPr id="53" name="Text 51"/>
-          <p:cNvSpPr/>
-          <p:nvPr/>
-        </p:nvSpPr>
-        <p:spPr>
-          <a:xfrm>
-            <a:off x="4251960" y="4636008"/>
+          <p:cNvPr id="49" name="Text 47"/>
+          <p:cNvSpPr/>
+          <p:nvPr/>
+        </p:nvSpPr>
+        <p:spPr>
+          <a:xfrm>
+            <a:off x="4251960" y="4178808"/>
             <a:ext cx="320040" cy="420624"/>
           </a:xfrm>
           <a:prstGeom prst="rect">
@@ -40877,14 +41642,14 @@
       </p:sp>
       <p:sp>
         <p:nvSpPr>
-          <p:cNvPr id="54" name="Shape 52"/>
-          <p:cNvSpPr/>
-          <p:nvPr/>
-        </p:nvSpPr>
-        <p:spPr>
-          <a:xfrm>
-            <a:off x="4599432" y="4636008"/>
-            <a:ext cx="950976" cy="420624"/>
+          <p:cNvPr id="50" name="Shape 48"/>
+          <p:cNvSpPr/>
+          <p:nvPr/>
+        </p:nvSpPr>
+        <p:spPr>
+          <a:xfrm>
+            <a:off x="4599432" y="4178808"/>
+            <a:ext cx="822960" cy="420624"/>
           </a:xfrm>
           <a:prstGeom prst="rect">
             <a:avLst>
@@ -40911,14 +41676,14 @@
       </p:sp>
       <p:sp>
         <p:nvSpPr>
-          <p:cNvPr id="55" name="Text 53"/>
-          <p:cNvSpPr/>
-          <p:nvPr/>
-        </p:nvSpPr>
-        <p:spPr>
-          <a:xfrm>
-            <a:off x="4599432" y="4636008"/>
-            <a:ext cx="950976" cy="420624"/>
+          <p:cNvPr id="51" name="Text 49"/>
+          <p:cNvSpPr/>
+          <p:nvPr/>
+        </p:nvSpPr>
+        <p:spPr>
+          <a:xfrm>
+            <a:off x="4599432" y="4178808"/>
+            <a:ext cx="822960" cy="420624"/>
           </a:xfrm>
           <a:prstGeom prst="rect">
             <a:avLst/>
@@ -40942,7 +41707,7 @@
                 <a:ea typeface="Trebuchet MS" pitchFamily="34" charset="-122"/>
                 <a:cs typeface="Trebuchet MS" pitchFamily="34" charset="-120"/>
               </a:rPr>
-              <a:t>-ess</a:t>
+              <a:t>-ic</a:t>
             </a:r>
             <a:endParaRPr lang="en-US" sz="1300" dirty="0"/>
           </a:p>
@@ -40950,13 +41715,13 @@
       </p:sp>
       <p:sp>
         <p:nvSpPr>
-          <p:cNvPr id="56" name="Text 54"/>
-          <p:cNvSpPr/>
-          <p:nvPr/>
-        </p:nvSpPr>
-        <p:spPr>
-          <a:xfrm>
-            <a:off x="5623560" y="4636008"/>
+          <p:cNvPr id="52" name="Text 50"/>
+          <p:cNvSpPr/>
+          <p:nvPr/>
+        </p:nvSpPr>
+        <p:spPr>
+          <a:xfrm>
+            <a:off x="5495544" y="4178808"/>
             <a:ext cx="365760" cy="420624"/>
           </a:xfrm>
           <a:prstGeom prst="rect">
@@ -40989,13 +41754,13 @@
       </p:sp>
       <p:sp>
         <p:nvSpPr>
-          <p:cNvPr id="57" name="Shape 55"/>
-          <p:cNvSpPr/>
-          <p:nvPr/>
-        </p:nvSpPr>
-        <p:spPr>
-          <a:xfrm>
-            <a:off x="6035040" y="4636008"/>
+          <p:cNvPr id="53" name="Shape 51"/>
+          <p:cNvSpPr/>
+          <p:nvPr/>
+        </p:nvSpPr>
+        <p:spPr>
+          <a:xfrm>
+            <a:off x="5907024" y="4178808"/>
             <a:ext cx="2194560" cy="420624"/>
           </a:xfrm>
           <a:prstGeom prst="rect">
@@ -41016,13 +41781,13 @@
       </p:sp>
       <p:sp>
         <p:nvSpPr>
-          <p:cNvPr id="58" name="Text 56"/>
-          <p:cNvSpPr/>
-          <p:nvPr/>
-        </p:nvSpPr>
-        <p:spPr>
-          <a:xfrm>
-            <a:off x="6035040" y="4636008"/>
+          <p:cNvPr id="54" name="Text 52"/>
+          <p:cNvSpPr/>
+          <p:nvPr/>
+        </p:nvSpPr>
+        <p:spPr>
+          <a:xfrm>
+            <a:off x="5907024" y="4178808"/>
             <a:ext cx="2194560" cy="420624"/>
           </a:xfrm>
           <a:prstGeom prst="rect">
@@ -41517,7 +42282,7 @@
                 <a:ea typeface="Calibri" pitchFamily="34" charset="-122"/>
                 <a:cs typeface="Calibri" pitchFamily="34" charset="-120"/>
               </a:rPr>
-              <a:t>Great bravery shown by a person in a difficult or dangerous situation.</a:t>
+              <a:t>More than one hero — a group of brave, admired people.</a:t>
             </a:r>
             <a:endParaRPr lang="en-US" sz="1200" dirty="0"/>
           </a:p>
@@ -41590,7 +42355,7 @@
                 <a:ea typeface="Trebuchet MS" pitchFamily="34" charset="-122"/>
                 <a:cs typeface="Trebuchet MS" pitchFamily="34" charset="-120"/>
               </a:rPr>
-              <a:t>heroes</a:t>
+              <a:t>heroic</a:t>
             </a:r>
             <a:endParaRPr lang="en-US" sz="1200" dirty="0"/>
           </a:p>
@@ -41656,7 +42421,7 @@
                 <a:ea typeface="Calibri" pitchFamily="34" charset="-122"/>
                 <a:cs typeface="Calibri" pitchFamily="34" charset="-120"/>
               </a:rPr>
-              <a:t>A brave or admired girl or woman, often the main character in a story.</a:t>
+              <a:t>A female hero — a brave or admired woman or girl in a story or real life.</a:t>
             </a:r>
             <a:endParaRPr lang="en-US" sz="1200" dirty="0"/>
           </a:p>
@@ -41795,7 +42560,7 @@
                 <a:ea typeface="Calibri" pitchFamily="34" charset="-122"/>
                 <a:cs typeface="Calibri" pitchFamily="34" charset="-120"/>
               </a:rPr>
-              <a:t>Brave or daring actions that someone performs.</a:t>
+              <a:t>Doing something in a very brave and admirable way.</a:t>
             </a:r>
             <a:endParaRPr lang="en-US" sz="1200" dirty="0"/>
           </a:p>
@@ -41868,7 +42633,7 @@
                 <a:ea typeface="Trebuchet MS" pitchFamily="34" charset="-122"/>
                 <a:cs typeface="Trebuchet MS" pitchFamily="34" charset="-120"/>
               </a:rPr>
-              <a:t>heroic</a:t>
+              <a:t>heroism</a:t>
             </a:r>
             <a:endParaRPr lang="en-US" sz="1200" dirty="0"/>
           </a:p>
@@ -41934,7 +42699,7 @@
                 <a:ea typeface="Calibri" pitchFamily="34" charset="-122"/>
                 <a:cs typeface="Calibri" pitchFamily="34" charset="-120"/>
               </a:rPr>
-              <a:t>Acting in a very brave and courageous way.</a:t>
+              <a:t>The quality of being very brave and doing heroic things.</a:t>
             </a:r>
             <a:endParaRPr lang="en-US" sz="1200" dirty="0"/>
           </a:p>
@@ -42007,7 +42772,7 @@
                 <a:ea typeface="Trebuchet MS" pitchFamily="34" charset="-122"/>
                 <a:cs typeface="Trebuchet MS" pitchFamily="34" charset="-120"/>
               </a:rPr>
-              <a:t>heroism</a:t>
+              <a:t>heroes</a:t>
             </a:r>
             <a:endParaRPr lang="en-US" sz="1200" dirty="0"/>
           </a:p>
@@ -42073,7 +42838,7 @@
                 <a:ea typeface="Calibri" pitchFamily="34" charset="-122"/>
                 <a:cs typeface="Calibri" pitchFamily="34" charset="-120"/>
               </a:rPr>
-              <a:t>A brave person who does something great or saves others.</a:t>
+              <a:t>A person who is admired for doing something very brave or good.</a:t>
             </a:r>
             <a:endParaRPr lang="en-US" sz="1200" dirty="0"/>
           </a:p>
@@ -42146,7 +42911,7 @@
                 <a:ea typeface="Trebuchet MS" pitchFamily="34" charset="-122"/>
                 <a:cs typeface="Trebuchet MS" pitchFamily="34" charset="-120"/>
               </a:rPr>
-              <a:t>heroics</a:t>
+              <a:t>heroically</a:t>
             </a:r>
             <a:endParaRPr lang="en-US" sz="1200" dirty="0"/>
           </a:p>
@@ -42212,7 +42977,7 @@
                 <a:ea typeface="Calibri" pitchFamily="34" charset="-122"/>
                 <a:cs typeface="Calibri" pitchFamily="34" charset="-120"/>
               </a:rPr>
-              <a:t>A main character in a story who doesn't have typical hero qualities but is still important.</a:t>
+              <a:t>A main character in a story who is not a typical hero — they may do good things but in the wrong way.</a:t>
             </a:r>
             <a:endParaRPr lang="en-US" sz="1200" dirty="0"/>
           </a:p>
@@ -42351,7 +43116,7 @@
                 <a:ea typeface="Calibri" pitchFamily="34" charset="-122"/>
                 <a:cs typeface="Calibri" pitchFamily="34" charset="-120"/>
               </a:rPr>
-              <a:t>More than one brave or admired person.</a:t>
+              <a:t>Showing great bravery, like something a hero would do.</a:t>
             </a:r>
             <a:endParaRPr lang="en-US" sz="1200" dirty="0"/>
           </a:p>
@@ -42846,7 +43611,7 @@
                 <a:ea typeface="Calibri" pitchFamily="34" charset="-122"/>
                 <a:cs typeface="Calibri" pitchFamily="34" charset="-120"/>
               </a:rPr>
-              <a:t>The firefighter was celebrated as a local hero after rescuing the family from the burning building.</a:t>
+              <a:t>The firefighter was celebrated for her heroic actions during the bushfire.</a:t>
             </a:r>
             <a:endParaRPr lang="en-US" sz="1500" dirty="0"/>
           </a:p>
@@ -43010,7 +43775,7 @@
                 <a:ea typeface="Calibri" pitchFamily="34" charset="-122"/>
                 <a:cs typeface="Calibri" pitchFamily="34" charset="-120"/>
               </a:rPr>
-              <a:t>In the book we are reading, the heroine must travel across dangerous lands to save her village.</a:t>
+              <a:t>In the story, the antihero did questionable things but still managed to save the town.</a:t>
             </a:r>
             <a:endParaRPr lang="en-US" sz="1500" dirty="0"/>
           </a:p>
@@ -43174,7 +43939,7 @@
                 <a:ea typeface="Calibri" pitchFamily="34" charset="-122"/>
                 <a:cs typeface="Calibri" pitchFamily="34" charset="-120"/>
               </a:rPr>
-              <a:t>It took real heroism for the young student to stand up and speak the truth in front of everyone.</a:t>
+              <a:t>The crowd cheered as the superhero swooped down to rescue the trapped children.</a:t>
             </a:r>
             <a:endParaRPr lang="en-US" sz="1500" dirty="0"/>
           </a:p>
